--- a/deliverables/hba1c-event/会場プレゼン_ヘモグロビンA1c_1008.pptx
+++ b/deliverables/hba1c-event/会場プレゼン_ヘモグロビンA1c_1008.pptx
@@ -16,10 +16,9 @@
     <p:sldId id="264" r:id="rId10"/>
     <p:sldId id="265" r:id="rId11"/>
     <p:sldId id="266" r:id="rId12"/>
-    <p:sldId id="267" r:id="rId13"/>
   </p:sldIdLst>
   <p:notesMasterIdLst>
-    <p:notesMasterId r:id="rId14"/>
+    <p:notesMasterId r:id="rId13"/>
   </p:notesMasterIdLst>
   <p:sldSz cx="12192000" cy="6858000"/>
   <p:notesSz cx="6858000" cy="12192000"/>
@@ -118,14 +117,14 @@
   <p:extLst>
     <p:ext uri="{521415D9-36F7-43E2-AB2F-B90AF26B5E84}">
       <p14:sectionLst xmlns:p14="http://schemas.microsoft.com/office/powerpoint/2010/main">
-        <p14:section name="オープニング" id="{a4082094-3368-c771-63b2-a2ccb0236894}">
+        <p14:section name="オープニング" id="{c683dd2a-ab30-dcdd-f267-a3eb17337bd1}">
           <p14:sldIdLst>
             <p14:sldId id="256"/>
             <p14:sldId id="257"/>
             <p14:sldId id="258"/>
           </p14:sldIdLst>
         </p14:section>
-        <p14:section name="調査結果" id="{a0a0fcd2-8459-a36f-1655-5957d7649d52}">
+        <p14:section name="調査結果" id="{9dd0c296-9efd-6320-a89e-04c2309be63a}">
           <p14:sldIdLst>
             <p14:sldId id="259"/>
             <p14:sldId id="260"/>
@@ -133,25 +132,20 @@
             <p14:sldId id="262"/>
           </p14:sldIdLst>
         </p14:section>
-        <p14:section name="解説" id="{a3a24658-ce5c-bde1-60d6-e2fad66f4b57}">
+        <p14:section name="解説" id="{a8130ff7-b149-3dcc-13f0-54617cdd9201}">
           <p14:sldIdLst>
             <p14:sldId id="263"/>
             <p14:sldId id="264"/>
           </p14:sldIdLst>
         </p14:section>
-        <p14:section name="スペシャルトーク" id="{4dac8804-4502-f769-ba68-275f35e28e7b}">
+        <p14:section name="測定方法" id="{92ea8c87-dda2-fde5-0a25-31fb31ce7cd5}">
           <p14:sldIdLst>
             <p14:sldId id="265"/>
           </p14:sldIdLst>
         </p14:section>
-        <p14:section name="測定方法" id="{012d33d8-8270-0830-ee80-f8b190767a56}">
+        <p14:section name="クロージング" id="{d0bac513-3067-0a45-aa1f-2dfe11e63fcd}">
           <p14:sldIdLst>
             <p14:sldId id="266"/>
-          </p14:sldIdLst>
-        </p14:section>
-        <p14:section name="クロージング" id="{33820126-bf78-6c22-6897-cbed7013b8a9}">
-          <p14:sldIdLst>
-            <p14:sldId id="267"/>
           </p14:sldIdLst>
         </p14:section>
       </p14:sectionLst>
@@ -222,7 +216,7 @@
             <c:bubble3D val="0"/>
             <c:spPr>
               <a:solidFill>
-                <a:srgbClr val="B7C6D6"/>
+                <a:srgbClr val="46688C"/>
               </a:solidFill>
               <a:ln w="25400" cap="flat">
                 <a:solidFill>
@@ -338,7 +332,7 @@
           </c:val>
         </c:ser>
         <c:firstSliceAng val="0"/>
-        <c:holeSize val="70"/>
+        <c:holeSize val="74"/>
       </c:doughnutChart>
       <c:spPr>
         <a:noFill/>
@@ -423,7 +417,7 @@
             <c:bubble3D val="0"/>
             <c:spPr>
               <a:solidFill>
-                <a:srgbClr val="F3C9D0"/>
+                <a:srgbClr val="C8102E"/>
               </a:solidFill>
               <a:ln w="25400" cap="flat">
                 <a:solidFill>
@@ -539,7 +533,7 @@
           </c:val>
         </c:ser>
         <c:firstSliceAng val="0"/>
-        <c:holeSize val="70"/>
+        <c:holeSize val="74"/>
       </c:doughnutChart>
       <c:spPr>
         <a:noFill/>
@@ -572,7 +566,17 @@
   <c:chart>
     <c:autoTitleDeleted val="1"/>
     <c:plotArea>
-      <c:layout/>
+      <c:layout>
+        <c:manualLayout>
+          <c:layoutTarget val="inner"/>
+          <c:xMode val="edge"/>
+          <c:yMode val="edge"/>
+          <c:x val="0.19"/>
+          <c:y val="0.01"/>
+          <c:w val="0.79"/>
+          <c:h val="0.9"/>
+        </c:manualLayout>
+      </c:layout>
       <c:barChart>
         <c:barDir val="bar"/>
         <c:grouping val="percentStacked"/>
@@ -1012,7 +1016,7 @@
           <c:showBubbleSize val="0"/>
           <c:showLeaderLines val="0"/>
         </c:dLbls>
-        <c:gapWidth val="45"/>
+        <c:gapWidth val="30"/>
         <c:overlap val="100"/>
         <c:axId val="2094734554"/>
         <c:axId val="2094734552"/>
@@ -1023,7 +1027,7 @@
         <c:scaling>
           <c:orientation val="minMax"/>
         </c:scaling>
-        <c:delete val="0"/>
+        <c:delete val="1"/>
         <c:axPos val="l"/>
         <c:numFmt formatCode="General" sourceLinked="1"/>
         <c:majorTickMark val="out"/>
@@ -1041,11 +1045,11 @@
           <a:lstStyle/>
           <a:p>
             <a:pPr>
-              <a:defRPr sz="1300" b="0" i="0" u="none" strike="noStrike">
-                <a:solidFill>
-                  <a:srgbClr val="262626"/>
-                </a:solidFill>
-                <a:latin typeface="+mn-lt"/>
+              <a:defRPr sz="1200" b="0" i="0" u="none" strike="noStrike">
+                <a:solidFill>
+                  <a:srgbClr val="000000"/>
+                </a:solidFill>
+                <a:latin typeface="Arial"/>
               </a:defRPr>
             </a:pPr>
             <a:endParaRPr lang="en-US"/>
@@ -1091,9 +1095,9 @@
           <a:lstStyle/>
           <a:p>
             <a:pPr>
-              <a:defRPr sz="1100" b="0" i="0" u="none" strike="noStrike">
-                <a:solidFill>
-                  <a:srgbClr val="7A7A7A"/>
+              <a:defRPr sz="1300" b="0" i="0" u="none" strike="noStrike">
+                <a:solidFill>
+                  <a:srgbClr val="4A4A4A"/>
                 </a:solidFill>
                 <a:latin typeface="+mn-lt"/>
               </a:defRPr>
@@ -1113,26 +1117,6 @@
         <a:effectLst/>
       </c:spPr>
     </c:plotArea>
-    <c:legend>
-      <c:legendPos val="t"/>
-      <c:overlay val="0"/>
-      <c:txPr>
-        <a:bodyPr/>
-        <a:lstStyle/>
-        <a:p>
-          <a:pPr>
-            <a:defRPr sz="1300">
-              <a:solidFill>
-                <a:srgbClr val="4A4A4A"/>
-              </a:solidFill>
-              <a:latin typeface="+mn-lt"/>
-              <a:cs typeface="+mn-lt"/>
-            </a:defRPr>
-          </a:pPr>
-          <a:endParaRPr lang="en-US"/>
-        </a:p>
-      </c:txPr>
-    </c:legend>
     <c:plotVisOnly val="1"/>
     <c:dispBlanksAs val="span"/>
   </c:chart>
@@ -1191,7 +1175,7 @@
             <c:bubble3D val="0"/>
             <c:spPr>
               <a:solidFill>
-                <a:srgbClr val="F3C9D0"/>
+                <a:srgbClr val="B7C6D6"/>
               </a:solidFill>
               <a:ln w="25400" cap="flat">
                 <a:solidFill>
@@ -1208,7 +1192,7 @@
             <c:bubble3D val="0"/>
             <c:spPr>
               <a:solidFill>
-                <a:srgbClr val="B7C6D6"/>
+                <a:srgbClr val="C8102E"/>
               </a:solidFill>
               <a:ln w="25400" cap="flat">
                 <a:solidFill>
@@ -1300,10 +1284,10 @@
               <c:strCache>
                 <c:ptCount val="2"/>
                 <c:pt idx="0">
-                  <c:v>HbA1c</c:v>
+                  <c:v>血糖値</c:v>
                 </c:pt>
                 <c:pt idx="1">
-                  <c:v>血糖値</c:v>
+                  <c:v>HbA1c</c:v>
                 </c:pt>
               </c:strCache>
             </c:strRef>
@@ -1314,17 +1298,17 @@
               <c:numCache>
                 <c:ptCount val="2"/>
                 <c:pt idx="0">
-                  <c:v>29.2</c:v>
+                  <c:v>70.8</c:v>
                 </c:pt>
                 <c:pt idx="1">
-                  <c:v>70.8</c:v>
+                  <c:v>29.2</c:v>
                 </c:pt>
               </c:numCache>
             </c:numRef>
           </c:val>
         </c:ser>
         <c:firstSliceAng val="0"/>
-        <c:holeSize val="70"/>
+        <c:holeSize val="74"/>
       </c:doughnutChart>
       <c:spPr>
         <a:noFill/>
@@ -1525,7 +1509,7 @@
           </c:val>
         </c:ser>
         <c:firstSliceAng val="0"/>
-        <c:holeSize val="70"/>
+        <c:holeSize val="74"/>
       </c:doughnutChart>
       <c:spPr>
         <a:noFill/>
@@ -2034,7 +2018,7 @@
           <a:p>
             <a:r>
               <a:rPr lang="en-US" dirty="0"/>
-              <a:t>鳴戸親方のHbA1c 9.4 → 5.2。（※時期・経緯などの補足は親方・事務局にご確認ください）</a:t>
+              <a:t>ヘモグロビンA1cは、健康診断のオプション、「ゆびさきナビ」で検索できるゆびさきセルフ測定室（薬局など）、自宅での簡易検査キットで測定できる。※ご自宅の写真はダミー。差し替え予定。</a:t>
             </a:r>
             <a:endParaRPr lang="en-US" dirty="0"/>
           </a:p>
@@ -2122,7 +2106,7 @@
           <a:p>
             <a:r>
               <a:rPr lang="en-US" dirty="0"/>
-              <a:t>ヘモグロビンA1cは、健康診断のオプション、「ゆびさきナビ」で検索できるゆびさきセルフ測定室（薬局など）、自宅での簡易検査キットで測定できる。※ご自宅の写真はダミー。差し替え予定。</a:t>
+              <a:t>クロージング。</a:t>
             </a:r>
             <a:endParaRPr lang="en-US" dirty="0"/>
           </a:p>
@@ -2146,94 +2130,6 @@
             <a:fld id="{F7021451-1387-4CA6-816F-3879F97B5CBC}" type="slidenum">
               <a:rPr lang="en-US"/>
               <a:t>11</a:t>
-            </a:fld>
-            <a:endParaRPr lang="en-US"/>
-          </a:p>
-        </p:txBody>
-      </p:sp>
-    </p:spTree>
-    <p:extLst>
-      <p:ext uri="{BB962C8B-B14F-4D97-AF65-F5344CB8AC3E}">
-        <p14:creationId xmlns:p14="http://schemas.microsoft.com/office/powerpoint/2010/main" val="1024086991"/>
-      </p:ext>
-    </p:extLst>
-  </p:cSld>
-  <p:clrMapOvr>
-    <a:masterClrMapping/>
-  </p:clrMapOvr>
-</p:notes>
-</file>
-
-<file path=ppt/notesSlides/notesSlide12.xml><?xml version="1.0" encoding="utf-8"?>
-<p:notes xmlns:a="http://schemas.openxmlformats.org/drawingml/2006/main" xmlns:r="http://schemas.openxmlformats.org/officeDocument/2006/relationships" xmlns:p="http://schemas.openxmlformats.org/presentationml/2006/main">
-  <p:cSld>
-    <p:spTree>
-      <p:nvGrpSpPr>
-        <p:cNvPr id="1" name=""/>
-        <p:cNvGrpSpPr/>
-        <p:nvPr/>
-      </p:nvGrpSpPr>
-      <p:grpSpPr>
-        <a:xfrm>
-          <a:off x="0" y="0"/>
-          <a:ext cx="0" cy="0"/>
-          <a:chOff x="0" y="0"/>
-          <a:chExt cx="0" cy="0"/>
-        </a:xfrm>
-      </p:grpSpPr>
-      <p:sp>
-        <p:nvSpPr>
-          <p:cNvPr id="2" name="Slide Image Placeholder 1"/>
-          <p:cNvSpPr>
-            <a:spLocks noGrp="1" noRot="1" noChangeAspect="1"/>
-          </p:cNvSpPr>
-          <p:nvPr>
-            <p:ph type="sldImg"/>
-          </p:nvPr>
-        </p:nvSpPr>
-        <p:spPr/>
-      </p:sp>
-      <p:sp>
-        <p:nvSpPr>
-          <p:cNvPr id="3" name="Notes Placeholder 2"/>
-          <p:cNvSpPr>
-            <a:spLocks noGrp="1"/>
-          </p:cNvSpPr>
-          <p:nvPr>
-            <p:ph type="body" idx="1"/>
-          </p:nvPr>
-        </p:nvSpPr>
-        <p:spPr/>
-        <p:txBody>
-          <a:bodyPr/>
-          <a:lstStyle/>
-          <a:p>
-            <a:r>
-              <a:rPr lang="en-US" dirty="0"/>
-              <a:t>クロージング。</a:t>
-            </a:r>
-            <a:endParaRPr lang="en-US" dirty="0"/>
-          </a:p>
-        </p:txBody>
-      </p:sp>
-      <p:sp>
-        <p:nvSpPr>
-          <p:cNvPr id="4" name="Slide Number Placeholder 3"/>
-          <p:cNvSpPr>
-            <a:spLocks noGrp="1"/>
-          </p:cNvSpPr>
-          <p:nvPr>
-            <p:ph type="sldNum" sz="quarter" idx="10"/>
-          </p:nvPr>
-        </p:nvSpPr>
-        <p:spPr/>
-        <p:txBody>
-          <a:bodyPr/>
-          <a:lstStyle/>
-          <a:p>
-            <a:fld id="{F7021451-1387-4CA6-816F-3879F97B5CBC}" type="slidenum">
-              <a:rPr lang="en-US"/>
-              <a:t>12</a:t>
             </a:fld>
             <a:endParaRPr lang="en-US"/>
           </a:p>
@@ -2298,7 +2194,7 @@
           <a:p>
             <a:r>
               <a:rPr lang="en-US" dirty="0"/>
-              <a:t>本日の構成：主催団体の紹介、医師・生活者調査の発表、ヘモグロビンA1cをテーマにしたスペシャルトーク。</a:t>
+              <a:t>本日の構成：主催団体の紹介と、医師・生活者調査の発表。医師が血糖値より重視する指標は「ヘモグロビンA1c」。</a:t>
             </a:r>
             <a:endParaRPr lang="en-US" dirty="0"/>
           </a:p>
@@ -2386,7 +2282,7 @@
           <a:p>
             <a:r>
               <a:rPr lang="en-US" dirty="0"/>
-              <a:t>登壇者紹介。元大関 琴欧州の鳴戸親方、一之江駅前ひまわり医院の伊藤大介医師。</a:t>
+              <a:t>登壇者紹介。元大関 琴欧州の鳴戸親方（写真左）、一之江駅前ひまわり医院の伊藤大介医師（写真右）。</a:t>
             </a:r>
             <a:endParaRPr lang="en-US" dirty="0"/>
           </a:p>
@@ -2474,7 +2370,7 @@
           <a:p>
             <a:r>
               <a:rPr lang="en-US" dirty="0"/>
-              <a:t>医師の87.0%は健康診断で患者に「HbA1c」をより見てほしいと回答。一方、生活者の68.7%は糖尿病リスクの把握で「血糖値」をより重視。医師n=331、生活者n=310。</a:t>
+              <a:t>医師の87.0%は健康診断で患者に「ヘモグロビンA1c」をより見てほしいと回答。一方、生活者の68.7%は糖尿病リスクの把握で「血糖値」をより重視。医師n=331、生活者n=310。</a:t>
             </a:r>
             <a:endParaRPr lang="en-US" dirty="0"/>
           </a:p>
@@ -2562,7 +2458,7 @@
           <a:p>
             <a:r>
               <a:rPr lang="en-US" dirty="0"/>
-              <a:t>生活者にHbA1cを知っているか聞くと、40.3%が「知らない」と回答し全12指標中ワースト。血糖値を知らない人は2.3%。一方で医師の78.2%がHbA1cを「非常に重要」と回答（血圧に次ぐ2位）。</a:t>
+              <a:t>生活者にHbA1cを知っているか聞くと、40.3%が「知らない」と回答し全12指標中ワースト（血糖値を知らない人は2.3%）。一方、医師の78.2%がHbA1cを「非常に重要」と回答（血圧に次ぐ2位）。</a:t>
             </a:r>
             <a:endParaRPr lang="en-US" dirty="0"/>
           </a:p>
@@ -3120,45 +3016,9 @@
           </a:p>
         </p:txBody>
       </p:sp>
-      <p:sp>
-        <p:nvSpPr>
-          <p:cNvPr id="4" name="Text 0"/>
-          <p:cNvSpPr/>
-          <p:nvPr/>
-        </p:nvSpPr>
-        <p:spPr>
-          <a:xfrm>
-            <a:off x="548640" y="6400800"/>
-            <a:ext cx="8229600" cy="274320"/>
-          </a:xfrm>
-          <a:prstGeom prst="rect">
-            <a:avLst/>
-          </a:prstGeom>
-          <a:noFill/>
-          <a:ln/>
-        </p:spPr>
-        <p:txBody>
-          <a:bodyPr wrap="square" lIns="0" tIns="0" rIns="0" bIns="0" rtlCol="0" anchor="ctr"/>
-          <a:lstStyle/>
-          <a:p>
-            <a:pPr indent="0" marL="0">
-              <a:buNone/>
-            </a:pPr>
-            <a:r>
-              <a:rPr lang="en-US" sz="1100" dirty="0">
-                <a:solidFill>
-                  <a:srgbClr val="7A7A7A"/>
-                </a:solidFill>
-              </a:rPr>
-              <a:t>10月8日は「糖をはかる日」　｜　主催：一般社団法人 日本生活習慣病予防協会</a:t>
-            </a:r>
-            <a:endParaRPr lang="en-US" sz="1100" dirty="0"/>
-          </a:p>
-        </p:txBody>
-      </p:sp>
       <p:pic>
         <p:nvPicPr>
-          <p:cNvPr id="5" name="Image 0" descr="/tmp/claude-0/-home-user-my-website/f87fda31-ca5a-5f96-b5c1-887c7a459d5f/scratchpad/assets/logo.png">    </p:cNvPr>
+          <p:cNvPr id="4" name="Image 0" descr="/tmp/claude-0/-home-user-my-website/f87fda31-ca5a-5f96-b5c1-887c7a459d5f/scratchpad/assets/logo.png">    </p:cNvPr>
           <p:cNvPicPr>
             <a:picLocks noChangeAspect="1"/>
           </p:cNvPicPr>
@@ -3220,6 +3080,107 @@
             <a:fld id="{F7021451-1387-4CA6-816F-3879F97B5CBC}" type="slidenum">
               <a:rPr b="0" lang="en-US"/>
               <a:t>1003</a:t>
+            </a:fld>
+            <a:endParaRPr lang="en-US"/>
+          </a:p>
+        </p:txBody>
+      </p:sp>
+    </p:spTree>
+  </p:cSld>
+  <p:clrMapOvr>
+    <a:masterClrMapping/>
+  </p:clrMapOvr>
+</p:sldLayout>
+</file>
+
+<file path=ppt/slideLayouts/slideLayout4.xml><?xml version="1.0" encoding="utf-8"?>
+<p:sldLayout xmlns:a="http://schemas.openxmlformats.org/drawingml/2006/main" xmlns:r="http://schemas.openxmlformats.org/officeDocument/2006/relationships" xmlns:p="http://schemas.openxmlformats.org/presentationml/2006/main" preserve="1">
+  <p:cSld name="PLAIN">
+    <p:bg>
+      <p:bgPr>
+        <a:solidFill>
+          <a:srgbClr val="FFFFFF"/>
+        </a:solidFill>
+      </p:bgPr>
+    </p:bg>
+    <p:spTree>
+      <p:nvGrpSpPr>
+        <p:cNvPr id="1" name=""/>
+        <p:cNvGrpSpPr/>
+        <p:nvPr/>
+      </p:nvGrpSpPr>
+      <p:grpSpPr>
+        <a:xfrm>
+          <a:off x="0" y="0"/>
+          <a:ext cx="0" cy="0"/>
+          <a:chOff x="0" y="0"/>
+          <a:chExt cx="0" cy="0"/>
+        </a:xfrm>
+      </p:grpSpPr>
+      <p:pic>
+        <p:nvPicPr>
+          <p:cNvPr id="2" name="Image 0" descr="/tmp/claude-0/-home-user-my-website/f87fda31-ca5a-5f96-b5c1-887c7a459d5f/scratchpad/assets/logo.png">    </p:cNvPr>
+          <p:cNvPicPr>
+            <a:picLocks noChangeAspect="1"/>
+          </p:cNvPicPr>
+          <p:nvPr/>
+        </p:nvPicPr>
+        <p:blipFill>
+          <a:blip r:embed="rId1"/>
+          <a:stretch>
+            <a:fillRect/>
+          </a:stretch>
+        </p:blipFill>
+        <p:spPr>
+          <a:xfrm>
+            <a:off x="11109960" y="6291072"/>
+            <a:ext cx="548640" cy="390449"/>
+          </a:xfrm>
+          <a:prstGeom prst="rect">
+            <a:avLst/>
+          </a:prstGeom>
+        </p:spPr>
+      </p:pic>
+      <p:sp>
+        <p:nvSpPr>
+          <p:cNvPr id="25" name="Slide Number Placeholder 0"/>
+          <p:cNvSpPr>
+            <a:spLocks noGrp="1"/>
+          </p:cNvSpPr>
+          <p:nvPr>
+            <p:ph type="sldNum" sz="quarter" idx="4294967295"/>
+          </p:nvPr>
+        </p:nvSpPr>
+        <p:spPr>
+          <a:xfrm>
+            <a:off x="10469880" y="6400800"/>
+            <a:ext cx="457200" cy="274320"/>
+          </a:xfrm>
+          <a:prstGeom prst="rect">
+            <a:avLst/>
+          </a:prstGeom>
+          <a:extLst>
+            <a:ext uri="{C572A759-6A51-4108-AA02-DFA0A04FC94B}">
+              <ma14:wrappingTextBoxFlag xmlns:ma14="http://schemas.microsoft.com/office/mac/drawingml/2011/main" val="0"/>
+            </a:ext>
+          </a:extLst>
+        </p:spPr>
+        <p:txBody>
+          <a:bodyPr/>
+          <a:lstStyle>
+            <a:lvl1pPr>
+              <a:defRPr sz="1100">
+                <a:solidFill>
+                  <a:srgbClr val="7A7A7A"/>
+                </a:solidFill>
+              </a:defRPr>
+            </a:lvl1pPr>
+          </a:lstStyle>
+          <a:p>
+            <a:pPr algn="r"/>
+            <a:fld id="{F7021451-1387-4CA6-816F-3879F97B5CBC}" type="slidenum">
+              <a:rPr b="0" lang="en-US"/>
+              <a:t>1004</a:t>
             </a:fld>
             <a:endParaRPr lang="en-US"/>
           </a:p>
@@ -3302,6 +3263,7 @@
     <p:sldLayoutId id="2147483649" r:id="rId1"/>
     <p:sldLayoutId id="2147483650" r:id="rId2"/>
     <p:sldLayoutId id="2147483651" r:id="rId3"/>
+    <p:sldLayoutId id="2147483652" r:id="rId4"/>
   </p:sldLayoutIdLst>
   <p:hf sldNum="0" hdr="0" ftr="0" dt="0"/>
   <p:txStyles>
@@ -3752,42 +3714,6 @@
         </p:nvSpPr>
         <p:spPr>
           <a:xfrm>
-            <a:off x="6172200" y="4572000"/>
-            <a:ext cx="5760720" cy="365760"/>
-          </a:xfrm>
-          <a:prstGeom prst="rect">
-            <a:avLst/>
-          </a:prstGeom>
-          <a:noFill/>
-          <a:ln/>
-        </p:spPr>
-        <p:txBody>
-          <a:bodyPr wrap="square" lIns="0" tIns="0" rIns="0" bIns="0" rtlCol="0" anchor="ctr"/>
-          <a:lstStyle/>
-          <a:p>
-            <a:pPr indent="0" marL="0">
-              <a:buNone/>
-            </a:pPr>
-            <a:r>
-              <a:rPr lang="en-US" sz="1500" dirty="0">
-                <a:solidFill>
-                  <a:srgbClr val="7A7A7A"/>
-                </a:solidFill>
-              </a:rPr>
-              <a:t>医師・生活者「血糖値・ヘモグロビンA1cに関する意識調査」発表</a:t>
-            </a:r>
-            <a:endParaRPr lang="en-US" sz="1500" dirty="0"/>
-          </a:p>
-        </p:txBody>
-      </p:sp>
-      <p:sp>
-        <p:nvSpPr>
-          <p:cNvPr id="8" name="Text 5"/>
-          <p:cNvSpPr txBox="1"/>
-          <p:nvPr/>
-        </p:nvSpPr>
-        <p:spPr>
-          <a:xfrm>
             <a:off x="6172200" y="5715000"/>
             <a:ext cx="5669280" cy="411480"/>
           </a:xfrm>
@@ -3873,7 +3799,7 @@
                   <a:srgbClr val="C8102E"/>
                 </a:solidFill>
               </a:rPr>
-              <a:t>スペシャルトーク</a:t>
+              <a:t>測定方法</a:t>
             </a:r>
             <a:endParaRPr lang="en-US" sz="1500" dirty="0"/>
           </a:p>
@@ -3911,7 +3837,7 @@
                   <a:srgbClr val="262626"/>
                 </a:solidFill>
               </a:rPr>
-              <a:t>鳴戸親方のヘモグロビンA1c</a:t>
+              <a:t>ヘモグロビンA1c、どこで測れる？</a:t>
             </a:r>
             <a:endParaRPr lang="en-US" sz="3200" dirty="0"/>
           </a:p>
@@ -3919,72 +3845,45 @@
       </p:sp>
       <p:sp>
         <p:nvSpPr>
-          <p:cNvPr id="4" name="Shape 2"/>
+          <p:cNvPr id="4" name="where0"/>
           <p:cNvSpPr/>
           <p:nvPr/>
         </p:nvSpPr>
         <p:spPr>
           <a:xfrm>
-            <a:off x="1234440" y="1508760"/>
-            <a:ext cx="4023360" cy="2514600"/>
+            <a:off x="548640" y="1463040"/>
+            <a:ext cx="3520440" cy="4709160"/>
           </a:xfrm>
           <a:prstGeom prst="roundRect">
             <a:avLst>
-              <a:gd name="adj" fmla="val 4364"/>
+              <a:gd name="adj" fmla="val 3117"/>
             </a:avLst>
           </a:prstGeom>
           <a:solidFill>
-            <a:srgbClr val="FBECEE"/>
+            <a:srgbClr val="F6F6F6"/>
           </a:solidFill>
           <a:ln/>
         </p:spPr>
       </p:sp>
       <p:sp>
         <p:nvSpPr>
-          <p:cNvPr id="5" name="Text 3"/>
-          <p:cNvSpPr txBox="1"/>
-          <p:nvPr/>
-        </p:nvSpPr>
-        <p:spPr>
-          <a:xfrm>
-            <a:off x="1234440" y="1508760"/>
-            <a:ext cx="4023360" cy="2514600"/>
-          </a:xfrm>
-          <a:prstGeom prst="rect">
-            <a:avLst/>
-          </a:prstGeom>
-          <a:noFill/>
-          <a:ln/>
-        </p:spPr>
-        <p:txBody>
-          <a:bodyPr wrap="square" lIns="0" tIns="0" rIns="0" bIns="0" rtlCol="0" anchor="ctr"/>
-          <a:lstStyle/>
-          <a:p>
-            <a:pPr algn="ctr" indent="0" marL="0">
-              <a:buNone/>
-            </a:pPr>
-            <a:r>
-              <a:rPr lang="en-US" sz="11000" b="1" dirty="0">
-                <a:solidFill>
-                  <a:srgbClr val="C8102E"/>
-                </a:solidFill>
-              </a:rPr>
-              <a:t>9.4</a:t>
-            </a:r>
-            <a:pPr algn="ctr" indent="0" marL="0">
-              <a:buNone/>
-            </a:pPr>
-            <a:r>
-              <a:rPr lang="en-US" sz="3200" b="1" dirty="0">
-                <a:solidFill>
-                  <a:srgbClr val="C8102E"/>
-                </a:solidFill>
-              </a:rPr>
-              <a:t> %</a:t>
-            </a:r>
-            <a:endParaRPr lang="en-US" sz="11000" dirty="0"/>
-          </a:p>
-        </p:txBody>
+          <p:cNvPr id="5" name="Shape 3"/>
+          <p:cNvSpPr/>
+          <p:nvPr/>
+        </p:nvSpPr>
+        <p:spPr>
+          <a:xfrm>
+            <a:off x="822960" y="1737360"/>
+            <a:ext cx="731520" cy="731520"/>
+          </a:xfrm>
+          <a:prstGeom prst="ellipse">
+            <a:avLst/>
+          </a:prstGeom>
+          <a:solidFill>
+            <a:srgbClr val="C8102E"/>
+          </a:solidFill>
+          <a:ln/>
+        </p:spPr>
       </p:sp>
       <p:pic>
         <p:nvPicPr>
@@ -4002,8 +3901,8 @@
         </p:blipFill>
         <p:spPr>
           <a:xfrm>
-            <a:off x="5669280" y="2286000"/>
-            <a:ext cx="914400" cy="914400"/>
+            <a:off x="1005840" y="1920240"/>
+            <a:ext cx="365760" cy="365760"/>
           </a:xfrm>
           <a:prstGeom prst="rect">
             <a:avLst/>
@@ -4012,340 +3911,366 @@
       </p:pic>
       <p:sp>
         <p:nvSpPr>
-          <p:cNvPr id="7" name="Shape 4"/>
+          <p:cNvPr id="7" name="Text 4"/>
+          <p:cNvSpPr txBox="1"/>
+          <p:nvPr/>
+        </p:nvSpPr>
+        <p:spPr>
+          <a:xfrm>
+            <a:off x="2926080" y="1783080"/>
+            <a:ext cx="868680" cy="548640"/>
+          </a:xfrm>
+          <a:prstGeom prst="rect">
+            <a:avLst/>
+          </a:prstGeom>
+          <a:noFill/>
+          <a:ln/>
+        </p:spPr>
+        <p:txBody>
+          <a:bodyPr wrap="square" lIns="0" tIns="0" rIns="0" bIns="0" rtlCol="0" anchor="ctr"/>
+          <a:lstStyle/>
+          <a:p>
+            <a:pPr algn="r" indent="0" marL="0">
+              <a:buNone/>
+            </a:pPr>
+            <a:r>
+              <a:rPr lang="en-US" sz="2600" b="1" dirty="0">
+                <a:solidFill>
+                  <a:srgbClr val="B5B5B5"/>
+                </a:solidFill>
+              </a:rPr>
+              <a:t>01</a:t>
+            </a:r>
+            <a:endParaRPr lang="en-US" sz="2600" dirty="0"/>
+          </a:p>
+        </p:txBody>
+      </p:sp>
+      <p:sp>
+        <p:nvSpPr>
+          <p:cNvPr id="8" name="Text 5"/>
+          <p:cNvSpPr txBox="1"/>
+          <p:nvPr/>
+        </p:nvSpPr>
+        <p:spPr>
+          <a:xfrm>
+            <a:off x="822960" y="2606040"/>
+            <a:ext cx="3108960" cy="502920"/>
+          </a:xfrm>
+          <a:prstGeom prst="rect">
+            <a:avLst/>
+          </a:prstGeom>
+          <a:noFill/>
+          <a:ln/>
+        </p:spPr>
+        <p:txBody>
+          <a:bodyPr wrap="square" lIns="0" tIns="0" rIns="0" bIns="0" rtlCol="0" anchor="ctr"/>
+          <a:lstStyle/>
+          <a:p>
+            <a:pPr indent="0" marL="0">
+              <a:buNone/>
+            </a:pPr>
+            <a:r>
+              <a:rPr lang="en-US" sz="2400" b="1" dirty="0">
+                <a:solidFill>
+                  <a:srgbClr val="262626"/>
+                </a:solidFill>
+              </a:rPr>
+              <a:t>健康診断</a:t>
+            </a:r>
+            <a:endParaRPr lang="en-US" sz="2400" dirty="0"/>
+          </a:p>
+        </p:txBody>
+      </p:sp>
+      <p:sp>
+        <p:nvSpPr>
+          <p:cNvPr id="9" name="Text 6"/>
+          <p:cNvSpPr txBox="1"/>
+          <p:nvPr/>
+        </p:nvSpPr>
+        <p:spPr>
+          <a:xfrm>
+            <a:off x="822960" y="3108960"/>
+            <a:ext cx="3108960" cy="411480"/>
+          </a:xfrm>
+          <a:prstGeom prst="rect">
+            <a:avLst/>
+          </a:prstGeom>
+          <a:noFill/>
+          <a:ln/>
+        </p:spPr>
+        <p:txBody>
+          <a:bodyPr wrap="square" lIns="0" tIns="0" rIns="0" bIns="0" rtlCol="0" anchor="ctr"/>
+          <a:lstStyle/>
+          <a:p>
+            <a:pPr indent="0" marL="0">
+              <a:buNone/>
+            </a:pPr>
+            <a:r>
+              <a:rPr lang="en-US" sz="1800" b="1" dirty="0">
+                <a:solidFill>
+                  <a:srgbClr val="C8102E"/>
+                </a:solidFill>
+              </a:rPr>
+              <a:t>オプション</a:t>
+            </a:r>
+            <a:endParaRPr lang="en-US" sz="1800" dirty="0"/>
+          </a:p>
+        </p:txBody>
+      </p:sp>
+      <p:pic>
+        <p:nvPicPr>
+          <p:cNvPr id="10" name="Image 1" descr="健康診断">    </p:cNvPr>
+          <p:cNvPicPr>
+            <a:picLocks noChangeAspect="1"/>
+          </p:cNvPicPr>
+          <p:nvPr/>
+        </p:nvPicPr>
+        <p:blipFill>
+          <a:blip r:embed="rId2"/>
+          <a:srcRect l="0" r="0" t="0" b="0"/>
+          <a:stretch/>
+        </p:blipFill>
+        <p:spPr>
+          <a:xfrm>
+            <a:off x="822960" y="3749040"/>
+            <a:ext cx="2971800" cy="2148840"/>
+          </a:xfrm>
+          <a:prstGeom prst="rect">
+            <a:avLst/>
+          </a:prstGeom>
+        </p:spPr>
+      </p:pic>
+      <p:sp>
+        <p:nvSpPr>
+          <p:cNvPr id="11" name="where1"/>
           <p:cNvSpPr/>
           <p:nvPr/>
         </p:nvSpPr>
         <p:spPr>
           <a:xfrm>
-            <a:off x="6949440" y="1508760"/>
-            <a:ext cx="4023360" cy="2514600"/>
+            <a:off x="4334256" y="1463040"/>
+            <a:ext cx="3520440" cy="4709160"/>
           </a:xfrm>
           <a:prstGeom prst="roundRect">
             <a:avLst>
-              <a:gd name="adj" fmla="val 4364"/>
+              <a:gd name="adj" fmla="val 3117"/>
             </a:avLst>
           </a:prstGeom>
           <a:solidFill>
-            <a:srgbClr val="E8F2EC"/>
+            <a:srgbClr val="F6F6F6"/>
           </a:solidFill>
           <a:ln/>
         </p:spPr>
       </p:sp>
       <p:sp>
         <p:nvSpPr>
-          <p:cNvPr id="8" name="Text 5"/>
-          <p:cNvSpPr txBox="1"/>
-          <p:nvPr/>
-        </p:nvSpPr>
-        <p:spPr>
-          <a:xfrm>
-            <a:off x="6949440" y="1508760"/>
-            <a:ext cx="4023360" cy="2514600"/>
-          </a:xfrm>
-          <a:prstGeom prst="rect">
-            <a:avLst/>
-          </a:prstGeom>
-          <a:noFill/>
-          <a:ln/>
-        </p:spPr>
-        <p:txBody>
-          <a:bodyPr wrap="square" lIns="0" tIns="0" rIns="0" bIns="0" rtlCol="0" anchor="ctr"/>
-          <a:lstStyle/>
-          <a:p>
-            <a:pPr algn="ctr" indent="0" marL="0">
-              <a:buNone/>
-            </a:pPr>
-            <a:r>
-              <a:rPr lang="en-US" sz="11000" b="1" dirty="0">
-                <a:solidFill>
-                  <a:srgbClr val="3F7A5E"/>
-                </a:solidFill>
-              </a:rPr>
-              <a:t>5.2</a:t>
-            </a:r>
-            <a:pPr algn="ctr" indent="0" marL="0">
-              <a:buNone/>
-            </a:pPr>
-            <a:r>
-              <a:rPr lang="en-US" sz="3200" b="1" dirty="0">
-                <a:solidFill>
-                  <a:srgbClr val="3F7A5E"/>
-                </a:solidFill>
-              </a:rPr>
-              <a:t> %</a:t>
-            </a:r>
-            <a:endParaRPr lang="en-US" sz="11000" dirty="0"/>
-          </a:p>
-        </p:txBody>
-      </p:sp>
-      <p:sp>
-        <p:nvSpPr>
-          <p:cNvPr id="9" name="Shape 6"/>
+          <p:cNvPr id="12" name="Shape 8"/>
           <p:cNvSpPr/>
           <p:nvPr/>
         </p:nvSpPr>
         <p:spPr>
           <a:xfrm>
-            <a:off x="1234440" y="4892040"/>
-            <a:ext cx="2759202" cy="384048"/>
-          </a:xfrm>
-          <a:prstGeom prst="rect">
-            <a:avLst/>
-          </a:prstGeom>
-          <a:solidFill>
-            <a:srgbClr val="6FA088"/>
-          </a:solidFill>
-          <a:ln w="19050">
-            <a:solidFill>
-              <a:srgbClr val="FFFFFF"/>
-            </a:solidFill>
-            <a:prstDash val="solid"/>
-          </a:ln>
-        </p:spPr>
-      </p:sp>
-      <p:sp>
-        <p:nvSpPr>
-          <p:cNvPr id="10" name="Text 7"/>
-          <p:cNvSpPr txBox="1"/>
-          <p:nvPr/>
-        </p:nvSpPr>
-        <p:spPr>
-          <a:xfrm>
-            <a:off x="1234440" y="4892040"/>
-            <a:ext cx="2759202" cy="384048"/>
-          </a:xfrm>
-          <a:prstGeom prst="rect">
-            <a:avLst/>
-          </a:prstGeom>
-          <a:noFill/>
-          <a:ln/>
-        </p:spPr>
-        <p:txBody>
-          <a:bodyPr wrap="square" lIns="0" tIns="0" rIns="0" bIns="0" rtlCol="0" anchor="ctr"/>
-          <a:lstStyle/>
-          <a:p>
-            <a:pPr algn="ctr" indent="0" marL="0">
-              <a:buNone/>
-            </a:pPr>
-            <a:r>
-              <a:rPr lang="en-US" sz="1400" b="1" dirty="0">
-                <a:solidFill>
-                  <a:srgbClr val="FFFFFF"/>
-                </a:solidFill>
-              </a:rPr>
-              <a:t>正常</a:t>
-            </a:r>
-            <a:endParaRPr lang="en-US" sz="1400" dirty="0"/>
-          </a:p>
-        </p:txBody>
-      </p:sp>
-      <p:sp>
-        <p:nvSpPr>
-          <p:cNvPr id="11" name="Shape 8"/>
-          <p:cNvSpPr/>
-          <p:nvPr/>
-        </p:nvSpPr>
-        <p:spPr>
-          <a:xfrm>
-            <a:off x="3993642" y="4892040"/>
-            <a:ext cx="1298448" cy="384048"/>
-          </a:xfrm>
-          <a:prstGeom prst="rect">
-            <a:avLst/>
-          </a:prstGeom>
-          <a:solidFill>
-            <a:srgbClr val="E3B04B"/>
-          </a:solidFill>
-          <a:ln w="19050">
-            <a:solidFill>
-              <a:srgbClr val="FFFFFF"/>
-            </a:solidFill>
-            <a:prstDash val="solid"/>
-          </a:ln>
-        </p:spPr>
-      </p:sp>
-      <p:sp>
-        <p:nvSpPr>
-          <p:cNvPr id="12" name="Text 9"/>
-          <p:cNvSpPr txBox="1"/>
-          <p:nvPr/>
-        </p:nvSpPr>
-        <p:spPr>
-          <a:xfrm>
-            <a:off x="3993642" y="4892040"/>
-            <a:ext cx="1298448" cy="384048"/>
-          </a:xfrm>
-          <a:prstGeom prst="rect">
-            <a:avLst/>
-          </a:prstGeom>
-          <a:noFill/>
-          <a:ln/>
-        </p:spPr>
-        <p:txBody>
-          <a:bodyPr wrap="square" lIns="0" tIns="0" rIns="0" bIns="0" rtlCol="0" anchor="ctr"/>
-          <a:lstStyle/>
-          <a:p>
-            <a:pPr algn="ctr" indent="0" marL="0">
-              <a:buNone/>
-            </a:pPr>
-            <a:r>
-              <a:rPr lang="en-US" sz="1400" b="1" dirty="0">
-                <a:solidFill>
-                  <a:srgbClr val="FFFFFF"/>
-                </a:solidFill>
-              </a:rPr>
-              <a:t>注意</a:t>
-            </a:r>
-            <a:endParaRPr lang="en-US" sz="1400" dirty="0"/>
-          </a:p>
-        </p:txBody>
-      </p:sp>
-      <p:sp>
-        <p:nvSpPr>
-          <p:cNvPr id="13" name="Shape 10"/>
-          <p:cNvSpPr/>
-          <p:nvPr/>
-        </p:nvSpPr>
-        <p:spPr>
-          <a:xfrm>
-            <a:off x="5292090" y="4892040"/>
-            <a:ext cx="5680710" cy="384048"/>
-          </a:xfrm>
-          <a:prstGeom prst="rect">
+            <a:off x="4608576" y="1737360"/>
+            <a:ext cx="731520" cy="731520"/>
+          </a:xfrm>
+          <a:prstGeom prst="ellipse">
             <a:avLst/>
           </a:prstGeom>
           <a:solidFill>
             <a:srgbClr val="C8102E"/>
           </a:solidFill>
-          <a:ln w="19050">
-            <a:solidFill>
-              <a:srgbClr val="FFFFFF"/>
-            </a:solidFill>
-            <a:prstDash val="solid"/>
-          </a:ln>
-        </p:spPr>
-      </p:sp>
-      <p:sp>
-        <p:nvSpPr>
-          <p:cNvPr id="14" name="Text 11"/>
+          <a:ln/>
+        </p:spPr>
+      </p:sp>
+      <p:pic>
+        <p:nvPicPr>
+          <p:cNvPr id="13" name="Image 2" descr="preencoded.png">    </p:cNvPr>
+          <p:cNvPicPr>
+            <a:picLocks noChangeAspect="1"/>
+          </p:cNvPicPr>
+          <p:nvPr/>
+        </p:nvPicPr>
+        <p:blipFill>
+          <a:blip r:embed="rId3"/>
+          <a:stretch>
+            <a:fillRect/>
+          </a:stretch>
+        </p:blipFill>
+        <p:spPr>
+          <a:xfrm>
+            <a:off x="4791456" y="1920240"/>
+            <a:ext cx="365760" cy="365760"/>
+          </a:xfrm>
+          <a:prstGeom prst="rect">
+            <a:avLst/>
+          </a:prstGeom>
+        </p:spPr>
+      </p:pic>
+      <p:sp>
+        <p:nvSpPr>
+          <p:cNvPr id="14" name="Text 9"/>
           <p:cNvSpPr txBox="1"/>
           <p:nvPr/>
         </p:nvSpPr>
         <p:spPr>
           <a:xfrm>
-            <a:off x="5292090" y="4892040"/>
-            <a:ext cx="5680710" cy="384048"/>
-          </a:xfrm>
-          <a:prstGeom prst="rect">
-            <a:avLst/>
-          </a:prstGeom>
-          <a:noFill/>
-          <a:ln/>
-        </p:spPr>
-        <p:txBody>
-          <a:bodyPr wrap="square" lIns="0" tIns="0" rIns="0" bIns="0" rtlCol="0" anchor="ctr"/>
-          <a:lstStyle/>
-          <a:p>
-            <a:pPr algn="ctr" indent="0" marL="0">
-              <a:buNone/>
-            </a:pPr>
-            <a:r>
-              <a:rPr lang="en-US" sz="1400" b="1" dirty="0">
-                <a:solidFill>
-                  <a:srgbClr val="FFFFFF"/>
-                </a:solidFill>
-              </a:rPr>
-              <a:t>糖尿病の恐れ</a:t>
-            </a:r>
-            <a:endParaRPr lang="en-US" sz="1400" dirty="0"/>
-          </a:p>
-        </p:txBody>
-      </p:sp>
-      <p:sp>
-        <p:nvSpPr>
-          <p:cNvPr id="15" name="Text 12"/>
+            <a:off x="6711696" y="1783080"/>
+            <a:ext cx="868680" cy="548640"/>
+          </a:xfrm>
+          <a:prstGeom prst="rect">
+            <a:avLst/>
+          </a:prstGeom>
+          <a:noFill/>
+          <a:ln/>
+        </p:spPr>
+        <p:txBody>
+          <a:bodyPr wrap="square" lIns="0" tIns="0" rIns="0" bIns="0" rtlCol="0" anchor="ctr"/>
+          <a:lstStyle/>
+          <a:p>
+            <a:pPr algn="r" indent="0" marL="0">
+              <a:buNone/>
+            </a:pPr>
+            <a:r>
+              <a:rPr lang="en-US" sz="2600" b="1" dirty="0">
+                <a:solidFill>
+                  <a:srgbClr val="B5B5B5"/>
+                </a:solidFill>
+              </a:rPr>
+              <a:t>02</a:t>
+            </a:r>
+            <a:endParaRPr lang="en-US" sz="2600" dirty="0"/>
+          </a:p>
+        </p:txBody>
+      </p:sp>
+      <p:sp>
+        <p:nvSpPr>
+          <p:cNvPr id="15" name="Text 10"/>
           <p:cNvSpPr txBox="1"/>
           <p:nvPr/>
         </p:nvSpPr>
         <p:spPr>
           <a:xfrm>
-            <a:off x="3445002" y="5321808"/>
-            <a:ext cx="1097280" cy="292608"/>
-          </a:xfrm>
-          <a:prstGeom prst="rect">
-            <a:avLst/>
-          </a:prstGeom>
-          <a:noFill/>
-          <a:ln/>
-        </p:spPr>
-        <p:txBody>
-          <a:bodyPr wrap="square" lIns="0" tIns="0" rIns="0" bIns="0" rtlCol="0" anchor="ctr"/>
-          <a:lstStyle/>
-          <a:p>
-            <a:pPr algn="ctr" indent="0" marL="0">
-              <a:buNone/>
-            </a:pPr>
-            <a:r>
-              <a:rPr lang="en-US" sz="1300" dirty="0">
-                <a:solidFill>
-                  <a:srgbClr val="4A4A4A"/>
-                </a:solidFill>
-              </a:rPr>
-              <a:t>5.6〜5.8</a:t>
-            </a:r>
-            <a:endParaRPr lang="en-US" sz="1300" dirty="0"/>
-          </a:p>
-        </p:txBody>
-      </p:sp>
-      <p:sp>
-        <p:nvSpPr>
-          <p:cNvPr id="16" name="Text 13"/>
+            <a:off x="4608576" y="2606040"/>
+            <a:ext cx="3108960" cy="502920"/>
+          </a:xfrm>
+          <a:prstGeom prst="rect">
+            <a:avLst/>
+          </a:prstGeom>
+          <a:noFill/>
+          <a:ln/>
+        </p:spPr>
+        <p:txBody>
+          <a:bodyPr wrap="square" lIns="0" tIns="0" rIns="0" bIns="0" rtlCol="0" anchor="ctr"/>
+          <a:lstStyle/>
+          <a:p>
+            <a:pPr indent="0" marL="0">
+              <a:buNone/>
+            </a:pPr>
+            <a:r>
+              <a:rPr lang="en-US" sz="2400" b="1" dirty="0">
+                <a:solidFill>
+                  <a:srgbClr val="262626"/>
+                </a:solidFill>
+              </a:rPr>
+              <a:t>ゆびさきセルフ測定室</a:t>
+            </a:r>
+            <a:endParaRPr lang="en-US" sz="2400" dirty="0"/>
+          </a:p>
+        </p:txBody>
+      </p:sp>
+      <p:sp>
+        <p:nvSpPr>
+          <p:cNvPr id="16" name="Text 11"/>
           <p:cNvSpPr txBox="1"/>
           <p:nvPr/>
         </p:nvSpPr>
         <p:spPr>
           <a:xfrm>
-            <a:off x="4926330" y="5321808"/>
-            <a:ext cx="731520" cy="292608"/>
-          </a:xfrm>
-          <a:prstGeom prst="rect">
-            <a:avLst/>
-          </a:prstGeom>
-          <a:noFill/>
-          <a:ln/>
-        </p:spPr>
-        <p:txBody>
-          <a:bodyPr wrap="square" lIns="0" tIns="0" rIns="0" bIns="0" rtlCol="0" anchor="ctr"/>
-          <a:lstStyle/>
-          <a:p>
-            <a:pPr algn="ctr" indent="0" marL="0">
-              <a:buNone/>
-            </a:pPr>
-            <a:r>
-              <a:rPr lang="en-US" sz="1300" dirty="0">
-                <a:solidFill>
-                  <a:srgbClr val="4A4A4A"/>
-                </a:solidFill>
-              </a:rPr>
-              <a:t>6.5</a:t>
-            </a:r>
-            <a:endParaRPr lang="en-US" sz="1300" dirty="0"/>
-          </a:p>
-        </p:txBody>
-      </p:sp>
-      <p:sp>
-        <p:nvSpPr>
-          <p:cNvPr id="17" name="Shape 14"/>
+            <a:off x="4608576" y="3108960"/>
+            <a:ext cx="3108960" cy="411480"/>
+          </a:xfrm>
+          <a:prstGeom prst="rect">
+            <a:avLst/>
+          </a:prstGeom>
+          <a:noFill/>
+          <a:ln/>
+        </p:spPr>
+        <p:txBody>
+          <a:bodyPr wrap="square" lIns="0" tIns="0" rIns="0" bIns="0" rtlCol="0" anchor="ctr"/>
+          <a:lstStyle/>
+          <a:p>
+            <a:pPr indent="0" marL="0">
+              <a:buNone/>
+            </a:pPr>
+            <a:r>
+              <a:rPr lang="en-US" sz="1800" b="1" dirty="0">
+                <a:solidFill>
+                  <a:srgbClr val="C8102E"/>
+                </a:solidFill>
+              </a:rPr>
+              <a:t>「ゆびさきナビ」で検索</a:t>
+            </a:r>
+            <a:endParaRPr lang="en-US" sz="1800" dirty="0"/>
+          </a:p>
+        </p:txBody>
+      </p:sp>
+      <p:pic>
+        <p:nvPicPr>
+          <p:cNvPr id="17" name="Image 3" descr="ゆびさきセルフ測定室">    </p:cNvPr>
+          <p:cNvPicPr>
+            <a:picLocks noChangeAspect="1"/>
+          </p:cNvPicPr>
+          <p:nvPr/>
+        </p:nvPicPr>
+        <p:blipFill>
+          <a:blip r:embed="rId4"/>
+          <a:srcRect l="0" r="0" t="0" b="0"/>
+          <a:stretch/>
+        </p:blipFill>
+        <p:spPr>
+          <a:xfrm>
+            <a:off x="4608576" y="3749040"/>
+            <a:ext cx="2971800" cy="2148840"/>
+          </a:xfrm>
+          <a:prstGeom prst="rect">
+            <a:avLst/>
+          </a:prstGeom>
+        </p:spPr>
+      </p:pic>
+      <p:sp>
+        <p:nvSpPr>
+          <p:cNvPr id="18" name="where2"/>
           <p:cNvSpPr/>
           <p:nvPr/>
         </p:nvSpPr>
         <p:spPr>
-          <a:xfrm rot="10800000">
-            <a:off x="9843516" y="4599432"/>
-            <a:ext cx="310896" cy="237744"/>
-          </a:xfrm>
-          <a:prstGeom prst="triangle">
+          <a:xfrm>
+            <a:off x="8119872" y="1463040"/>
+            <a:ext cx="3520440" cy="4709160"/>
+          </a:xfrm>
+          <a:prstGeom prst="roundRect">
+            <a:avLst>
+              <a:gd name="adj" fmla="val 3117"/>
+            </a:avLst>
+          </a:prstGeom>
+          <a:solidFill>
+            <a:srgbClr val="F6F6F6"/>
+          </a:solidFill>
+          <a:ln/>
+        </p:spPr>
+      </p:sp>
+      <p:sp>
+        <p:nvSpPr>
+          <p:cNvPr id="19" name="Shape 13"/>
+          <p:cNvSpPr/>
+          <p:nvPr/>
+        </p:nvSpPr>
+        <p:spPr>
+          <a:xfrm>
+            <a:off x="8394192" y="1737360"/>
+            <a:ext cx="731520" cy="731520"/>
+          </a:xfrm>
+          <a:prstGeom prst="ellipse">
             <a:avLst/>
           </a:prstGeom>
           <a:solidFill>
@@ -4354,28 +4279,124 @@
           <a:ln/>
         </p:spPr>
       </p:sp>
-      <p:sp>
-        <p:nvSpPr>
-          <p:cNvPr id="18" name="Text 15"/>
+      <p:pic>
+        <p:nvPicPr>
+          <p:cNvPr id="20" name="Image 4" descr="preencoded.png">    </p:cNvPr>
+          <p:cNvPicPr>
+            <a:picLocks noChangeAspect="1"/>
+          </p:cNvPicPr>
+          <p:nvPr/>
+        </p:nvPicPr>
+        <p:blipFill>
+          <a:blip r:embed="rId5"/>
+          <a:stretch>
+            <a:fillRect/>
+          </a:stretch>
+        </p:blipFill>
+        <p:spPr>
+          <a:xfrm>
+            <a:off x="8577072" y="1920240"/>
+            <a:ext cx="365760" cy="365760"/>
+          </a:xfrm>
+          <a:prstGeom prst="rect">
+            <a:avLst/>
+          </a:prstGeom>
+        </p:spPr>
+      </p:pic>
+      <p:sp>
+        <p:nvSpPr>
+          <p:cNvPr id="21" name="Text 14"/>
           <p:cNvSpPr txBox="1"/>
           <p:nvPr/>
         </p:nvSpPr>
         <p:spPr>
           <a:xfrm>
-            <a:off x="9541764" y="4233672"/>
-            <a:ext cx="914400" cy="347472"/>
-          </a:xfrm>
-          <a:prstGeom prst="rect">
-            <a:avLst/>
-          </a:prstGeom>
-          <a:noFill/>
-          <a:ln/>
-        </p:spPr>
-        <p:txBody>
-          <a:bodyPr wrap="square" lIns="0" tIns="0" rIns="0" bIns="0" rtlCol="0" anchor="ctr"/>
-          <a:lstStyle/>
-          <a:p>
-            <a:pPr algn="ctr" indent="0" marL="0">
+            <a:off x="10497312" y="1783080"/>
+            <a:ext cx="868680" cy="548640"/>
+          </a:xfrm>
+          <a:prstGeom prst="rect">
+            <a:avLst/>
+          </a:prstGeom>
+          <a:noFill/>
+          <a:ln/>
+        </p:spPr>
+        <p:txBody>
+          <a:bodyPr wrap="square" lIns="0" tIns="0" rIns="0" bIns="0" rtlCol="0" anchor="ctr"/>
+          <a:lstStyle/>
+          <a:p>
+            <a:pPr algn="r" indent="0" marL="0">
+              <a:buNone/>
+            </a:pPr>
+            <a:r>
+              <a:rPr lang="en-US" sz="2600" b="1" dirty="0">
+                <a:solidFill>
+                  <a:srgbClr val="B5B5B5"/>
+                </a:solidFill>
+              </a:rPr>
+              <a:t>03</a:t>
+            </a:r>
+            <a:endParaRPr lang="en-US" sz="2600" dirty="0"/>
+          </a:p>
+        </p:txBody>
+      </p:sp>
+      <p:sp>
+        <p:nvSpPr>
+          <p:cNvPr id="22" name="Text 15"/>
+          <p:cNvSpPr txBox="1"/>
+          <p:nvPr/>
+        </p:nvSpPr>
+        <p:spPr>
+          <a:xfrm>
+            <a:off x="8394192" y="2606040"/>
+            <a:ext cx="3108960" cy="502920"/>
+          </a:xfrm>
+          <a:prstGeom prst="rect">
+            <a:avLst/>
+          </a:prstGeom>
+          <a:noFill/>
+          <a:ln/>
+        </p:spPr>
+        <p:txBody>
+          <a:bodyPr wrap="square" lIns="0" tIns="0" rIns="0" bIns="0" rtlCol="0" anchor="ctr"/>
+          <a:lstStyle/>
+          <a:p>
+            <a:pPr indent="0" marL="0">
+              <a:buNone/>
+            </a:pPr>
+            <a:r>
+              <a:rPr lang="en-US" sz="2400" b="1" dirty="0">
+                <a:solidFill>
+                  <a:srgbClr val="262626"/>
+                </a:solidFill>
+              </a:rPr>
+              <a:t>ご自宅</a:t>
+            </a:r>
+            <a:endParaRPr lang="en-US" sz="2400" dirty="0"/>
+          </a:p>
+        </p:txBody>
+      </p:sp>
+      <p:sp>
+        <p:nvSpPr>
+          <p:cNvPr id="23" name="Text 16"/>
+          <p:cNvSpPr txBox="1"/>
+          <p:nvPr/>
+        </p:nvSpPr>
+        <p:spPr>
+          <a:xfrm>
+            <a:off x="8394192" y="3108960"/>
+            <a:ext cx="3108960" cy="411480"/>
+          </a:xfrm>
+          <a:prstGeom prst="rect">
+            <a:avLst/>
+          </a:prstGeom>
+          <a:noFill/>
+          <a:ln/>
+        </p:spPr>
+        <p:txBody>
+          <a:bodyPr wrap="square" lIns="0" tIns="0" rIns="0" bIns="0" rtlCol="0" anchor="ctr"/>
+          <a:lstStyle/>
+          <a:p>
+            <a:pPr indent="0" marL="0">
               <a:buNone/>
             </a:pPr>
             <a:r>
@@ -4384,104 +4405,35 @@
                   <a:srgbClr val="C8102E"/>
                 </a:solidFill>
               </a:rPr>
-              <a:t>9.4</a:t>
+              <a:t>簡易検査キット</a:t>
             </a:r>
             <a:endParaRPr lang="en-US" sz="1800" dirty="0"/>
           </a:p>
         </p:txBody>
       </p:sp>
-      <p:sp>
-        <p:nvSpPr>
-          <p:cNvPr id="19" name="Shape 16"/>
-          <p:cNvSpPr/>
-          <p:nvPr/>
-        </p:nvSpPr>
-        <p:spPr>
-          <a:xfrm rot="10800000">
-            <a:off x="3026664" y="4599432"/>
-            <a:ext cx="310896" cy="237744"/>
-          </a:xfrm>
-          <a:prstGeom prst="triangle">
-            <a:avLst/>
-          </a:prstGeom>
-          <a:solidFill>
-            <a:srgbClr val="3F7A5E"/>
-          </a:solidFill>
-          <a:ln/>
-        </p:spPr>
-      </p:sp>
-      <p:sp>
-        <p:nvSpPr>
-          <p:cNvPr id="20" name="Text 17"/>
-          <p:cNvSpPr txBox="1"/>
-          <p:nvPr/>
-        </p:nvSpPr>
-        <p:spPr>
-          <a:xfrm>
-            <a:off x="2724912" y="4233672"/>
-            <a:ext cx="914400" cy="347472"/>
-          </a:xfrm>
-          <a:prstGeom prst="rect">
-            <a:avLst/>
-          </a:prstGeom>
-          <a:noFill/>
-          <a:ln/>
-        </p:spPr>
-        <p:txBody>
-          <a:bodyPr wrap="square" lIns="0" tIns="0" rIns="0" bIns="0" rtlCol="0" anchor="ctr"/>
-          <a:lstStyle/>
-          <a:p>
-            <a:pPr algn="ctr" indent="0" marL="0">
-              <a:buNone/>
-            </a:pPr>
-            <a:r>
-              <a:rPr lang="en-US" sz="1800" b="1" dirty="0">
-                <a:solidFill>
-                  <a:srgbClr val="3F7A5E"/>
-                </a:solidFill>
-              </a:rPr>
-              <a:t>5.2</a:t>
-            </a:r>
-            <a:endParaRPr lang="en-US" sz="1800" dirty="0"/>
-          </a:p>
-        </p:txBody>
-      </p:sp>
-      <p:sp>
-        <p:nvSpPr>
-          <p:cNvPr id="21" name="Text 18"/>
-          <p:cNvSpPr txBox="1"/>
-          <p:nvPr/>
-        </p:nvSpPr>
-        <p:spPr>
-          <a:xfrm>
-            <a:off x="1234440" y="5760720"/>
-            <a:ext cx="2743200" cy="292608"/>
-          </a:xfrm>
-          <a:prstGeom prst="rect">
-            <a:avLst/>
-          </a:prstGeom>
-          <a:noFill/>
-          <a:ln/>
-        </p:spPr>
-        <p:txBody>
-          <a:bodyPr wrap="square" lIns="0" tIns="0" rIns="0" bIns="0" rtlCol="0" anchor="ctr"/>
-          <a:lstStyle/>
-          <a:p>
-            <a:pPr indent="0" marL="0">
-              <a:buNone/>
-            </a:pPr>
-            <a:r>
-              <a:rPr lang="en-US" sz="1300" dirty="0">
-                <a:solidFill>
-                  <a:srgbClr val="7A7A7A"/>
-                </a:solidFill>
-              </a:rPr>
-              <a:t>HbA1c（%）</a:t>
-            </a:r>
-            <a:endParaRPr lang="en-US" sz="1300" dirty="0"/>
-          </a:p>
-        </p:txBody>
-      </p:sp>
+      <p:pic>
+        <p:nvPicPr>
+          <p:cNvPr id="24" name="Image 5" descr="ご自宅">    </p:cNvPr>
+          <p:cNvPicPr>
+            <a:picLocks noChangeAspect="1"/>
+          </p:cNvPicPr>
+          <p:nvPr/>
+        </p:nvPicPr>
+        <p:blipFill>
+          <a:blip r:embed="rId6"/>
+          <a:srcRect l="0" r="0" t="0" b="0"/>
+          <a:stretch/>
+        </p:blipFill>
+        <p:spPr>
+          <a:xfrm>
+            <a:off x="8394192" y="3749040"/>
+            <a:ext cx="2971800" cy="2148840"/>
+          </a:xfrm>
+          <a:prstGeom prst="rect">
+            <a:avLst/>
+          </a:prstGeom>
+        </p:spPr>
+      </p:pic>
       <p:sp>
         <p:nvSpPr>
           <p:cNvPr id="25" name="Slide Number Placeholder 0"/>
@@ -4554,781 +4506,6 @@
       </p:grpSpPr>
       <p:sp>
         <p:nvSpPr>
-          <p:cNvPr id="2" name="Text 0"/>
-          <p:cNvSpPr/>
-          <p:nvPr>
-            <p:ph idx="100" type="body" hasCustomPrompt="1"/>
-          </p:nvPr>
-        </p:nvSpPr>
-        <p:spPr>
-          <a:xfrm>
-            <a:off x="548640" y="256032"/>
-            <a:ext cx="7315200" cy="329184"/>
-          </a:xfrm>
-          <a:prstGeom prst="rect">
-            <a:avLst/>
-          </a:prstGeom>
-          <a:noFill/>
-          <a:ln/>
-        </p:spPr>
-        <p:txBody>
-          <a:bodyPr wrap="square" lIns="0" tIns="0" rIns="0" bIns="0" rtlCol="0" anchor="ctr"/>
-          <a:lstStyle/>
-          <a:p>
-            <a:pPr indent="0" marL="0">
-              <a:buNone/>
-            </a:pPr>
-            <a:r>
-              <a:rPr lang="en-US" sz="1500" b="1" dirty="0">
-                <a:solidFill>
-                  <a:srgbClr val="C8102E"/>
-                </a:solidFill>
-              </a:rPr>
-              <a:t>測定方法</a:t>
-            </a:r>
-            <a:endParaRPr lang="en-US" sz="1500" dirty="0"/>
-          </a:p>
-        </p:txBody>
-      </p:sp>
-      <p:sp>
-        <p:nvSpPr>
-          <p:cNvPr id="3" name="Text 0"/>
-          <p:cNvSpPr/>
-          <p:nvPr>
-            <p:ph idx="101" type="title" hasCustomPrompt="1"/>
-          </p:nvPr>
-        </p:nvSpPr>
-        <p:spPr>
-          <a:xfrm>
-            <a:off x="548640" y="566928"/>
-            <a:ext cx="11091672" cy="658368"/>
-          </a:xfrm>
-          <a:prstGeom prst="rect">
-            <a:avLst/>
-          </a:prstGeom>
-          <a:noFill/>
-          <a:ln/>
-        </p:spPr>
-        <p:txBody>
-          <a:bodyPr wrap="square" lIns="0" tIns="0" rIns="0" bIns="0" rtlCol="0" anchor="ctr"/>
-          <a:lstStyle/>
-          <a:p>
-            <a:pPr algn="l" indent="0" marL="0">
-              <a:buNone/>
-            </a:pPr>
-            <a:r>
-              <a:rPr lang="en-US" sz="3200" b="1" dirty="0">
-                <a:solidFill>
-                  <a:srgbClr val="262626"/>
-                </a:solidFill>
-              </a:rPr>
-              <a:t>ヘモグロビンA1c、どこで測れる？</a:t>
-            </a:r>
-            <a:endParaRPr lang="en-US" sz="3200" dirty="0"/>
-          </a:p>
-        </p:txBody>
-      </p:sp>
-      <p:sp>
-        <p:nvSpPr>
-          <p:cNvPr id="4" name="where0"/>
-          <p:cNvSpPr/>
-          <p:nvPr/>
-        </p:nvSpPr>
-        <p:spPr>
-          <a:xfrm>
-            <a:off x="548640" y="1463040"/>
-            <a:ext cx="3520440" cy="4709160"/>
-          </a:xfrm>
-          <a:prstGeom prst="roundRect">
-            <a:avLst>
-              <a:gd name="adj" fmla="val 3117"/>
-            </a:avLst>
-          </a:prstGeom>
-          <a:solidFill>
-            <a:srgbClr val="F6F6F6"/>
-          </a:solidFill>
-          <a:ln/>
-        </p:spPr>
-      </p:sp>
-      <p:sp>
-        <p:nvSpPr>
-          <p:cNvPr id="5" name="Shape 3"/>
-          <p:cNvSpPr/>
-          <p:nvPr/>
-        </p:nvSpPr>
-        <p:spPr>
-          <a:xfrm>
-            <a:off x="822960" y="1737360"/>
-            <a:ext cx="731520" cy="731520"/>
-          </a:xfrm>
-          <a:prstGeom prst="ellipse">
-            <a:avLst/>
-          </a:prstGeom>
-          <a:solidFill>
-            <a:srgbClr val="C8102E"/>
-          </a:solidFill>
-          <a:ln/>
-        </p:spPr>
-      </p:sp>
-      <p:pic>
-        <p:nvPicPr>
-          <p:cNvPr id="6" name="Image 0" descr="preencoded.png">    </p:cNvPr>
-          <p:cNvPicPr>
-            <a:picLocks noChangeAspect="1"/>
-          </p:cNvPicPr>
-          <p:nvPr/>
-        </p:nvPicPr>
-        <p:blipFill>
-          <a:blip r:embed="rId1"/>
-          <a:stretch>
-            <a:fillRect/>
-          </a:stretch>
-        </p:blipFill>
-        <p:spPr>
-          <a:xfrm>
-            <a:off x="1005840" y="1920240"/>
-            <a:ext cx="365760" cy="365760"/>
-          </a:xfrm>
-          <a:prstGeom prst="rect">
-            <a:avLst/>
-          </a:prstGeom>
-        </p:spPr>
-      </p:pic>
-      <p:sp>
-        <p:nvSpPr>
-          <p:cNvPr id="7" name="Text 4"/>
-          <p:cNvSpPr txBox="1"/>
-          <p:nvPr/>
-        </p:nvSpPr>
-        <p:spPr>
-          <a:xfrm>
-            <a:off x="2926080" y="1783080"/>
-            <a:ext cx="868680" cy="548640"/>
-          </a:xfrm>
-          <a:prstGeom prst="rect">
-            <a:avLst/>
-          </a:prstGeom>
-          <a:noFill/>
-          <a:ln/>
-        </p:spPr>
-        <p:txBody>
-          <a:bodyPr wrap="square" lIns="0" tIns="0" rIns="0" bIns="0" rtlCol="0" anchor="ctr"/>
-          <a:lstStyle/>
-          <a:p>
-            <a:pPr algn="r" indent="0" marL="0">
-              <a:buNone/>
-            </a:pPr>
-            <a:r>
-              <a:rPr lang="en-US" sz="2600" b="1" dirty="0">
-                <a:solidFill>
-                  <a:srgbClr val="B5B5B5"/>
-                </a:solidFill>
-              </a:rPr>
-              <a:t>01</a:t>
-            </a:r>
-            <a:endParaRPr lang="en-US" sz="2600" dirty="0"/>
-          </a:p>
-        </p:txBody>
-      </p:sp>
-      <p:sp>
-        <p:nvSpPr>
-          <p:cNvPr id="8" name="Text 5"/>
-          <p:cNvSpPr txBox="1"/>
-          <p:nvPr/>
-        </p:nvSpPr>
-        <p:spPr>
-          <a:xfrm>
-            <a:off x="822960" y="2606040"/>
-            <a:ext cx="3108960" cy="502920"/>
-          </a:xfrm>
-          <a:prstGeom prst="rect">
-            <a:avLst/>
-          </a:prstGeom>
-          <a:noFill/>
-          <a:ln/>
-        </p:spPr>
-        <p:txBody>
-          <a:bodyPr wrap="square" lIns="0" tIns="0" rIns="0" bIns="0" rtlCol="0" anchor="ctr"/>
-          <a:lstStyle/>
-          <a:p>
-            <a:pPr indent="0" marL="0">
-              <a:buNone/>
-            </a:pPr>
-            <a:r>
-              <a:rPr lang="en-US" sz="2400" b="1" dirty="0">
-                <a:solidFill>
-                  <a:srgbClr val="262626"/>
-                </a:solidFill>
-              </a:rPr>
-              <a:t>健康診断</a:t>
-            </a:r>
-            <a:endParaRPr lang="en-US" sz="2400" dirty="0"/>
-          </a:p>
-        </p:txBody>
-      </p:sp>
-      <p:sp>
-        <p:nvSpPr>
-          <p:cNvPr id="9" name="Text 6"/>
-          <p:cNvSpPr txBox="1"/>
-          <p:nvPr/>
-        </p:nvSpPr>
-        <p:spPr>
-          <a:xfrm>
-            <a:off x="822960" y="3108960"/>
-            <a:ext cx="3108960" cy="411480"/>
-          </a:xfrm>
-          <a:prstGeom prst="rect">
-            <a:avLst/>
-          </a:prstGeom>
-          <a:noFill/>
-          <a:ln/>
-        </p:spPr>
-        <p:txBody>
-          <a:bodyPr wrap="square" lIns="0" tIns="0" rIns="0" bIns="0" rtlCol="0" anchor="ctr"/>
-          <a:lstStyle/>
-          <a:p>
-            <a:pPr indent="0" marL="0">
-              <a:buNone/>
-            </a:pPr>
-            <a:r>
-              <a:rPr lang="en-US" sz="1800" b="1" dirty="0">
-                <a:solidFill>
-                  <a:srgbClr val="C8102E"/>
-                </a:solidFill>
-              </a:rPr>
-              <a:t>オプション</a:t>
-            </a:r>
-            <a:endParaRPr lang="en-US" sz="1800" dirty="0"/>
-          </a:p>
-        </p:txBody>
-      </p:sp>
-      <p:pic>
-        <p:nvPicPr>
-          <p:cNvPr id="10" name="Image 1" descr="健康診断">    </p:cNvPr>
-          <p:cNvPicPr>
-            <a:picLocks noChangeAspect="1"/>
-          </p:cNvPicPr>
-          <p:nvPr/>
-        </p:nvPicPr>
-        <p:blipFill>
-          <a:blip r:embed="rId2"/>
-          <a:srcRect l="0" r="0" t="0" b="0"/>
-          <a:stretch/>
-        </p:blipFill>
-        <p:spPr>
-          <a:xfrm>
-            <a:off x="822960" y="3749040"/>
-            <a:ext cx="2971800" cy="2148840"/>
-          </a:xfrm>
-          <a:prstGeom prst="rect">
-            <a:avLst/>
-          </a:prstGeom>
-        </p:spPr>
-      </p:pic>
-      <p:sp>
-        <p:nvSpPr>
-          <p:cNvPr id="11" name="where1"/>
-          <p:cNvSpPr/>
-          <p:nvPr/>
-        </p:nvSpPr>
-        <p:spPr>
-          <a:xfrm>
-            <a:off x="4334256" y="1463040"/>
-            <a:ext cx="3520440" cy="4709160"/>
-          </a:xfrm>
-          <a:prstGeom prst="roundRect">
-            <a:avLst>
-              <a:gd name="adj" fmla="val 3117"/>
-            </a:avLst>
-          </a:prstGeom>
-          <a:solidFill>
-            <a:srgbClr val="F6F6F6"/>
-          </a:solidFill>
-          <a:ln/>
-        </p:spPr>
-      </p:sp>
-      <p:sp>
-        <p:nvSpPr>
-          <p:cNvPr id="12" name="Shape 8"/>
-          <p:cNvSpPr/>
-          <p:nvPr/>
-        </p:nvSpPr>
-        <p:spPr>
-          <a:xfrm>
-            <a:off x="4608576" y="1737360"/>
-            <a:ext cx="731520" cy="731520"/>
-          </a:xfrm>
-          <a:prstGeom prst="ellipse">
-            <a:avLst/>
-          </a:prstGeom>
-          <a:solidFill>
-            <a:srgbClr val="C8102E"/>
-          </a:solidFill>
-          <a:ln/>
-        </p:spPr>
-      </p:sp>
-      <p:pic>
-        <p:nvPicPr>
-          <p:cNvPr id="13" name="Image 2" descr="preencoded.png">    </p:cNvPr>
-          <p:cNvPicPr>
-            <a:picLocks noChangeAspect="1"/>
-          </p:cNvPicPr>
-          <p:nvPr/>
-        </p:nvPicPr>
-        <p:blipFill>
-          <a:blip r:embed="rId3"/>
-          <a:stretch>
-            <a:fillRect/>
-          </a:stretch>
-        </p:blipFill>
-        <p:spPr>
-          <a:xfrm>
-            <a:off x="4791456" y="1920240"/>
-            <a:ext cx="365760" cy="365760"/>
-          </a:xfrm>
-          <a:prstGeom prst="rect">
-            <a:avLst/>
-          </a:prstGeom>
-        </p:spPr>
-      </p:pic>
-      <p:sp>
-        <p:nvSpPr>
-          <p:cNvPr id="14" name="Text 9"/>
-          <p:cNvSpPr txBox="1"/>
-          <p:nvPr/>
-        </p:nvSpPr>
-        <p:spPr>
-          <a:xfrm>
-            <a:off x="6711696" y="1783080"/>
-            <a:ext cx="868680" cy="548640"/>
-          </a:xfrm>
-          <a:prstGeom prst="rect">
-            <a:avLst/>
-          </a:prstGeom>
-          <a:noFill/>
-          <a:ln/>
-        </p:spPr>
-        <p:txBody>
-          <a:bodyPr wrap="square" lIns="0" tIns="0" rIns="0" bIns="0" rtlCol="0" anchor="ctr"/>
-          <a:lstStyle/>
-          <a:p>
-            <a:pPr algn="r" indent="0" marL="0">
-              <a:buNone/>
-            </a:pPr>
-            <a:r>
-              <a:rPr lang="en-US" sz="2600" b="1" dirty="0">
-                <a:solidFill>
-                  <a:srgbClr val="B5B5B5"/>
-                </a:solidFill>
-              </a:rPr>
-              <a:t>02</a:t>
-            </a:r>
-            <a:endParaRPr lang="en-US" sz="2600" dirty="0"/>
-          </a:p>
-        </p:txBody>
-      </p:sp>
-      <p:sp>
-        <p:nvSpPr>
-          <p:cNvPr id="15" name="Text 10"/>
-          <p:cNvSpPr txBox="1"/>
-          <p:nvPr/>
-        </p:nvSpPr>
-        <p:spPr>
-          <a:xfrm>
-            <a:off x="4608576" y="2606040"/>
-            <a:ext cx="3108960" cy="502920"/>
-          </a:xfrm>
-          <a:prstGeom prst="rect">
-            <a:avLst/>
-          </a:prstGeom>
-          <a:noFill/>
-          <a:ln/>
-        </p:spPr>
-        <p:txBody>
-          <a:bodyPr wrap="square" lIns="0" tIns="0" rIns="0" bIns="0" rtlCol="0" anchor="ctr"/>
-          <a:lstStyle/>
-          <a:p>
-            <a:pPr indent="0" marL="0">
-              <a:buNone/>
-            </a:pPr>
-            <a:r>
-              <a:rPr lang="en-US" sz="2400" b="1" dirty="0">
-                <a:solidFill>
-                  <a:srgbClr val="262626"/>
-                </a:solidFill>
-              </a:rPr>
-              <a:t>ゆびさきセルフ測定室</a:t>
-            </a:r>
-            <a:endParaRPr lang="en-US" sz="2400" dirty="0"/>
-          </a:p>
-        </p:txBody>
-      </p:sp>
-      <p:sp>
-        <p:nvSpPr>
-          <p:cNvPr id="16" name="Text 11"/>
-          <p:cNvSpPr txBox="1"/>
-          <p:nvPr/>
-        </p:nvSpPr>
-        <p:spPr>
-          <a:xfrm>
-            <a:off x="4608576" y="3108960"/>
-            <a:ext cx="3108960" cy="411480"/>
-          </a:xfrm>
-          <a:prstGeom prst="rect">
-            <a:avLst/>
-          </a:prstGeom>
-          <a:noFill/>
-          <a:ln/>
-        </p:spPr>
-        <p:txBody>
-          <a:bodyPr wrap="square" lIns="0" tIns="0" rIns="0" bIns="0" rtlCol="0" anchor="ctr"/>
-          <a:lstStyle/>
-          <a:p>
-            <a:pPr indent="0" marL="0">
-              <a:buNone/>
-            </a:pPr>
-            <a:r>
-              <a:rPr lang="en-US" sz="1800" b="1" dirty="0">
-                <a:solidFill>
-                  <a:srgbClr val="C8102E"/>
-                </a:solidFill>
-              </a:rPr>
-              <a:t>「ゆびさきナビ」で検索</a:t>
-            </a:r>
-            <a:endParaRPr lang="en-US" sz="1800" dirty="0"/>
-          </a:p>
-        </p:txBody>
-      </p:sp>
-      <p:pic>
-        <p:nvPicPr>
-          <p:cNvPr id="17" name="Image 3" descr="ゆびさきセルフ測定室">    </p:cNvPr>
-          <p:cNvPicPr>
-            <a:picLocks noChangeAspect="1"/>
-          </p:cNvPicPr>
-          <p:nvPr/>
-        </p:nvPicPr>
-        <p:blipFill>
-          <a:blip r:embed="rId4"/>
-          <a:srcRect l="0" r="0" t="0" b="0"/>
-          <a:stretch/>
-        </p:blipFill>
-        <p:spPr>
-          <a:xfrm>
-            <a:off x="4608576" y="3749040"/>
-            <a:ext cx="2971800" cy="2148840"/>
-          </a:xfrm>
-          <a:prstGeom prst="rect">
-            <a:avLst/>
-          </a:prstGeom>
-        </p:spPr>
-      </p:pic>
-      <p:sp>
-        <p:nvSpPr>
-          <p:cNvPr id="18" name="where2"/>
-          <p:cNvSpPr/>
-          <p:nvPr/>
-        </p:nvSpPr>
-        <p:spPr>
-          <a:xfrm>
-            <a:off x="8119872" y="1463040"/>
-            <a:ext cx="3520440" cy="4709160"/>
-          </a:xfrm>
-          <a:prstGeom prst="roundRect">
-            <a:avLst>
-              <a:gd name="adj" fmla="val 3117"/>
-            </a:avLst>
-          </a:prstGeom>
-          <a:solidFill>
-            <a:srgbClr val="F6F6F6"/>
-          </a:solidFill>
-          <a:ln/>
-        </p:spPr>
-      </p:sp>
-      <p:sp>
-        <p:nvSpPr>
-          <p:cNvPr id="19" name="Shape 13"/>
-          <p:cNvSpPr/>
-          <p:nvPr/>
-        </p:nvSpPr>
-        <p:spPr>
-          <a:xfrm>
-            <a:off x="8394192" y="1737360"/>
-            <a:ext cx="731520" cy="731520"/>
-          </a:xfrm>
-          <a:prstGeom prst="ellipse">
-            <a:avLst/>
-          </a:prstGeom>
-          <a:solidFill>
-            <a:srgbClr val="C8102E"/>
-          </a:solidFill>
-          <a:ln/>
-        </p:spPr>
-      </p:sp>
-      <p:pic>
-        <p:nvPicPr>
-          <p:cNvPr id="20" name="Image 4" descr="preencoded.png">    </p:cNvPr>
-          <p:cNvPicPr>
-            <a:picLocks noChangeAspect="1"/>
-          </p:cNvPicPr>
-          <p:nvPr/>
-        </p:nvPicPr>
-        <p:blipFill>
-          <a:blip r:embed="rId5"/>
-          <a:stretch>
-            <a:fillRect/>
-          </a:stretch>
-        </p:blipFill>
-        <p:spPr>
-          <a:xfrm>
-            <a:off x="8577072" y="1920240"/>
-            <a:ext cx="365760" cy="365760"/>
-          </a:xfrm>
-          <a:prstGeom prst="rect">
-            <a:avLst/>
-          </a:prstGeom>
-        </p:spPr>
-      </p:pic>
-      <p:sp>
-        <p:nvSpPr>
-          <p:cNvPr id="21" name="Text 14"/>
-          <p:cNvSpPr txBox="1"/>
-          <p:nvPr/>
-        </p:nvSpPr>
-        <p:spPr>
-          <a:xfrm>
-            <a:off x="10497312" y="1783080"/>
-            <a:ext cx="868680" cy="548640"/>
-          </a:xfrm>
-          <a:prstGeom prst="rect">
-            <a:avLst/>
-          </a:prstGeom>
-          <a:noFill/>
-          <a:ln/>
-        </p:spPr>
-        <p:txBody>
-          <a:bodyPr wrap="square" lIns="0" tIns="0" rIns="0" bIns="0" rtlCol="0" anchor="ctr"/>
-          <a:lstStyle/>
-          <a:p>
-            <a:pPr algn="r" indent="0" marL="0">
-              <a:buNone/>
-            </a:pPr>
-            <a:r>
-              <a:rPr lang="en-US" sz="2600" b="1" dirty="0">
-                <a:solidFill>
-                  <a:srgbClr val="B5B5B5"/>
-                </a:solidFill>
-              </a:rPr>
-              <a:t>03</a:t>
-            </a:r>
-            <a:endParaRPr lang="en-US" sz="2600" dirty="0"/>
-          </a:p>
-        </p:txBody>
-      </p:sp>
-      <p:sp>
-        <p:nvSpPr>
-          <p:cNvPr id="22" name="Text 15"/>
-          <p:cNvSpPr txBox="1"/>
-          <p:nvPr/>
-        </p:nvSpPr>
-        <p:spPr>
-          <a:xfrm>
-            <a:off x="8394192" y="2606040"/>
-            <a:ext cx="3108960" cy="502920"/>
-          </a:xfrm>
-          <a:prstGeom prst="rect">
-            <a:avLst/>
-          </a:prstGeom>
-          <a:noFill/>
-          <a:ln/>
-        </p:spPr>
-        <p:txBody>
-          <a:bodyPr wrap="square" lIns="0" tIns="0" rIns="0" bIns="0" rtlCol="0" anchor="ctr"/>
-          <a:lstStyle/>
-          <a:p>
-            <a:pPr indent="0" marL="0">
-              <a:buNone/>
-            </a:pPr>
-            <a:r>
-              <a:rPr lang="en-US" sz="2400" b="1" dirty="0">
-                <a:solidFill>
-                  <a:srgbClr val="262626"/>
-                </a:solidFill>
-              </a:rPr>
-              <a:t>ご自宅</a:t>
-            </a:r>
-            <a:endParaRPr lang="en-US" sz="2400" dirty="0"/>
-          </a:p>
-        </p:txBody>
-      </p:sp>
-      <p:sp>
-        <p:nvSpPr>
-          <p:cNvPr id="23" name="Text 16"/>
-          <p:cNvSpPr txBox="1"/>
-          <p:nvPr/>
-        </p:nvSpPr>
-        <p:spPr>
-          <a:xfrm>
-            <a:off x="8394192" y="3108960"/>
-            <a:ext cx="3108960" cy="411480"/>
-          </a:xfrm>
-          <a:prstGeom prst="rect">
-            <a:avLst/>
-          </a:prstGeom>
-          <a:noFill/>
-          <a:ln/>
-        </p:spPr>
-        <p:txBody>
-          <a:bodyPr wrap="square" lIns="0" tIns="0" rIns="0" bIns="0" rtlCol="0" anchor="ctr"/>
-          <a:lstStyle/>
-          <a:p>
-            <a:pPr indent="0" marL="0">
-              <a:buNone/>
-            </a:pPr>
-            <a:r>
-              <a:rPr lang="en-US" sz="1800" b="1" dirty="0">
-                <a:solidFill>
-                  <a:srgbClr val="C8102E"/>
-                </a:solidFill>
-              </a:rPr>
-              <a:t>簡易検査キット</a:t>
-            </a:r>
-            <a:endParaRPr lang="en-US" sz="1800" dirty="0"/>
-          </a:p>
-        </p:txBody>
-      </p:sp>
-      <p:pic>
-        <p:nvPicPr>
-          <p:cNvPr id="24" name="Image 5" descr="ご自宅">    </p:cNvPr>
-          <p:cNvPicPr>
-            <a:picLocks noChangeAspect="1"/>
-          </p:cNvPicPr>
-          <p:nvPr/>
-        </p:nvPicPr>
-        <p:blipFill>
-          <a:blip r:embed="rId6"/>
-          <a:srcRect l="0" r="0" t="0" b="0"/>
-          <a:stretch/>
-        </p:blipFill>
-        <p:spPr>
-          <a:xfrm>
-            <a:off x="8394192" y="3749040"/>
-            <a:ext cx="2971800" cy="2148840"/>
-          </a:xfrm>
-          <a:prstGeom prst="rect">
-            <a:avLst/>
-          </a:prstGeom>
-        </p:spPr>
-      </p:pic>
-      <p:sp>
-        <p:nvSpPr>
-          <p:cNvPr id="25" name="Text 17"/>
-          <p:cNvSpPr txBox="1"/>
-          <p:nvPr/>
-        </p:nvSpPr>
-        <p:spPr>
-          <a:xfrm>
-            <a:off x="8467344" y="3822192"/>
-            <a:ext cx="1234440" cy="274320"/>
-          </a:xfrm>
-          <a:prstGeom prst="rect">
-            <a:avLst/>
-          </a:prstGeom>
-          <a:solidFill>
-            <a:srgbClr val="555555"/>
-          </a:solidFill>
-          <a:ln/>
-        </p:spPr>
-        <p:txBody>
-          <a:bodyPr wrap="square" lIns="0" tIns="0" rIns="0" bIns="0" rtlCol="0" anchor="ctr"/>
-          <a:lstStyle/>
-          <a:p>
-            <a:pPr algn="ctr" indent="0" marL="0">
-              <a:buNone/>
-            </a:pPr>
-            <a:r>
-              <a:rPr lang="en-US" sz="1100" dirty="0">
-                <a:solidFill>
-                  <a:srgbClr val="FFFFFF"/>
-                </a:solidFill>
-              </a:rPr>
-              <a:t>※画像はダミー</a:t>
-            </a:r>
-            <a:endParaRPr lang="en-US" sz="1100" dirty="0"/>
-          </a:p>
-        </p:txBody>
-      </p:sp>
-      <p:sp>
-        <p:nvSpPr>
-          <p:cNvPr id="25" name="Slide Number Placeholder 0"/>
-          <p:cNvSpPr>
-            <a:spLocks noGrp="1"/>
-          </p:cNvSpPr>
-          <p:nvPr>
-            <p:ph type="sldNum" sz="quarter" idx="4294967295"/>
-          </p:nvPr>
-        </p:nvSpPr>
-        <p:spPr>
-          <a:xfrm>
-            <a:off x="10469880" y="6400800"/>
-            <a:ext cx="457200" cy="274320"/>
-          </a:xfrm>
-          <a:prstGeom prst="rect">
-            <a:avLst/>
-          </a:prstGeom>
-          <a:extLst>
-            <a:ext uri="{C572A759-6A51-4108-AA02-DFA0A04FC94B}">
-              <ma14:wrappingTextBoxFlag xmlns:ma14="http://schemas.microsoft.com/office/mac/drawingml/2011/main" val="0"/>
-            </a:ext>
-          </a:extLst>
-        </p:spPr>
-        <p:txBody>
-          <a:bodyPr/>
-          <a:lstStyle>
-            <a:lvl1pPr>
-              <a:defRPr sz="1100">
-                <a:solidFill>
-                  <a:srgbClr val="7A7A7A"/>
-                </a:solidFill>
-              </a:defRPr>
-            </a:lvl1pPr>
-          </a:lstStyle>
-          <a:p>
-            <a:pPr algn="r"/>
-            <a:fld id="{F7021451-1387-4CA6-816F-3879F97B5CBC}" type="slidenum">
-              <a:rPr b="0" lang="en-US"/>
-              <a:t>11</a:t>
-            </a:fld>
-            <a:endParaRPr lang="en-US"/>
-          </a:p>
-        </p:txBody>
-      </p:sp>
-    </p:spTree>
-  </p:cSld>
-  <p:clrMapOvr>
-    <a:masterClrMapping/>
-  </p:clrMapOvr>
-</p:sld>
-</file>
-
-<file path=ppt/slides/slide12.xml><?xml version="1.0" encoding="utf-8"?>
-<p:sld xmlns:a="http://schemas.openxmlformats.org/drawingml/2006/main" xmlns:r="http://schemas.openxmlformats.org/officeDocument/2006/relationships" xmlns:p="http://schemas.openxmlformats.org/presentationml/2006/main">
-  <p:cSld name="Slide 12">
-    <p:spTree>
-      <p:nvGrpSpPr>
-        <p:cNvPr id="1" name=""/>
-        <p:cNvGrpSpPr/>
-        <p:nvPr/>
-      </p:nvGrpSpPr>
-      <p:grpSpPr>
-        <a:xfrm>
-          <a:off x="0" y="0"/>
-          <a:ext cx="0" cy="0"/>
-          <a:chOff x="0" y="0"/>
-          <a:chExt cx="0" cy="0"/>
-        </a:xfrm>
-      </p:grpSpPr>
-      <p:sp>
-        <p:nvSpPr>
           <p:cNvPr id="2" name="Shape 0"/>
           <p:cNvSpPr/>
           <p:nvPr/>
@@ -5610,12 +4787,12 @@
         </p:nvSpPr>
         <p:spPr>
           <a:xfrm>
-            <a:off x="548640" y="1600200"/>
-            <a:ext cx="3520440" cy="4343400"/>
+            <a:off x="548640" y="1508760"/>
+            <a:ext cx="5349240" cy="4663440"/>
           </a:xfrm>
           <a:prstGeom prst="roundRect">
             <a:avLst>
-              <a:gd name="adj" fmla="val 3117"/>
+              <a:gd name="adj" fmla="val 2353"/>
             </a:avLst>
           </a:prstGeom>
           <a:solidFill>
@@ -5632,8 +4809,8 @@
         </p:nvSpPr>
         <p:spPr>
           <a:xfrm>
-            <a:off x="914400" y="1965960"/>
-            <a:ext cx="914400" cy="914400"/>
+            <a:off x="1005840" y="1874520"/>
+            <a:ext cx="1143000" cy="1143000"/>
           </a:xfrm>
           <a:prstGeom prst="ellipse">
             <a:avLst/>
@@ -5660,8 +4837,8 @@
         </p:blipFill>
         <p:spPr>
           <a:xfrm>
-            <a:off x="1143000" y="2194560"/>
-            <a:ext cx="457200" cy="457200"/>
+            <a:off x="1291590" y="2160270"/>
+            <a:ext cx="571500" cy="571500"/>
           </a:xfrm>
           <a:prstGeom prst="rect">
             <a:avLst/>
@@ -5676,8 +4853,8 @@
         </p:nvSpPr>
         <p:spPr>
           <a:xfrm>
-            <a:off x="2926080" y="2011680"/>
-            <a:ext cx="822960" cy="548640"/>
+            <a:off x="4389120" y="1920240"/>
+            <a:ext cx="1097280" cy="731520"/>
           </a:xfrm>
           <a:prstGeom prst="rect">
             <a:avLst/>
@@ -5693,14 +4870,14 @@
               <a:buNone/>
             </a:pPr>
             <a:r>
-              <a:rPr lang="en-US" sz="2800" b="1" dirty="0">
+              <a:rPr lang="en-US" sz="4000" b="1" dirty="0">
                 <a:solidFill>
                   <a:srgbClr val="B5B5B5"/>
                 </a:solidFill>
               </a:rPr>
               <a:t>01</a:t>
             </a:r>
-            <a:endParaRPr lang="en-US" sz="2800" dirty="0"/>
+            <a:endParaRPr lang="en-US" sz="4000" dirty="0"/>
           </a:p>
         </p:txBody>
       </p:sp>
@@ -5712,8 +4889,8 @@
         </p:nvSpPr>
         <p:spPr>
           <a:xfrm>
-            <a:off x="914400" y="3154680"/>
-            <a:ext cx="2834640" cy="411480"/>
+            <a:off x="1005840" y="3246120"/>
+            <a:ext cx="4572000" cy="457200"/>
           </a:xfrm>
           <a:prstGeom prst="rect">
             <a:avLst/>
@@ -5729,14 +4906,14 @@
               <a:buNone/>
             </a:pPr>
             <a:r>
-              <a:rPr lang="en-US" sz="1800" b="1" dirty="0">
+              <a:rPr lang="en-US" sz="2400" b="1" dirty="0">
                 <a:solidFill>
                   <a:srgbClr val="7A7A7A"/>
                 </a:solidFill>
               </a:rPr>
               <a:t>主催</a:t>
             </a:r>
-            <a:endParaRPr lang="en-US" sz="1800" dirty="0"/>
+            <a:endParaRPr lang="en-US" sz="2400" dirty="0"/>
           </a:p>
         </p:txBody>
       </p:sp>
@@ -5748,31 +4925,31 @@
         </p:nvSpPr>
         <p:spPr>
           <a:xfrm>
-            <a:off x="914400" y="3611880"/>
-            <a:ext cx="3154680" cy="1005840"/>
-          </a:xfrm>
-          <a:prstGeom prst="rect">
-            <a:avLst/>
-          </a:prstGeom>
-          <a:noFill/>
-          <a:ln/>
-        </p:spPr>
-        <p:txBody>
-          <a:bodyPr wrap="square" lIns="0" tIns="0" rIns="0" bIns="0" rtlCol="0" anchor="t"/>
+            <a:off x="1005840" y="3749040"/>
+            <a:ext cx="4754880" cy="685800"/>
+          </a:xfrm>
+          <a:prstGeom prst="rect">
+            <a:avLst/>
+          </a:prstGeom>
+          <a:noFill/>
+          <a:ln/>
+        </p:spPr>
+        <p:txBody>
+          <a:bodyPr wrap="square" lIns="0" tIns="0" rIns="0" bIns="0" rtlCol="0" anchor="ctr"/>
           <a:lstStyle/>
           <a:p>
             <a:pPr indent="0" marL="0">
               <a:buNone/>
             </a:pPr>
             <a:r>
-              <a:rPr lang="en-US" sz="2200" b="1" dirty="0">
+              <a:rPr lang="en-US" sz="3100" b="1" dirty="0">
                 <a:solidFill>
                   <a:srgbClr val="262626"/>
                 </a:solidFill>
               </a:rPr>
               <a:t>日本生活習慣病予防協会</a:t>
             </a:r>
-            <a:endParaRPr lang="en-US" sz="2200" dirty="0"/>
+            <a:endParaRPr lang="en-US" sz="3100" dirty="0"/>
           </a:p>
         </p:txBody>
       </p:sp>
@@ -5784,8 +4961,8 @@
         </p:nvSpPr>
         <p:spPr>
           <a:xfrm>
-            <a:off x="914400" y="4663440"/>
-            <a:ext cx="2926080" cy="1005840"/>
+            <a:off x="1005840" y="4617720"/>
+            <a:ext cx="4663440" cy="1280160"/>
           </a:xfrm>
           <a:prstGeom prst="rect">
             <a:avLst/>
@@ -5801,14 +4978,14 @@
               <a:buNone/>
             </a:pPr>
             <a:r>
-              <a:rPr lang="en-US" sz="1800" dirty="0">
+              <a:rPr lang="en-US" sz="2400" dirty="0">
                 <a:solidFill>
                   <a:srgbClr val="4A4A4A"/>
                 </a:solidFill>
               </a:rPr>
               <a:t>健康標語「一無、二少、三多」を提言</a:t>
             </a:r>
-            <a:endParaRPr lang="en-US" sz="1800" dirty="0"/>
+            <a:endParaRPr lang="en-US" sz="2400" dirty="0"/>
           </a:p>
         </p:txBody>
       </p:sp>
@@ -5820,12 +4997,12 @@
         </p:nvSpPr>
         <p:spPr>
           <a:xfrm>
-            <a:off x="4334256" y="1600200"/>
-            <a:ext cx="3520440" cy="4343400"/>
+            <a:off x="6291072" y="1508760"/>
+            <a:ext cx="5349240" cy="4663440"/>
           </a:xfrm>
           <a:prstGeom prst="roundRect">
             <a:avLst>
-              <a:gd name="adj" fmla="val 3117"/>
+              <a:gd name="adj" fmla="val 2353"/>
             </a:avLst>
           </a:prstGeom>
           <a:solidFill>
@@ -5842,8 +5019,8 @@
         </p:nvSpPr>
         <p:spPr>
           <a:xfrm>
-            <a:off x="4700016" y="1965960"/>
-            <a:ext cx="914400" cy="914400"/>
+            <a:off x="6748272" y="1874520"/>
+            <a:ext cx="1143000" cy="1143000"/>
           </a:xfrm>
           <a:prstGeom prst="ellipse">
             <a:avLst/>
@@ -5870,8 +5047,8 @@
         </p:blipFill>
         <p:spPr>
           <a:xfrm>
-            <a:off x="4928616" y="2194560"/>
-            <a:ext cx="457200" cy="457200"/>
+            <a:off x="7034022" y="2160270"/>
+            <a:ext cx="571500" cy="571500"/>
           </a:xfrm>
           <a:prstGeom prst="rect">
             <a:avLst/>
@@ -5886,8 +5063,8 @@
         </p:nvSpPr>
         <p:spPr>
           <a:xfrm>
-            <a:off x="6711696" y="2011680"/>
-            <a:ext cx="822960" cy="548640"/>
+            <a:off x="10131552" y="1920240"/>
+            <a:ext cx="1097280" cy="731520"/>
           </a:xfrm>
           <a:prstGeom prst="rect">
             <a:avLst/>
@@ -5903,14 +5080,14 @@
               <a:buNone/>
             </a:pPr>
             <a:r>
-              <a:rPr lang="en-US" sz="2800" b="1" dirty="0">
+              <a:rPr lang="en-US" sz="4000" b="1" dirty="0">
                 <a:solidFill>
                   <a:srgbClr val="B5B5B5"/>
                 </a:solidFill>
               </a:rPr>
               <a:t>02</a:t>
             </a:r>
-            <a:endParaRPr lang="en-US" sz="2800" dirty="0"/>
+            <a:endParaRPr lang="en-US" sz="4000" dirty="0"/>
           </a:p>
         </p:txBody>
       </p:sp>
@@ -5922,8 +5099,8 @@
         </p:nvSpPr>
         <p:spPr>
           <a:xfrm>
-            <a:off x="4700016" y="3154680"/>
-            <a:ext cx="2834640" cy="411480"/>
+            <a:off x="6748272" y="3246120"/>
+            <a:ext cx="4572000" cy="457200"/>
           </a:xfrm>
           <a:prstGeom prst="rect">
             <a:avLst/>
@@ -5939,14 +5116,14 @@
               <a:buNone/>
             </a:pPr>
             <a:r>
-              <a:rPr lang="en-US" sz="1800" b="1" dirty="0">
+              <a:rPr lang="en-US" sz="2400" b="1" dirty="0">
                 <a:solidFill>
                   <a:srgbClr val="7A7A7A"/>
                 </a:solidFill>
               </a:rPr>
               <a:t>調査発表</a:t>
             </a:r>
-            <a:endParaRPr lang="en-US" sz="1800" dirty="0"/>
+            <a:endParaRPr lang="en-US" sz="2400" dirty="0"/>
           </a:p>
         </p:txBody>
       </p:sp>
@@ -5958,31 +5135,31 @@
         </p:nvSpPr>
         <p:spPr>
           <a:xfrm>
-            <a:off x="4700016" y="3611880"/>
-            <a:ext cx="3154680" cy="1005840"/>
-          </a:xfrm>
-          <a:prstGeom prst="rect">
-            <a:avLst/>
-          </a:prstGeom>
-          <a:noFill/>
-          <a:ln/>
-        </p:spPr>
-        <p:txBody>
-          <a:bodyPr wrap="square" lIns="0" tIns="0" rIns="0" bIns="0" rtlCol="0" anchor="t"/>
+            <a:off x="6748272" y="3749040"/>
+            <a:ext cx="4754880" cy="685800"/>
+          </a:xfrm>
+          <a:prstGeom prst="rect">
+            <a:avLst/>
+          </a:prstGeom>
+          <a:noFill/>
+          <a:ln/>
+        </p:spPr>
+        <p:txBody>
+          <a:bodyPr wrap="square" lIns="0" tIns="0" rIns="0" bIns="0" rtlCol="0" anchor="ctr"/>
           <a:lstStyle/>
           <a:p>
             <a:pPr indent="0" marL="0">
               <a:buNone/>
             </a:pPr>
             <a:r>
-              <a:rPr lang="en-US" sz="2200" b="1" dirty="0">
+              <a:rPr lang="en-US" sz="3100" b="1" dirty="0">
                 <a:solidFill>
                   <a:srgbClr val="262626"/>
                 </a:solidFill>
               </a:rPr>
               <a:t>医師・生活者調査</a:t>
             </a:r>
-            <a:endParaRPr lang="en-US" sz="2200" dirty="0"/>
+            <a:endParaRPr lang="en-US" sz="3100" dirty="0"/>
           </a:p>
         </p:txBody>
       </p:sp>
@@ -5994,8 +5171,8 @@
         </p:nvSpPr>
         <p:spPr>
           <a:xfrm>
-            <a:off x="4700016" y="4663440"/>
-            <a:ext cx="2926080" cy="1005840"/>
+            <a:off x="6748272" y="4617720"/>
+            <a:ext cx="4663440" cy="1280160"/>
           </a:xfrm>
           <a:prstGeom prst="rect">
             <a:avLst/>
@@ -6011,224 +5188,28 @@
               <a:buNone/>
             </a:pPr>
             <a:r>
-              <a:rPr lang="en-US" sz="1800" dirty="0">
+              <a:rPr lang="en-US" sz="2400" dirty="0">
                 <a:solidFill>
                   <a:srgbClr val="4A4A4A"/>
                 </a:solidFill>
               </a:rPr>
-              <a:t>医師が血糖値より重視する指標とは</a:t>
-            </a:r>
-            <a:endParaRPr lang="en-US" sz="1800" dirty="0"/>
-          </a:p>
-        </p:txBody>
-      </p:sp>
-      <p:sp>
-        <p:nvSpPr>
-          <p:cNvPr id="18" name="card2"/>
-          <p:cNvSpPr/>
-          <p:nvPr/>
-        </p:nvSpPr>
-        <p:spPr>
-          <a:xfrm>
-            <a:off x="8119872" y="1600200"/>
-            <a:ext cx="3520440" cy="4343400"/>
-          </a:xfrm>
-          <a:prstGeom prst="roundRect">
-            <a:avLst>
-              <a:gd name="adj" fmla="val 3117"/>
-            </a:avLst>
-          </a:prstGeom>
-          <a:solidFill>
-            <a:srgbClr val="FBECEE"/>
-          </a:solidFill>
-          <a:ln/>
-        </p:spPr>
-      </p:sp>
-      <p:sp>
-        <p:nvSpPr>
-          <p:cNvPr id="19" name="Shape 15"/>
-          <p:cNvSpPr/>
-          <p:nvPr/>
-        </p:nvSpPr>
-        <p:spPr>
-          <a:xfrm>
-            <a:off x="8485632" y="1965960"/>
-            <a:ext cx="914400" cy="914400"/>
-          </a:xfrm>
-          <a:prstGeom prst="ellipse">
-            <a:avLst/>
-          </a:prstGeom>
-          <a:solidFill>
-            <a:srgbClr val="C8102E"/>
-          </a:solidFill>
-          <a:ln/>
-        </p:spPr>
-      </p:sp>
-      <p:pic>
-        <p:nvPicPr>
-          <p:cNvPr id="20" name="Image 2" descr="preencoded.png">    </p:cNvPr>
-          <p:cNvPicPr>
-            <a:picLocks noChangeAspect="1"/>
-          </p:cNvPicPr>
-          <p:nvPr/>
-        </p:nvPicPr>
-        <p:blipFill>
-          <a:blip r:embed="rId3"/>
-          <a:stretch>
-            <a:fillRect/>
-          </a:stretch>
-        </p:blipFill>
-        <p:spPr>
-          <a:xfrm>
-            <a:off x="8714232" y="2194560"/>
-            <a:ext cx="457200" cy="457200"/>
-          </a:xfrm>
-          <a:prstGeom prst="rect">
-            <a:avLst/>
-          </a:prstGeom>
-        </p:spPr>
-      </p:pic>
-      <p:sp>
-        <p:nvSpPr>
-          <p:cNvPr id="21" name="Text 16"/>
-          <p:cNvSpPr txBox="1"/>
-          <p:nvPr/>
-        </p:nvSpPr>
-        <p:spPr>
-          <a:xfrm>
-            <a:off x="10497312" y="2011680"/>
-            <a:ext cx="822960" cy="548640"/>
-          </a:xfrm>
-          <a:prstGeom prst="rect">
-            <a:avLst/>
-          </a:prstGeom>
-          <a:noFill/>
-          <a:ln/>
-        </p:spPr>
-        <p:txBody>
-          <a:bodyPr wrap="square" lIns="0" tIns="0" rIns="0" bIns="0" rtlCol="0" anchor="ctr"/>
-          <a:lstStyle/>
-          <a:p>
-            <a:pPr algn="r" indent="0" marL="0">
-              <a:buNone/>
-            </a:pPr>
-            <a:r>
-              <a:rPr lang="en-US" sz="2800" b="1" dirty="0">
+              <a:t>医師が血糖値より重視する指標は</a:t>
+            </a:r>
+            <a:endParaRPr lang="en-US" sz="2400" dirty="0"/>
+          </a:p>
+          <a:p>
+            <a:pPr indent="0" marL="0">
+              <a:buNone/>
+            </a:pPr>
+            <a:r>
+              <a:rPr lang="en-US" sz="3200" b="1" dirty="0">
                 <a:solidFill>
                   <a:srgbClr val="C8102E"/>
                 </a:solidFill>
               </a:rPr>
-              <a:t>03</a:t>
-            </a:r>
-            <a:endParaRPr lang="en-US" sz="2800" dirty="0"/>
-          </a:p>
-        </p:txBody>
-      </p:sp>
-      <p:sp>
-        <p:nvSpPr>
-          <p:cNvPr id="22" name="Text 17"/>
-          <p:cNvSpPr txBox="1"/>
-          <p:nvPr/>
-        </p:nvSpPr>
-        <p:spPr>
-          <a:xfrm>
-            <a:off x="8485632" y="3154680"/>
-            <a:ext cx="2834640" cy="411480"/>
-          </a:xfrm>
-          <a:prstGeom prst="rect">
-            <a:avLst/>
-          </a:prstGeom>
-          <a:noFill/>
-          <a:ln/>
-        </p:spPr>
-        <p:txBody>
-          <a:bodyPr wrap="square" lIns="0" tIns="0" rIns="0" bIns="0" rtlCol="0" anchor="ctr"/>
-          <a:lstStyle/>
-          <a:p>
-            <a:pPr indent="0" marL="0">
-              <a:buNone/>
-            </a:pPr>
-            <a:r>
-              <a:rPr lang="en-US" sz="1800" b="1" dirty="0">
-                <a:solidFill>
-                  <a:srgbClr val="C8102E"/>
-                </a:solidFill>
-              </a:rPr>
-              <a:t>スペシャルトーク</a:t>
-            </a:r>
-            <a:endParaRPr lang="en-US" sz="1800" dirty="0"/>
-          </a:p>
-        </p:txBody>
-      </p:sp>
-      <p:sp>
-        <p:nvSpPr>
-          <p:cNvPr id="23" name="Text 18"/>
-          <p:cNvSpPr txBox="1"/>
-          <p:nvPr/>
-        </p:nvSpPr>
-        <p:spPr>
-          <a:xfrm>
-            <a:off x="8485632" y="3611880"/>
-            <a:ext cx="3154680" cy="1005840"/>
-          </a:xfrm>
-          <a:prstGeom prst="rect">
-            <a:avLst/>
-          </a:prstGeom>
-          <a:noFill/>
-          <a:ln/>
-        </p:spPr>
-        <p:txBody>
-          <a:bodyPr wrap="square" lIns="0" tIns="0" rIns="0" bIns="0" rtlCol="0" anchor="t"/>
-          <a:lstStyle/>
-          <a:p>
-            <a:pPr indent="0" marL="0">
-              <a:buNone/>
-            </a:pPr>
-            <a:r>
-              <a:rPr lang="en-US" sz="2200" b="1" dirty="0">
-                <a:solidFill>
-                  <a:srgbClr val="262626"/>
-                </a:solidFill>
-              </a:rPr>
               <a:t>ヘモグロビンA1c</a:t>
             </a:r>
-            <a:endParaRPr lang="en-US" sz="2200" dirty="0"/>
-          </a:p>
-        </p:txBody>
-      </p:sp>
-      <p:sp>
-        <p:nvSpPr>
-          <p:cNvPr id="24" name="Text 19"/>
-          <p:cNvSpPr txBox="1"/>
-          <p:nvPr/>
-        </p:nvSpPr>
-        <p:spPr>
-          <a:xfrm>
-            <a:off x="8485632" y="4663440"/>
-            <a:ext cx="2926080" cy="1005840"/>
-          </a:xfrm>
-          <a:prstGeom prst="rect">
-            <a:avLst/>
-          </a:prstGeom>
-          <a:noFill/>
-          <a:ln/>
-        </p:spPr>
-        <p:txBody>
-          <a:bodyPr wrap="square" lIns="0" tIns="0" rIns="0" bIns="0" rtlCol="0" anchor="t"/>
-          <a:lstStyle/>
-          <a:p>
-            <a:pPr indent="0" marL="0">
-              <a:buNone/>
-            </a:pPr>
-            <a:r>
-              <a:rPr lang="en-US" sz="1800" dirty="0">
-                <a:solidFill>
-                  <a:srgbClr val="4A4A4A"/>
-                </a:solidFill>
-              </a:rPr>
-              <a:t>鳴戸親方 × 伊藤 大介 医師</a:t>
-            </a:r>
-            <a:endParaRPr lang="en-US" sz="1800" dirty="0"/>
+            <a:endParaRPr lang="en-US" sz="2400" dirty="0"/>
           </a:p>
         </p:txBody>
       </p:sp>
@@ -6302,85 +5283,9 @@
           <a:chExt cx="0" cy="0"/>
         </a:xfrm>
       </p:grpSpPr>
-      <p:sp>
-        <p:nvSpPr>
-          <p:cNvPr id="2" name="Text 0"/>
-          <p:cNvSpPr/>
-          <p:nvPr>
-            <p:ph idx="100" type="body" hasCustomPrompt="1"/>
-          </p:nvPr>
-        </p:nvSpPr>
-        <p:spPr>
-          <a:xfrm>
-            <a:off x="548640" y="256032"/>
-            <a:ext cx="7315200" cy="329184"/>
-          </a:xfrm>
-          <a:prstGeom prst="rect">
-            <a:avLst/>
-          </a:prstGeom>
-          <a:noFill/>
-          <a:ln/>
-        </p:spPr>
-        <p:txBody>
-          <a:bodyPr wrap="square" lIns="0" tIns="0" rIns="0" bIns="0" rtlCol="0" anchor="ctr"/>
-          <a:lstStyle/>
-          <a:p>
-            <a:pPr indent="0" marL="0">
-              <a:buNone/>
-            </a:pPr>
-            <a:r>
-              <a:rPr lang="en-US" sz="1500" b="1" dirty="0">
-                <a:solidFill>
-                  <a:srgbClr val="C8102E"/>
-                </a:solidFill>
-              </a:rPr>
-              <a:t>SPEAKERS</a:t>
-            </a:r>
-            <a:endParaRPr lang="en-US" sz="1500" dirty="0"/>
-          </a:p>
-        </p:txBody>
-      </p:sp>
-      <p:sp>
-        <p:nvSpPr>
-          <p:cNvPr id="3" name="Text 0"/>
-          <p:cNvSpPr/>
-          <p:nvPr>
-            <p:ph idx="101" type="title" hasCustomPrompt="1"/>
-          </p:nvPr>
-        </p:nvSpPr>
-        <p:spPr>
-          <a:xfrm>
-            <a:off x="548640" y="566928"/>
-            <a:ext cx="11091672" cy="658368"/>
-          </a:xfrm>
-          <a:prstGeom prst="rect">
-            <a:avLst/>
-          </a:prstGeom>
-          <a:noFill/>
-          <a:ln/>
-        </p:spPr>
-        <p:txBody>
-          <a:bodyPr wrap="square" lIns="0" tIns="0" rIns="0" bIns="0" rtlCol="0" anchor="ctr"/>
-          <a:lstStyle/>
-          <a:p>
-            <a:pPr algn="l" indent="0" marL="0">
-              <a:buNone/>
-            </a:pPr>
-            <a:r>
-              <a:rPr lang="en-US" sz="3200" b="1" dirty="0">
-                <a:solidFill>
-                  <a:srgbClr val="262626"/>
-                </a:solidFill>
-              </a:rPr>
-              <a:t>本日の登壇者</a:t>
-            </a:r>
-            <a:endParaRPr lang="en-US" sz="3200" dirty="0"/>
-          </a:p>
-        </p:txBody>
-      </p:sp>
       <p:pic>
         <p:nvPicPr>
-          <p:cNvPr id="4" name="Image 0" descr="鳴戸親方と伊藤大介医師">    </p:cNvPr>
+          <p:cNvPr id="2" name="Image 0" descr="鳴戸親方と伊藤大介医師">    </p:cNvPr>
           <p:cNvPicPr>
             <a:picLocks noChangeAspect="1"/>
           </p:cNvPicPr>
@@ -6394,8 +5299,8 @@
         </p:blipFill>
         <p:spPr>
           <a:xfrm>
-            <a:off x="548640" y="1508760"/>
-            <a:ext cx="6949440" cy="3822192"/>
+            <a:off x="548640" y="1325880"/>
+            <a:ext cx="7315200" cy="4023360"/>
           </a:xfrm>
           <a:prstGeom prst="rect">
             <a:avLst/>
@@ -6404,54 +5309,18 @@
       </p:pic>
       <p:sp>
         <p:nvSpPr>
-          <p:cNvPr id="5" name="Text 2"/>
-          <p:cNvSpPr txBox="1"/>
-          <p:nvPr/>
-        </p:nvSpPr>
-        <p:spPr>
-          <a:xfrm>
-            <a:off x="548640" y="5440680"/>
-            <a:ext cx="6949440" cy="320040"/>
-          </a:xfrm>
-          <a:prstGeom prst="rect">
-            <a:avLst/>
-          </a:prstGeom>
-          <a:noFill/>
-          <a:ln/>
-        </p:spPr>
-        <p:txBody>
-          <a:bodyPr wrap="square" lIns="0" tIns="0" rIns="0" bIns="0" rtlCol="0" anchor="ctr"/>
-          <a:lstStyle/>
-          <a:p>
-            <a:pPr indent="0" marL="0">
-              <a:buNone/>
-            </a:pPr>
-            <a:r>
-              <a:rPr lang="en-US" sz="1300" dirty="0">
-                <a:solidFill>
-                  <a:srgbClr val="7A7A7A"/>
-                </a:solidFill>
-              </a:rPr>
-              <a:t>写真左：鳴戸親方　／　写真右：伊藤 大介 医師</a:t>
-            </a:r>
-            <a:endParaRPr lang="en-US" sz="1300" dirty="0"/>
-          </a:p>
-        </p:txBody>
-      </p:sp>
-      <p:sp>
-        <p:nvSpPr>
-          <p:cNvPr id="6" name="speaker0"/>
+          <p:cNvPr id="3" name="speaker0"/>
           <p:cNvSpPr/>
           <p:nvPr/>
         </p:nvSpPr>
         <p:spPr>
           <a:xfrm>
-            <a:off x="7863840" y="1508760"/>
-            <a:ext cx="3776472" cy="1828800"/>
+            <a:off x="8092440" y="1325880"/>
+            <a:ext cx="3547872" cy="1947672"/>
           </a:xfrm>
           <a:prstGeom prst="roundRect">
             <a:avLst>
-              <a:gd name="adj" fmla="val 6000"/>
+              <a:gd name="adj" fmla="val 5634"/>
             </a:avLst>
           </a:prstGeom>
           <a:solidFill>
@@ -6462,14 +5331,14 @@
       </p:sp>
       <p:sp>
         <p:nvSpPr>
-          <p:cNvPr id="7" name="Text 4"/>
+          <p:cNvPr id="4" name="Text 1"/>
           <p:cNvSpPr txBox="1"/>
           <p:nvPr/>
         </p:nvSpPr>
         <p:spPr>
           <a:xfrm>
-            <a:off x="8183880" y="1828800"/>
-            <a:ext cx="3291840" cy="411480"/>
+            <a:off x="8366760" y="1645920"/>
+            <a:ext cx="3200400" cy="411480"/>
           </a:xfrm>
           <a:prstGeom prst="rect">
             <a:avLst/>
@@ -6485,27 +5354,27 @@
               <a:buNone/>
             </a:pPr>
             <a:r>
-              <a:rPr lang="en-US" sz="1800" b="1" dirty="0">
+              <a:rPr lang="en-US" sz="1900" b="1" dirty="0">
                 <a:solidFill>
                   <a:srgbClr val="C8102E"/>
                 </a:solidFill>
               </a:rPr>
               <a:t>元大関 琴欧州</a:t>
             </a:r>
-            <a:endParaRPr lang="en-US" sz="1800" dirty="0"/>
-          </a:p>
-        </p:txBody>
-      </p:sp>
-      <p:sp>
-        <p:nvSpPr>
-          <p:cNvPr id="8" name="Text 5"/>
+            <a:endParaRPr lang="en-US" sz="1900" dirty="0"/>
+          </a:p>
+        </p:txBody>
+      </p:sp>
+      <p:sp>
+        <p:nvSpPr>
+          <p:cNvPr id="5" name="Text 2"/>
           <p:cNvSpPr txBox="1"/>
           <p:nvPr/>
         </p:nvSpPr>
         <p:spPr>
           <a:xfrm>
-            <a:off x="8183880" y="2286000"/>
-            <a:ext cx="3291840" cy="731520"/>
+            <a:off x="8366760" y="2130552"/>
+            <a:ext cx="3200400" cy="777240"/>
           </a:xfrm>
           <a:prstGeom prst="rect">
             <a:avLst/>
@@ -6534,18 +5403,18 @@
       </p:sp>
       <p:sp>
         <p:nvSpPr>
-          <p:cNvPr id="9" name="speaker1"/>
+          <p:cNvPr id="6" name="speaker1"/>
           <p:cNvSpPr/>
           <p:nvPr/>
         </p:nvSpPr>
         <p:spPr>
           <a:xfrm>
-            <a:off x="7863840" y="3502152"/>
-            <a:ext cx="3776472" cy="1828800"/>
+            <a:off x="8092440" y="3401568"/>
+            <a:ext cx="3547872" cy="1947672"/>
           </a:xfrm>
           <a:prstGeom prst="roundRect">
             <a:avLst>
-              <a:gd name="adj" fmla="val 6000"/>
+              <a:gd name="adj" fmla="val 5634"/>
             </a:avLst>
           </a:prstGeom>
           <a:solidFill>
@@ -6556,14 +5425,14 @@
       </p:sp>
       <p:sp>
         <p:nvSpPr>
-          <p:cNvPr id="10" name="Text 7"/>
+          <p:cNvPr id="7" name="Text 4"/>
           <p:cNvSpPr txBox="1"/>
           <p:nvPr/>
         </p:nvSpPr>
         <p:spPr>
           <a:xfrm>
-            <a:off x="8183880" y="3822192"/>
-            <a:ext cx="3291840" cy="411480"/>
+            <a:off x="8366760" y="3721608"/>
+            <a:ext cx="3200400" cy="411480"/>
           </a:xfrm>
           <a:prstGeom prst="rect">
             <a:avLst/>
@@ -6579,27 +5448,27 @@
               <a:buNone/>
             </a:pPr>
             <a:r>
-              <a:rPr lang="en-US" sz="1800" b="1" dirty="0">
+              <a:rPr lang="en-US" sz="1900" b="1" dirty="0">
                 <a:solidFill>
                   <a:srgbClr val="4A4A4A"/>
                 </a:solidFill>
               </a:rPr>
               <a:t>一之江駅前ひまわり医院</a:t>
             </a:r>
-            <a:endParaRPr lang="en-US" sz="1800" dirty="0"/>
-          </a:p>
-        </p:txBody>
-      </p:sp>
-      <p:sp>
-        <p:nvSpPr>
-          <p:cNvPr id="11" name="Text 8"/>
+            <a:endParaRPr lang="en-US" sz="1900" dirty="0"/>
+          </a:p>
+        </p:txBody>
+      </p:sp>
+      <p:sp>
+        <p:nvSpPr>
+          <p:cNvPr id="8" name="Text 5"/>
           <p:cNvSpPr txBox="1"/>
           <p:nvPr/>
         </p:nvSpPr>
         <p:spPr>
           <a:xfrm>
-            <a:off x="8183880" y="4279392"/>
-            <a:ext cx="3291840" cy="731520"/>
+            <a:off x="8366760" y="4206240"/>
+            <a:ext cx="3200400" cy="777240"/>
           </a:xfrm>
           <a:prstGeom prst="rect">
             <a:avLst/>
@@ -6766,7 +5635,7 @@
                   <a:srgbClr val="262626"/>
                 </a:solidFill>
               </a:rPr>
-              <a:t>医師はHbA1c、生活者は血糖値を重視</a:t>
+              <a:t>医師はヘモグロビンA1c、生活者は血糖値を重視</a:t>
             </a:r>
             <a:endParaRPr lang="en-US" sz="3200" dirty="0"/>
           </a:p>
@@ -6802,7 +5671,7 @@
         </p:nvSpPr>
         <p:spPr>
           <a:xfrm>
-            <a:off x="868680" y="1645920"/>
+            <a:off x="868680" y="1600200"/>
             <a:ext cx="548640" cy="548640"/>
           </a:xfrm>
           <a:prstGeom prst="ellipse">
@@ -6830,7 +5699,7 @@
         </p:blipFill>
         <p:spPr>
           <a:xfrm>
-            <a:off x="1005840" y="1783080"/>
+            <a:off x="1005840" y="1737360"/>
             <a:ext cx="274320" cy="274320"/>
           </a:xfrm>
           <a:prstGeom prst="rect">
@@ -6846,7 +5715,7 @@
         </p:nvSpPr>
         <p:spPr>
           <a:xfrm>
-            <a:off x="1527048" y="1645920"/>
+            <a:off x="1527048" y="1600200"/>
             <a:ext cx="10332720" cy="548640"/>
           </a:xfrm>
           <a:prstGeom prst="rect">
@@ -6893,8 +5762,8 @@
         </p:nvSpPr>
         <p:spPr>
           <a:xfrm>
-            <a:off x="868680" y="2286000"/>
-            <a:ext cx="4754880" cy="411480"/>
+            <a:off x="868680" y="2212848"/>
+            <a:ext cx="4754880" cy="822960"/>
           </a:xfrm>
           <a:prstGeom prst="rect">
             <a:avLst/>
@@ -6910,14 +5779,28 @@
               <a:buNone/>
             </a:pPr>
             <a:r>
-              <a:rPr lang="en-US" sz="1800" b="1" dirty="0">
-                <a:solidFill>
-                  <a:srgbClr val="4A4A4A"/>
-                </a:solidFill>
-              </a:rPr>
-              <a:t>健康診断で、患者により見てほしいのは？</a:t>
-            </a:r>
-            <a:endParaRPr lang="en-US" sz="1800" dirty="0"/>
+              <a:rPr lang="en-US" sz="2400" b="1" dirty="0">
+                <a:solidFill>
+                  <a:srgbClr val="262626"/>
+                </a:solidFill>
+              </a:rPr>
+              <a:t>健康診断で、</a:t>
+            </a:r>
+            <a:endParaRPr lang="en-US" sz="2400" dirty="0"/>
+          </a:p>
+          <a:p>
+            <a:pPr indent="0" marL="0">
+              <a:buNone/>
+            </a:pPr>
+            <a:r>
+              <a:rPr lang="en-US" sz="2400" b="1" dirty="0">
+                <a:solidFill>
+                  <a:srgbClr val="262626"/>
+                </a:solidFill>
+              </a:rPr>
+              <a:t>患者により見てほしいのは？</a:t>
+            </a:r>
+            <a:endParaRPr lang="en-US" sz="2400" dirty="0"/>
           </a:p>
         </p:txBody>
       </p:sp>
@@ -6928,8 +5811,8 @@
           <p:nvPr/>
         </p:nvGraphicFramePr>
         <p:xfrm>
-          <a:off x="1760220" y="2697480"/>
-          <a:ext cx="2926080" cy="2926080"/>
+          <a:off x="2103120" y="3108960"/>
+          <a:ext cx="3017520" cy="3017520"/>
         </p:xfrm>
         <a:graphic xmlns:a="http://schemas.openxmlformats.org/drawingml/2006/main">
           <a:graphicData uri="http://schemas.openxmlformats.org/drawingml/2006/chart">
@@ -6945,8 +5828,8 @@
         </p:nvSpPr>
         <p:spPr>
           <a:xfrm>
-            <a:off x="2308860" y="3611880"/>
-            <a:ext cx="1828800" cy="1097280"/>
+            <a:off x="2697480" y="3931920"/>
+            <a:ext cx="1828800" cy="1371600"/>
           </a:xfrm>
           <a:prstGeom prst="rect">
             <a:avLst/>
@@ -6976,132 +5859,84 @@
               <a:buNone/>
             </a:pPr>
             <a:r>
-              <a:rPr lang="en-US" sz="1800" b="1" dirty="0">
-                <a:solidFill>
-                  <a:srgbClr val="4A4A4A"/>
-                </a:solidFill>
-              </a:rPr>
-              <a:t>HbA1c</a:t>
+              <a:rPr lang="en-US" sz="1700" b="1" dirty="0">
+                <a:solidFill>
+                  <a:srgbClr val="262626"/>
+                </a:solidFill>
+              </a:rPr>
+              <a:t>ヘモグロビン</a:t>
             </a:r>
             <a:endParaRPr lang="en-US" sz="3200" dirty="0"/>
           </a:p>
-        </p:txBody>
-      </p:sp>
-      <p:sp>
-        <p:nvSpPr>
-          <p:cNvPr id="11" name="Shape 7"/>
-          <p:cNvSpPr/>
-          <p:nvPr/>
-        </p:nvSpPr>
-        <p:spPr>
-          <a:xfrm>
-            <a:off x="1371600" y="5769864"/>
-            <a:ext cx="164592" cy="164592"/>
-          </a:xfrm>
-          <a:prstGeom prst="ellipse">
-            <a:avLst/>
-          </a:prstGeom>
-          <a:solidFill>
-            <a:srgbClr val="C8102E"/>
-          </a:solidFill>
-          <a:ln/>
-        </p:spPr>
-      </p:sp>
-      <p:sp>
-        <p:nvSpPr>
-          <p:cNvPr id="12" name="Text 8"/>
+          <a:p>
+            <a:pPr algn="ctr" indent="0" marL="0">
+              <a:buNone/>
+            </a:pPr>
+            <a:r>
+              <a:rPr lang="en-US" sz="1700" b="1" dirty="0">
+                <a:solidFill>
+                  <a:srgbClr val="262626"/>
+                </a:solidFill>
+              </a:rPr>
+              <a:t>A1c</a:t>
+            </a:r>
+            <a:endParaRPr lang="en-US" sz="3200" dirty="0"/>
+          </a:p>
+        </p:txBody>
+      </p:sp>
+      <p:sp>
+        <p:nvSpPr>
+          <p:cNvPr id="11" name="Text 7"/>
           <p:cNvSpPr txBox="1"/>
           <p:nvPr/>
         </p:nvSpPr>
         <p:spPr>
           <a:xfrm>
-            <a:off x="1609344" y="5669280"/>
-            <a:ext cx="2743200" cy="365760"/>
-          </a:xfrm>
-          <a:prstGeom prst="rect">
-            <a:avLst/>
-          </a:prstGeom>
-          <a:noFill/>
-          <a:ln/>
-        </p:spPr>
-        <p:txBody>
-          <a:bodyPr wrap="square" lIns="0" tIns="0" rIns="0" bIns="0" rtlCol="0" anchor="ctr"/>
-          <a:lstStyle/>
-          <a:p>
-            <a:pPr indent="0" marL="0">
-              <a:buNone/>
-            </a:pPr>
-            <a:r>
-              <a:rPr lang="en-US" sz="1500" dirty="0">
-                <a:solidFill>
-                  <a:srgbClr val="4A4A4A"/>
-                </a:solidFill>
-              </a:rPr>
-              <a:t>HbA1c 87.0%</a:t>
-            </a:r>
-            <a:endParaRPr lang="en-US" sz="1500" dirty="0"/>
-          </a:p>
-        </p:txBody>
-      </p:sp>
-      <p:sp>
-        <p:nvSpPr>
-          <p:cNvPr id="13" name="Shape 9"/>
-          <p:cNvSpPr/>
-          <p:nvPr/>
-        </p:nvSpPr>
-        <p:spPr>
-          <a:xfrm>
-            <a:off x="3429000" y="5769864"/>
-            <a:ext cx="164592" cy="164592"/>
-          </a:xfrm>
-          <a:prstGeom prst="ellipse">
-            <a:avLst/>
-          </a:prstGeom>
-          <a:solidFill>
-            <a:srgbClr val="B7C6D6"/>
-          </a:solidFill>
-          <a:ln/>
-        </p:spPr>
-      </p:sp>
-      <p:sp>
-        <p:nvSpPr>
-          <p:cNvPr id="14" name="Text 10"/>
-          <p:cNvSpPr txBox="1"/>
-          <p:nvPr/>
-        </p:nvSpPr>
-        <p:spPr>
-          <a:xfrm>
-            <a:off x="3666744" y="5669280"/>
-            <a:ext cx="2743200" cy="365760"/>
-          </a:xfrm>
-          <a:prstGeom prst="rect">
-            <a:avLst/>
-          </a:prstGeom>
-          <a:noFill/>
-          <a:ln/>
-        </p:spPr>
-        <p:txBody>
-          <a:bodyPr wrap="square" lIns="0" tIns="0" rIns="0" bIns="0" rtlCol="0" anchor="ctr"/>
-          <a:lstStyle/>
-          <a:p>
-            <a:pPr indent="0" marL="0">
-              <a:buNone/>
-            </a:pPr>
-            <a:r>
-              <a:rPr lang="en-US" sz="1500" dirty="0">
-                <a:solidFill>
-                  <a:srgbClr val="4A4A4A"/>
-                </a:solidFill>
-              </a:rPr>
-              <a:t>血糖値 13.0%</a:t>
-            </a:r>
-            <a:endParaRPr lang="en-US" sz="1500" dirty="0"/>
-          </a:p>
-        </p:txBody>
-      </p:sp>
-      <p:sp>
-        <p:nvSpPr>
-          <p:cNvPr id="15" name="Shape 11"/>
+            <a:off x="822960" y="3200400"/>
+            <a:ext cx="1600200" cy="822960"/>
+          </a:xfrm>
+          <a:prstGeom prst="rect">
+            <a:avLst/>
+          </a:prstGeom>
+          <a:noFill/>
+          <a:ln/>
+        </p:spPr>
+        <p:txBody>
+          <a:bodyPr wrap="square" lIns="0" tIns="0" rIns="0" bIns="0" rtlCol="0" anchor="t"/>
+          <a:lstStyle/>
+          <a:p>
+            <a:pPr algn="l" indent="0" marL="0">
+              <a:buNone/>
+            </a:pPr>
+            <a:r>
+              <a:rPr lang="en-US" sz="2000" b="1" dirty="0">
+                <a:solidFill>
+                  <a:srgbClr val="46688C"/>
+                </a:solidFill>
+              </a:rPr>
+              <a:t>血糖値</a:t>
+            </a:r>
+            <a:endParaRPr lang="en-US" sz="2000" dirty="0"/>
+          </a:p>
+          <a:p>
+            <a:pPr algn="l" indent="0" marL="0">
+              <a:buNone/>
+            </a:pPr>
+            <a:r>
+              <a:rPr lang="en-US" sz="2000" b="1" dirty="0">
+                <a:solidFill>
+                  <a:srgbClr val="46688C"/>
+                </a:solidFill>
+              </a:rPr>
+              <a:t>13.0%</a:t>
+            </a:r>
+            <a:endParaRPr lang="en-US" sz="2000" dirty="0"/>
+          </a:p>
+        </p:txBody>
+      </p:sp>
+      <p:sp>
+        <p:nvSpPr>
+          <p:cNvPr id="12" name="Shape 8"/>
           <p:cNvSpPr/>
           <p:nvPr/>
         </p:nvSpPr>
@@ -7123,13 +5958,13 @@
       </p:sp>
       <p:sp>
         <p:nvSpPr>
-          <p:cNvPr id="16" name="Shape 12"/>
+          <p:cNvPr id="13" name="Shape 9"/>
           <p:cNvSpPr/>
           <p:nvPr/>
         </p:nvSpPr>
         <p:spPr>
           <a:xfrm>
-            <a:off x="6611112" y="1645920"/>
+            <a:off x="6611112" y="1600200"/>
             <a:ext cx="548640" cy="548640"/>
           </a:xfrm>
           <a:prstGeom prst="ellipse">
@@ -7143,7 +5978,7 @@
       </p:sp>
       <p:pic>
         <p:nvPicPr>
-          <p:cNvPr id="17" name="Image 1" descr="preencoded.png">    </p:cNvPr>
+          <p:cNvPr id="14" name="Image 1" descr="preencoded.png">    </p:cNvPr>
           <p:cNvPicPr>
             <a:picLocks noChangeAspect="1"/>
           </p:cNvPicPr>
@@ -7157,7 +5992,7 @@
         </p:blipFill>
         <p:spPr>
           <a:xfrm>
-            <a:off x="6748272" y="1783080"/>
+            <a:off x="6748272" y="1737360"/>
             <a:ext cx="274320" cy="274320"/>
           </a:xfrm>
           <a:prstGeom prst="rect">
@@ -7167,13 +6002,13 @@
       </p:pic>
       <p:sp>
         <p:nvSpPr>
-          <p:cNvPr id="18" name="Text 13"/>
+          <p:cNvPr id="15" name="Text 10"/>
           <p:cNvSpPr txBox="1"/>
           <p:nvPr/>
         </p:nvSpPr>
         <p:spPr>
           <a:xfrm>
-            <a:off x="7269480" y="1645920"/>
+            <a:off x="7269480" y="1600200"/>
             <a:ext cx="10332720" cy="548640"/>
           </a:xfrm>
           <a:prstGeom prst="rect">
@@ -7214,14 +6049,14 @@
       </p:sp>
       <p:sp>
         <p:nvSpPr>
-          <p:cNvPr id="19" name="Text 14"/>
+          <p:cNvPr id="16" name="Text 11"/>
           <p:cNvSpPr txBox="1"/>
           <p:nvPr/>
         </p:nvSpPr>
         <p:spPr>
           <a:xfrm>
-            <a:off x="6611112" y="2286000"/>
-            <a:ext cx="4754880" cy="411480"/>
+            <a:off x="6611112" y="2212848"/>
+            <a:ext cx="4754880" cy="822960"/>
           </a:xfrm>
           <a:prstGeom prst="rect">
             <a:avLst/>
@@ -7237,26 +6072,40 @@
               <a:buNone/>
             </a:pPr>
             <a:r>
-              <a:rPr lang="en-US" sz="1800" b="1" dirty="0">
-                <a:solidFill>
-                  <a:srgbClr val="4A4A4A"/>
-                </a:solidFill>
-              </a:rPr>
-              <a:t>糖尿病リスク把握で、より重視するのは？</a:t>
-            </a:r>
-            <a:endParaRPr lang="en-US" sz="1800" dirty="0"/>
+              <a:rPr lang="en-US" sz="2400" b="1" dirty="0">
+                <a:solidFill>
+                  <a:srgbClr val="262626"/>
+                </a:solidFill>
+              </a:rPr>
+              <a:t>糖尿病リスク把握で、</a:t>
+            </a:r>
+            <a:endParaRPr lang="en-US" sz="2400" dirty="0"/>
+          </a:p>
+          <a:p>
+            <a:pPr indent="0" marL="0">
+              <a:buNone/>
+            </a:pPr>
+            <a:r>
+              <a:rPr lang="en-US" sz="2400" b="1" dirty="0">
+                <a:solidFill>
+                  <a:srgbClr val="262626"/>
+                </a:solidFill>
+              </a:rPr>
+              <a:t>より重視するのは？</a:t>
+            </a:r>
+            <a:endParaRPr lang="en-US" sz="2400" dirty="0"/>
           </a:p>
         </p:txBody>
       </p:sp>
       <p:graphicFrame>
         <p:nvGraphicFramePr>
-          <p:cNvPr id="20" name="Chart 1" descr=""/>
+          <p:cNvPr id="17" name="Chart 1" descr=""/>
           <p:cNvGraphicFramePr/>
           <p:nvPr/>
         </p:nvGraphicFramePr>
         <p:xfrm>
-          <a:off x="7502652" y="2697480"/>
-          <a:ext cx="2926080" cy="2926080"/>
+          <a:off x="7845552" y="3108960"/>
+          <a:ext cx="3017520" cy="3017520"/>
         </p:xfrm>
         <a:graphic xmlns:a="http://schemas.openxmlformats.org/drawingml/2006/main">
           <a:graphicData uri="http://schemas.openxmlformats.org/drawingml/2006/chart">
@@ -7266,14 +6115,14 @@
       </p:graphicFrame>
       <p:sp>
         <p:nvSpPr>
-          <p:cNvPr id="21" name="Text 15"/>
+          <p:cNvPr id="18" name="Text 12"/>
           <p:cNvSpPr txBox="1"/>
           <p:nvPr/>
         </p:nvSpPr>
         <p:spPr>
           <a:xfrm>
-            <a:off x="8051292" y="3611880"/>
-            <a:ext cx="1828800" cy="1097280"/>
+            <a:off x="8439912" y="3931920"/>
+            <a:ext cx="1828800" cy="1371600"/>
           </a:xfrm>
           <a:prstGeom prst="rect">
             <a:avLst/>
@@ -7303,9 +6152,9 @@
               <a:buNone/>
             </a:pPr>
             <a:r>
-              <a:rPr lang="en-US" sz="1800" b="1" dirty="0">
-                <a:solidFill>
-                  <a:srgbClr val="4A4A4A"/>
+              <a:rPr lang="en-US" sz="1700" b="1" dirty="0">
+                <a:solidFill>
+                  <a:srgbClr val="262626"/>
                 </a:solidFill>
               </a:rPr>
               <a:t>血糖値</a:t>
@@ -7316,125 +6165,63 @@
       </p:sp>
       <p:sp>
         <p:nvSpPr>
-          <p:cNvPr id="22" name="Shape 16"/>
-          <p:cNvSpPr/>
-          <p:nvPr/>
-        </p:nvSpPr>
-        <p:spPr>
-          <a:xfrm>
-            <a:off x="7114032" y="5769864"/>
-            <a:ext cx="164592" cy="164592"/>
-          </a:xfrm>
-          <a:prstGeom prst="ellipse">
-            <a:avLst/>
-          </a:prstGeom>
-          <a:solidFill>
-            <a:srgbClr val="F3C9D0"/>
-          </a:solidFill>
-          <a:ln/>
-        </p:spPr>
-      </p:sp>
-      <p:sp>
-        <p:nvSpPr>
-          <p:cNvPr id="23" name="Text 17"/>
+          <p:cNvPr id="19" name="Text 13"/>
           <p:cNvSpPr txBox="1"/>
           <p:nvPr/>
         </p:nvSpPr>
         <p:spPr>
           <a:xfrm>
-            <a:off x="7351776" y="5669280"/>
-            <a:ext cx="2743200" cy="365760"/>
-          </a:xfrm>
-          <a:prstGeom prst="rect">
-            <a:avLst/>
-          </a:prstGeom>
-          <a:noFill/>
-          <a:ln/>
-        </p:spPr>
-        <p:txBody>
-          <a:bodyPr wrap="square" lIns="0" tIns="0" rIns="0" bIns="0" rtlCol="0" anchor="ctr"/>
-          <a:lstStyle/>
-          <a:p>
-            <a:pPr indent="0" marL="0">
-              <a:buNone/>
-            </a:pPr>
-            <a:r>
-              <a:rPr lang="en-US" sz="1500" dirty="0">
-                <a:solidFill>
-                  <a:srgbClr val="4A4A4A"/>
-                </a:solidFill>
-              </a:rPr>
-              <a:t>HbA1c 31.3%</a:t>
-            </a:r>
-            <a:endParaRPr lang="en-US" sz="1500" dirty="0"/>
-          </a:p>
-        </p:txBody>
-      </p:sp>
-      <p:sp>
-        <p:nvSpPr>
-          <p:cNvPr id="24" name="Shape 18"/>
-          <p:cNvSpPr/>
-          <p:nvPr/>
-        </p:nvSpPr>
-        <p:spPr>
-          <a:xfrm>
-            <a:off x="9171432" y="5769864"/>
-            <a:ext cx="164592" cy="164592"/>
-          </a:xfrm>
-          <a:prstGeom prst="ellipse">
-            <a:avLst/>
-          </a:prstGeom>
-          <a:solidFill>
-            <a:srgbClr val="46688C"/>
-          </a:solidFill>
-          <a:ln/>
-        </p:spPr>
-      </p:sp>
-      <p:sp>
-        <p:nvSpPr>
-          <p:cNvPr id="25" name="Text 19"/>
+            <a:off x="6565392" y="3200400"/>
+            <a:ext cx="1600200" cy="822960"/>
+          </a:xfrm>
+          <a:prstGeom prst="rect">
+            <a:avLst/>
+          </a:prstGeom>
+          <a:noFill/>
+          <a:ln/>
+        </p:spPr>
+        <p:txBody>
+          <a:bodyPr wrap="square" lIns="0" tIns="0" rIns="0" bIns="0" rtlCol="0" anchor="t"/>
+          <a:lstStyle/>
+          <a:p>
+            <a:pPr algn="l" indent="0" marL="0">
+              <a:buNone/>
+            </a:pPr>
+            <a:r>
+              <a:rPr lang="en-US" sz="2000" b="1" dirty="0">
+                <a:solidFill>
+                  <a:srgbClr val="C8102E"/>
+                </a:solidFill>
+              </a:rPr>
+              <a:t>ヘモグロビン</a:t>
+            </a:r>
+            <a:endParaRPr lang="en-US" sz="2000" dirty="0"/>
+          </a:p>
+          <a:p>
+            <a:pPr algn="l" indent="0" marL="0">
+              <a:buNone/>
+            </a:pPr>
+            <a:r>
+              <a:rPr lang="en-US" sz="2000" b="1" dirty="0">
+                <a:solidFill>
+                  <a:srgbClr val="C8102E"/>
+                </a:solidFill>
+              </a:rPr>
+              <a:t>A1c 31.3%</a:t>
+            </a:r>
+            <a:endParaRPr lang="en-US" sz="2000" dirty="0"/>
+          </a:p>
+        </p:txBody>
+      </p:sp>
+      <p:sp>
+        <p:nvSpPr>
+          <p:cNvPr id="20" name="Text 14"/>
           <p:cNvSpPr txBox="1"/>
           <p:nvPr/>
         </p:nvSpPr>
         <p:spPr>
           <a:xfrm>
-            <a:off x="9409176" y="5669280"/>
-            <a:ext cx="2743200" cy="365760"/>
-          </a:xfrm>
-          <a:prstGeom prst="rect">
-            <a:avLst/>
-          </a:prstGeom>
-          <a:noFill/>
-          <a:ln/>
-        </p:spPr>
-        <p:txBody>
-          <a:bodyPr wrap="square" lIns="0" tIns="0" rIns="0" bIns="0" rtlCol="0" anchor="ctr"/>
-          <a:lstStyle/>
-          <a:p>
-            <a:pPr indent="0" marL="0">
-              <a:buNone/>
-            </a:pPr>
-            <a:r>
-              <a:rPr lang="en-US" sz="1500" dirty="0">
-                <a:solidFill>
-                  <a:srgbClr val="4A4A4A"/>
-                </a:solidFill>
-              </a:rPr>
-              <a:t>血糖値 68.7%</a:t>
-            </a:r>
-            <a:endParaRPr lang="en-US" sz="1500" dirty="0"/>
-          </a:p>
-        </p:txBody>
-      </p:sp>
-      <p:sp>
-        <p:nvSpPr>
-          <p:cNvPr id="26" name="Text 20"/>
-          <p:cNvSpPr txBox="1"/>
-          <p:nvPr/>
-        </p:nvSpPr>
-        <p:spPr>
-          <a:xfrm>
-            <a:off x="5545836" y="3611880"/>
+            <a:off x="5545836" y="4069080"/>
             <a:ext cx="1097280" cy="1097280"/>
           </a:xfrm>
           <a:prstGeom prst="ellipse">
@@ -7636,7 +6423,7 @@
         </p:nvSpPr>
         <p:spPr>
           <a:xfrm>
-            <a:off x="548640" y="1417320"/>
+            <a:off x="548640" y="1371600"/>
             <a:ext cx="548640" cy="548640"/>
           </a:xfrm>
           <a:prstGeom prst="ellipse">
@@ -7664,7 +6451,7 @@
         </p:blipFill>
         <p:spPr>
           <a:xfrm>
-            <a:off x="685800" y="1554480"/>
+            <a:off x="685800" y="1508760"/>
             <a:ext cx="274320" cy="274320"/>
           </a:xfrm>
           <a:prstGeom prst="rect">
@@ -7680,7 +6467,7 @@
         </p:nvSpPr>
         <p:spPr>
           <a:xfrm>
-            <a:off x="1207008" y="1417320"/>
+            <a:off x="1207008" y="1371600"/>
             <a:ext cx="10332720" cy="548640"/>
           </a:xfrm>
           <a:prstGeom prst="rect">
@@ -7708,26 +6495,194 @@
               <a:buNone/>
             </a:pPr>
             <a:r>
-              <a:rPr lang="en-US" sz="1400" dirty="0">
-                <a:solidFill>
-                  <a:srgbClr val="7A7A7A"/>
+              <a:rPr lang="en-US" sz="2000" b="1" dirty="0">
+                <a:solidFill>
+                  <a:srgbClr val="262626"/>
                 </a:solidFill>
               </a:rPr>
               <a:t>　各指標をどの程度知っている？（n=310）</a:t>
             </a:r>
             <a:endParaRPr lang="en-US" sz="2200" dirty="0"/>
+          </a:p>
+        </p:txBody>
+      </p:sp>
+      <p:sp>
+        <p:nvSpPr>
+          <p:cNvPr id="7" name="Shape 4"/>
+          <p:cNvSpPr/>
+          <p:nvPr/>
+        </p:nvSpPr>
+        <p:spPr>
+          <a:xfrm>
+            <a:off x="2606040" y="6044184"/>
+            <a:ext cx="164592" cy="164592"/>
+          </a:xfrm>
+          <a:prstGeom prst="ellipse">
+            <a:avLst/>
+          </a:prstGeom>
+          <a:solidFill>
+            <a:srgbClr val="46688C"/>
+          </a:solidFill>
+          <a:ln/>
+        </p:spPr>
+      </p:sp>
+      <p:sp>
+        <p:nvSpPr>
+          <p:cNvPr id="8" name="Text 5"/>
+          <p:cNvSpPr txBox="1"/>
+          <p:nvPr/>
+        </p:nvSpPr>
+        <p:spPr>
+          <a:xfrm>
+            <a:off x="2843784" y="5943600"/>
+            <a:ext cx="2743200" cy="365760"/>
+          </a:xfrm>
+          <a:prstGeom prst="rect">
+            <a:avLst/>
+          </a:prstGeom>
+          <a:noFill/>
+          <a:ln/>
+        </p:spPr>
+        <p:txBody>
+          <a:bodyPr wrap="square" lIns="0" tIns="0" rIns="0" bIns="0" rtlCol="0" anchor="ctr"/>
+          <a:lstStyle/>
+          <a:p>
+            <a:pPr indent="0" marL="0">
+              <a:buNone/>
+            </a:pPr>
+            <a:r>
+              <a:rPr lang="en-US" sz="1700" dirty="0">
+                <a:solidFill>
+                  <a:srgbClr val="4A4A4A"/>
+                </a:solidFill>
+              </a:rPr>
+              <a:t>名前も意味も知っている</a:t>
+            </a:r>
+            <a:endParaRPr lang="en-US" sz="1700" dirty="0"/>
+          </a:p>
+        </p:txBody>
+      </p:sp>
+      <p:sp>
+        <p:nvSpPr>
+          <p:cNvPr id="9" name="Shape 6"/>
+          <p:cNvSpPr/>
+          <p:nvPr/>
+        </p:nvSpPr>
+        <p:spPr>
+          <a:xfrm>
+            <a:off x="5349240" y="6044184"/>
+            <a:ext cx="164592" cy="164592"/>
+          </a:xfrm>
+          <a:prstGeom prst="ellipse">
+            <a:avLst/>
+          </a:prstGeom>
+          <a:solidFill>
+            <a:srgbClr val="B7C6D6"/>
+          </a:solidFill>
+          <a:ln/>
+        </p:spPr>
+      </p:sp>
+      <p:sp>
+        <p:nvSpPr>
+          <p:cNvPr id="10" name="Text 7"/>
+          <p:cNvSpPr txBox="1"/>
+          <p:nvPr/>
+        </p:nvSpPr>
+        <p:spPr>
+          <a:xfrm>
+            <a:off x="5586984" y="5943600"/>
+            <a:ext cx="2743200" cy="365760"/>
+          </a:xfrm>
+          <a:prstGeom prst="rect">
+            <a:avLst/>
+          </a:prstGeom>
+          <a:noFill/>
+          <a:ln/>
+        </p:spPr>
+        <p:txBody>
+          <a:bodyPr wrap="square" lIns="0" tIns="0" rIns="0" bIns="0" rtlCol="0" anchor="ctr"/>
+          <a:lstStyle/>
+          <a:p>
+            <a:pPr indent="0" marL="0">
+              <a:buNone/>
+            </a:pPr>
+            <a:r>
+              <a:rPr lang="en-US" sz="1700" dirty="0">
+                <a:solidFill>
+                  <a:srgbClr val="4A4A4A"/>
+                </a:solidFill>
+              </a:rPr>
+              <a:t>名前は見聞きした程度</a:t>
+            </a:r>
+            <a:endParaRPr lang="en-US" sz="1700" dirty="0"/>
+          </a:p>
+        </p:txBody>
+      </p:sp>
+      <p:sp>
+        <p:nvSpPr>
+          <p:cNvPr id="11" name="Shape 8"/>
+          <p:cNvSpPr/>
+          <p:nvPr/>
+        </p:nvSpPr>
+        <p:spPr>
+          <a:xfrm>
+            <a:off x="7955280" y="6044184"/>
+            <a:ext cx="164592" cy="164592"/>
+          </a:xfrm>
+          <a:prstGeom prst="ellipse">
+            <a:avLst/>
+          </a:prstGeom>
+          <a:solidFill>
+            <a:srgbClr val="C8102E"/>
+          </a:solidFill>
+          <a:ln/>
+        </p:spPr>
+      </p:sp>
+      <p:sp>
+        <p:nvSpPr>
+          <p:cNvPr id="12" name="Text 9"/>
+          <p:cNvSpPr txBox="1"/>
+          <p:nvPr/>
+        </p:nvSpPr>
+        <p:spPr>
+          <a:xfrm>
+            <a:off x="8193024" y="5943600"/>
+            <a:ext cx="2743200" cy="365760"/>
+          </a:xfrm>
+          <a:prstGeom prst="rect">
+            <a:avLst/>
+          </a:prstGeom>
+          <a:noFill/>
+          <a:ln/>
+        </p:spPr>
+        <p:txBody>
+          <a:bodyPr wrap="square" lIns="0" tIns="0" rIns="0" bIns="0" rtlCol="0" anchor="ctr"/>
+          <a:lstStyle/>
+          <a:p>
+            <a:pPr indent="0" marL="0">
+              <a:buNone/>
+            </a:pPr>
+            <a:r>
+              <a:rPr lang="en-US" sz="1700" dirty="0">
+                <a:solidFill>
+                  <a:srgbClr val="4A4A4A"/>
+                </a:solidFill>
+              </a:rPr>
+              <a:t>知らない</a:t>
+            </a:r>
+            <a:endParaRPr lang="en-US" sz="1700" dirty="0"/>
           </a:p>
         </p:txBody>
       </p:sp>
       <p:graphicFrame>
         <p:nvGraphicFramePr>
-          <p:cNvPr id="7" name="Chart 0" descr=""/>
+          <p:cNvPr id="13" name="Chart 0" descr=""/>
           <p:cNvGraphicFramePr/>
           <p:nvPr/>
         </p:nvGraphicFramePr>
         <p:xfrm>
-          <a:off x="457200" y="2011680"/>
-          <a:ext cx="7040880" cy="4206240"/>
+          <a:off x="457200" y="1920240"/>
+          <a:ext cx="11247120" cy="3977640"/>
         </p:xfrm>
         <a:graphic xmlns:a="http://schemas.openxmlformats.org/drawingml/2006/main">
           <a:graphicData uri="http://schemas.openxmlformats.org/drawingml/2006/chart">
@@ -7737,339 +6692,647 @@
       </p:graphicFrame>
       <p:sp>
         <p:nvSpPr>
-          <p:cNvPr id="8" name="Shape 4"/>
-          <p:cNvSpPr/>
-          <p:nvPr/>
-        </p:nvSpPr>
-        <p:spPr>
-          <a:xfrm>
-            <a:off x="7818120" y="1417320"/>
-            <a:ext cx="3822192" cy="2468880"/>
-          </a:xfrm>
-          <a:prstGeom prst="roundRect">
-            <a:avLst>
-              <a:gd name="adj" fmla="val 4444"/>
-            </a:avLst>
-          </a:prstGeom>
-          <a:solidFill>
-            <a:srgbClr val="FBECEE"/>
-          </a:solidFill>
-          <a:ln/>
-        </p:spPr>
-      </p:sp>
-      <p:sp>
-        <p:nvSpPr>
-          <p:cNvPr id="9" name="Text 5"/>
+          <p:cNvPr id="14" name="Text 10"/>
           <p:cNvSpPr txBox="1"/>
           <p:nvPr/>
         </p:nvSpPr>
         <p:spPr>
           <a:xfrm>
-            <a:off x="8092440" y="1554480"/>
-            <a:ext cx="3291840" cy="365760"/>
-          </a:xfrm>
-          <a:prstGeom prst="rect">
-            <a:avLst/>
-          </a:prstGeom>
-          <a:noFill/>
-          <a:ln/>
-        </p:spPr>
-        <p:txBody>
-          <a:bodyPr wrap="square" lIns="0" tIns="0" rIns="0" bIns="0" rtlCol="0" anchor="ctr"/>
-          <a:lstStyle/>
-          <a:p>
-            <a:pPr indent="0" marL="0">
-              <a:buNone/>
-            </a:pPr>
-            <a:r>
-              <a:rPr lang="en-US" sz="1800" b="1" dirty="0">
-                <a:solidFill>
-                  <a:srgbClr val="4A4A4A"/>
-                </a:solidFill>
-              </a:rPr>
-              <a:t>生活者の</a:t>
-            </a:r>
-            <a:endParaRPr lang="en-US" sz="1800" dirty="0"/>
-          </a:p>
-        </p:txBody>
-      </p:sp>
-      <p:sp>
-        <p:nvSpPr>
-          <p:cNvPr id="10" name="Text 6"/>
+            <a:off x="457200" y="1960016"/>
+            <a:ext cx="2027225" cy="298323"/>
+          </a:xfrm>
+          <a:prstGeom prst="rect">
+            <a:avLst/>
+          </a:prstGeom>
+          <a:noFill/>
+          <a:ln/>
+        </p:spPr>
+        <p:txBody>
+          <a:bodyPr wrap="square" lIns="0" tIns="0" rIns="0" bIns="0" rtlCol="0" anchor="ctr"/>
+          <a:lstStyle/>
+          <a:p>
+            <a:pPr algn="r" indent="0" marL="0">
+              <a:buNone/>
+            </a:pPr>
+            <a:r>
+              <a:rPr lang="en-US" sz="1700" b="1" dirty="0">
+                <a:solidFill>
+                  <a:srgbClr val="C8102E"/>
+                </a:solidFill>
+              </a:rPr>
+              <a:t>HbA1c</a:t>
+            </a:r>
+            <a:endParaRPr lang="en-US" sz="1700" dirty="0"/>
+          </a:p>
+        </p:txBody>
+      </p:sp>
+      <p:sp>
+        <p:nvSpPr>
+          <p:cNvPr id="15" name="Text 11"/>
           <p:cNvSpPr txBox="1"/>
           <p:nvPr/>
         </p:nvSpPr>
         <p:spPr>
           <a:xfrm>
-            <a:off x="8092440" y="1847088"/>
-            <a:ext cx="3291840" cy="960120"/>
-          </a:xfrm>
-          <a:prstGeom prst="rect">
-            <a:avLst/>
-          </a:prstGeom>
-          <a:noFill/>
-          <a:ln/>
-        </p:spPr>
-        <p:txBody>
-          <a:bodyPr wrap="square" lIns="0" tIns="0" rIns="0" bIns="0" rtlCol="0" anchor="ctr"/>
-          <a:lstStyle/>
-          <a:p>
-            <a:pPr indent="0" marL="0">
-              <a:buNone/>
-            </a:pPr>
-            <a:r>
-              <a:rPr lang="en-US" sz="6600" b="1" dirty="0">
-                <a:solidFill>
-                  <a:srgbClr val="C8102E"/>
+            <a:off x="457200" y="2258339"/>
+            <a:ext cx="2027225" cy="298323"/>
+          </a:xfrm>
+          <a:prstGeom prst="rect">
+            <a:avLst/>
+          </a:prstGeom>
+          <a:noFill/>
+          <a:ln/>
+        </p:spPr>
+        <p:txBody>
+          <a:bodyPr wrap="square" lIns="0" tIns="0" rIns="0" bIns="0" rtlCol="0" anchor="ctr"/>
+          <a:lstStyle/>
+          <a:p>
+            <a:pPr algn="r" indent="0" marL="0">
+              <a:buNone/>
+            </a:pPr>
+            <a:r>
+              <a:rPr lang="en-US" sz="1700" b="1" dirty="0">
+                <a:solidFill>
+                  <a:srgbClr val="262626"/>
+                </a:solidFill>
+              </a:rPr>
+              <a:t>クレアチニン</a:t>
+            </a:r>
+            <a:endParaRPr lang="en-US" sz="1700" dirty="0"/>
+          </a:p>
+        </p:txBody>
+      </p:sp>
+      <p:sp>
+        <p:nvSpPr>
+          <p:cNvPr id="16" name="Text 12"/>
+          <p:cNvSpPr txBox="1"/>
+          <p:nvPr/>
+        </p:nvSpPr>
+        <p:spPr>
+          <a:xfrm>
+            <a:off x="457200" y="2556662"/>
+            <a:ext cx="2027225" cy="298323"/>
+          </a:xfrm>
+          <a:prstGeom prst="rect">
+            <a:avLst/>
+          </a:prstGeom>
+          <a:noFill/>
+          <a:ln/>
+        </p:spPr>
+        <p:txBody>
+          <a:bodyPr wrap="square" lIns="0" tIns="0" rIns="0" bIns="0" rtlCol="0" anchor="ctr"/>
+          <a:lstStyle/>
+          <a:p>
+            <a:pPr algn="r" indent="0" marL="0">
+              <a:buNone/>
+            </a:pPr>
+            <a:r>
+              <a:rPr lang="en-US" sz="1700" b="1" dirty="0">
+                <a:solidFill>
+                  <a:srgbClr val="262626"/>
+                </a:solidFill>
+              </a:rPr>
+              <a:t>尿糖</a:t>
+            </a:r>
+            <a:endParaRPr lang="en-US" sz="1700" dirty="0"/>
+          </a:p>
+        </p:txBody>
+      </p:sp>
+      <p:sp>
+        <p:nvSpPr>
+          <p:cNvPr id="17" name="Text 13"/>
+          <p:cNvSpPr txBox="1"/>
+          <p:nvPr/>
+        </p:nvSpPr>
+        <p:spPr>
+          <a:xfrm>
+            <a:off x="457200" y="2854985"/>
+            <a:ext cx="2027225" cy="298323"/>
+          </a:xfrm>
+          <a:prstGeom prst="rect">
+            <a:avLst/>
+          </a:prstGeom>
+          <a:noFill/>
+          <a:ln/>
+        </p:spPr>
+        <p:txBody>
+          <a:bodyPr wrap="square" lIns="0" tIns="0" rIns="0" bIns="0" rtlCol="0" anchor="ctr"/>
+          <a:lstStyle/>
+          <a:p>
+            <a:pPr algn="r" indent="0" marL="0">
+              <a:buNone/>
+            </a:pPr>
+            <a:r>
+              <a:rPr lang="en-US" sz="1700" b="1" dirty="0">
+                <a:solidFill>
+                  <a:srgbClr val="262626"/>
+                </a:solidFill>
+              </a:rPr>
+              <a:t>γ-GTP</a:t>
+            </a:r>
+            <a:endParaRPr lang="en-US" sz="1700" dirty="0"/>
+          </a:p>
+        </p:txBody>
+      </p:sp>
+      <p:sp>
+        <p:nvSpPr>
+          <p:cNvPr id="18" name="Text 14"/>
+          <p:cNvSpPr txBox="1"/>
+          <p:nvPr/>
+        </p:nvSpPr>
+        <p:spPr>
+          <a:xfrm>
+            <a:off x="457200" y="3153308"/>
+            <a:ext cx="2027225" cy="298323"/>
+          </a:xfrm>
+          <a:prstGeom prst="rect">
+            <a:avLst/>
+          </a:prstGeom>
+          <a:noFill/>
+          <a:ln/>
+        </p:spPr>
+        <p:txBody>
+          <a:bodyPr wrap="square" lIns="0" tIns="0" rIns="0" bIns="0" rtlCol="0" anchor="ctr"/>
+          <a:lstStyle/>
+          <a:p>
+            <a:pPr algn="r" indent="0" marL="0">
+              <a:buNone/>
+            </a:pPr>
+            <a:r>
+              <a:rPr lang="en-US" sz="1700" b="1" dirty="0">
+                <a:solidFill>
+                  <a:srgbClr val="262626"/>
+                </a:solidFill>
+              </a:rPr>
+              <a:t>LDLコレステロール</a:t>
+            </a:r>
+            <a:endParaRPr lang="en-US" sz="1700" dirty="0"/>
+          </a:p>
+        </p:txBody>
+      </p:sp>
+      <p:sp>
+        <p:nvSpPr>
+          <p:cNvPr id="19" name="Text 15"/>
+          <p:cNvSpPr txBox="1"/>
+          <p:nvPr/>
+        </p:nvSpPr>
+        <p:spPr>
+          <a:xfrm>
+            <a:off x="457200" y="3451631"/>
+            <a:ext cx="2027225" cy="298323"/>
+          </a:xfrm>
+          <a:prstGeom prst="rect">
+            <a:avLst/>
+          </a:prstGeom>
+          <a:noFill/>
+          <a:ln/>
+        </p:spPr>
+        <p:txBody>
+          <a:bodyPr wrap="square" lIns="0" tIns="0" rIns="0" bIns="0" rtlCol="0" anchor="ctr"/>
+          <a:lstStyle/>
+          <a:p>
+            <a:pPr algn="r" indent="0" marL="0">
+              <a:buNone/>
+            </a:pPr>
+            <a:r>
+              <a:rPr lang="en-US" sz="1700" b="1" dirty="0">
+                <a:solidFill>
+                  <a:srgbClr val="262626"/>
+                </a:solidFill>
+              </a:rPr>
+              <a:t>HDLコレステロール</a:t>
+            </a:r>
+            <a:endParaRPr lang="en-US" sz="1700" dirty="0"/>
+          </a:p>
+        </p:txBody>
+      </p:sp>
+      <p:sp>
+        <p:nvSpPr>
+          <p:cNvPr id="20" name="Text 16"/>
+          <p:cNvSpPr txBox="1"/>
+          <p:nvPr/>
+        </p:nvSpPr>
+        <p:spPr>
+          <a:xfrm>
+            <a:off x="457200" y="3749954"/>
+            <a:ext cx="2027225" cy="298323"/>
+          </a:xfrm>
+          <a:prstGeom prst="rect">
+            <a:avLst/>
+          </a:prstGeom>
+          <a:noFill/>
+          <a:ln/>
+        </p:spPr>
+        <p:txBody>
+          <a:bodyPr wrap="square" lIns="0" tIns="0" rIns="0" bIns="0" rtlCol="0" anchor="ctr"/>
+          <a:lstStyle/>
+          <a:p>
+            <a:pPr algn="r" indent="0" marL="0">
+              <a:buNone/>
+            </a:pPr>
+            <a:r>
+              <a:rPr lang="en-US" sz="1700" b="1" dirty="0">
+                <a:solidFill>
+                  <a:srgbClr val="262626"/>
+                </a:solidFill>
+              </a:rPr>
+              <a:t>尿酸</a:t>
+            </a:r>
+            <a:endParaRPr lang="en-US" sz="1700" dirty="0"/>
+          </a:p>
+        </p:txBody>
+      </p:sp>
+      <p:sp>
+        <p:nvSpPr>
+          <p:cNvPr id="21" name="Text 17"/>
+          <p:cNvSpPr txBox="1"/>
+          <p:nvPr/>
+        </p:nvSpPr>
+        <p:spPr>
+          <a:xfrm>
+            <a:off x="457200" y="4048277"/>
+            <a:ext cx="2027225" cy="298323"/>
+          </a:xfrm>
+          <a:prstGeom prst="rect">
+            <a:avLst/>
+          </a:prstGeom>
+          <a:noFill/>
+          <a:ln/>
+        </p:spPr>
+        <p:txBody>
+          <a:bodyPr wrap="square" lIns="0" tIns="0" rIns="0" bIns="0" rtlCol="0" anchor="ctr"/>
+          <a:lstStyle/>
+          <a:p>
+            <a:pPr algn="r" indent="0" marL="0">
+              <a:buNone/>
+            </a:pPr>
+            <a:r>
+              <a:rPr lang="en-US" sz="1700" b="1" dirty="0">
+                <a:solidFill>
+                  <a:srgbClr val="262626"/>
+                </a:solidFill>
+              </a:rPr>
+              <a:t>骨密度</a:t>
+            </a:r>
+            <a:endParaRPr lang="en-US" sz="1700" dirty="0"/>
+          </a:p>
+        </p:txBody>
+      </p:sp>
+      <p:sp>
+        <p:nvSpPr>
+          <p:cNvPr id="22" name="Text 18"/>
+          <p:cNvSpPr txBox="1"/>
+          <p:nvPr/>
+        </p:nvSpPr>
+        <p:spPr>
+          <a:xfrm>
+            <a:off x="457200" y="4346600"/>
+            <a:ext cx="2027225" cy="298323"/>
+          </a:xfrm>
+          <a:prstGeom prst="rect">
+            <a:avLst/>
+          </a:prstGeom>
+          <a:noFill/>
+          <a:ln/>
+        </p:spPr>
+        <p:txBody>
+          <a:bodyPr wrap="square" lIns="0" tIns="0" rIns="0" bIns="0" rtlCol="0" anchor="ctr"/>
+          <a:lstStyle/>
+          <a:p>
+            <a:pPr algn="r" indent="0" marL="0">
+              <a:buNone/>
+            </a:pPr>
+            <a:r>
+              <a:rPr lang="en-US" sz="1700" b="1" dirty="0">
+                <a:solidFill>
+                  <a:srgbClr val="262626"/>
+                </a:solidFill>
+              </a:rPr>
+              <a:t>中性脂肪</a:t>
+            </a:r>
+            <a:endParaRPr lang="en-US" sz="1700" dirty="0"/>
+          </a:p>
+        </p:txBody>
+      </p:sp>
+      <p:sp>
+        <p:nvSpPr>
+          <p:cNvPr id="23" name="Text 19"/>
+          <p:cNvSpPr txBox="1"/>
+          <p:nvPr/>
+        </p:nvSpPr>
+        <p:spPr>
+          <a:xfrm>
+            <a:off x="457200" y="4644923"/>
+            <a:ext cx="2027225" cy="298323"/>
+          </a:xfrm>
+          <a:prstGeom prst="rect">
+            <a:avLst/>
+          </a:prstGeom>
+          <a:noFill/>
+          <a:ln/>
+        </p:spPr>
+        <p:txBody>
+          <a:bodyPr wrap="square" lIns="0" tIns="0" rIns="0" bIns="0" rtlCol="0" anchor="ctr"/>
+          <a:lstStyle/>
+          <a:p>
+            <a:pPr algn="r" indent="0" marL="0">
+              <a:buNone/>
+            </a:pPr>
+            <a:r>
+              <a:rPr lang="en-US" sz="1700" b="1" dirty="0">
+                <a:solidFill>
+                  <a:srgbClr val="262626"/>
+                </a:solidFill>
+              </a:rPr>
+              <a:t>血糖値</a:t>
+            </a:r>
+            <a:endParaRPr lang="en-US" sz="1700" dirty="0"/>
+          </a:p>
+        </p:txBody>
+      </p:sp>
+      <p:sp>
+        <p:nvSpPr>
+          <p:cNvPr id="24" name="Text 20"/>
+          <p:cNvSpPr txBox="1"/>
+          <p:nvPr/>
+        </p:nvSpPr>
+        <p:spPr>
+          <a:xfrm>
+            <a:off x="457200" y="4943246"/>
+            <a:ext cx="2027225" cy="298323"/>
+          </a:xfrm>
+          <a:prstGeom prst="rect">
+            <a:avLst/>
+          </a:prstGeom>
+          <a:noFill/>
+          <a:ln/>
+        </p:spPr>
+        <p:txBody>
+          <a:bodyPr wrap="square" lIns="0" tIns="0" rIns="0" bIns="0" rtlCol="0" anchor="ctr"/>
+          <a:lstStyle/>
+          <a:p>
+            <a:pPr algn="r" indent="0" marL="0">
+              <a:buNone/>
+            </a:pPr>
+            <a:r>
+              <a:rPr lang="en-US" sz="1700" b="1" dirty="0">
+                <a:solidFill>
+                  <a:srgbClr val="262626"/>
+                </a:solidFill>
+              </a:rPr>
+              <a:t>BMI</a:t>
+            </a:r>
+            <a:endParaRPr lang="en-US" sz="1700" dirty="0"/>
+          </a:p>
+        </p:txBody>
+      </p:sp>
+      <p:sp>
+        <p:nvSpPr>
+          <p:cNvPr id="25" name="Text 21"/>
+          <p:cNvSpPr txBox="1"/>
+          <p:nvPr/>
+        </p:nvSpPr>
+        <p:spPr>
+          <a:xfrm>
+            <a:off x="457200" y="5241569"/>
+            <a:ext cx="2027225" cy="298323"/>
+          </a:xfrm>
+          <a:prstGeom prst="rect">
+            <a:avLst/>
+          </a:prstGeom>
+          <a:noFill/>
+          <a:ln/>
+        </p:spPr>
+        <p:txBody>
+          <a:bodyPr wrap="square" lIns="0" tIns="0" rIns="0" bIns="0" rtlCol="0" anchor="ctr"/>
+          <a:lstStyle/>
+          <a:p>
+            <a:pPr algn="r" indent="0" marL="0">
+              <a:buNone/>
+            </a:pPr>
+            <a:r>
+              <a:rPr lang="en-US" sz="1700" b="1" dirty="0">
+                <a:solidFill>
+                  <a:srgbClr val="262626"/>
+                </a:solidFill>
+              </a:rPr>
+              <a:t>血圧</a:t>
+            </a:r>
+            <a:endParaRPr lang="en-US" sz="1700" dirty="0"/>
+          </a:p>
+        </p:txBody>
+      </p:sp>
+      <p:sp>
+        <p:nvSpPr>
+          <p:cNvPr id="26" name="Text 22"/>
+          <p:cNvSpPr txBox="1"/>
+          <p:nvPr/>
+        </p:nvSpPr>
+        <p:spPr>
+          <a:xfrm>
+            <a:off x="10519258" y="1960016"/>
+            <a:ext cx="896112" cy="298323"/>
+          </a:xfrm>
+          <a:prstGeom prst="rect">
+            <a:avLst/>
+          </a:prstGeom>
+          <a:noFill/>
+          <a:ln/>
+        </p:spPr>
+        <p:txBody>
+          <a:bodyPr wrap="square" lIns="0" tIns="0" rIns="0" bIns="0" rtlCol="0" anchor="ctr"/>
+          <a:lstStyle/>
+          <a:p>
+            <a:pPr algn="r" indent="0" marL="0">
+              <a:buNone/>
+            </a:pPr>
+            <a:r>
+              <a:rPr lang="en-US" sz="1700" b="1" dirty="0">
+                <a:solidFill>
+                  <a:srgbClr val="FFFFFF"/>
                 </a:solidFill>
               </a:rPr>
               <a:t>40.3%</a:t>
             </a:r>
-            <a:endParaRPr lang="en-US" sz="6600" dirty="0"/>
-          </a:p>
-        </p:txBody>
-      </p:sp>
-      <p:sp>
-        <p:nvSpPr>
-          <p:cNvPr id="11" name="Text 7"/>
+            <a:endParaRPr lang="en-US" sz="1700" dirty="0"/>
+          </a:p>
+        </p:txBody>
+      </p:sp>
+      <p:sp>
+        <p:nvSpPr>
+          <p:cNvPr id="27" name="Text 23"/>
           <p:cNvSpPr txBox="1"/>
           <p:nvPr/>
         </p:nvSpPr>
         <p:spPr>
           <a:xfrm>
-            <a:off x="8092440" y="2788920"/>
-            <a:ext cx="3383280" cy="411480"/>
-          </a:xfrm>
-          <a:prstGeom prst="rect">
-            <a:avLst/>
-          </a:prstGeom>
-          <a:noFill/>
-          <a:ln/>
-        </p:spPr>
-        <p:txBody>
-          <a:bodyPr wrap="square" lIns="0" tIns="0" rIns="0" bIns="0" rtlCol="0" anchor="ctr"/>
-          <a:lstStyle/>
-          <a:p>
-            <a:pPr indent="0" marL="0">
-              <a:buNone/>
-            </a:pPr>
-            <a:r>
-              <a:rPr lang="en-US" sz="2000" b="1" dirty="0">
-                <a:solidFill>
-                  <a:srgbClr val="262626"/>
-                </a:solidFill>
-              </a:rPr>
-              <a:t>がHbA1cを「知らない」</a:t>
-            </a:r>
-            <a:endParaRPr lang="en-US" sz="2000" dirty="0"/>
-          </a:p>
-        </p:txBody>
-      </p:sp>
-      <p:sp>
-        <p:nvSpPr>
-          <p:cNvPr id="12" name="Text 8"/>
+            <a:off x="10519258" y="2258339"/>
+            <a:ext cx="896112" cy="298323"/>
+          </a:xfrm>
+          <a:prstGeom prst="rect">
+            <a:avLst/>
+          </a:prstGeom>
+          <a:noFill/>
+          <a:ln/>
+        </p:spPr>
+        <p:txBody>
+          <a:bodyPr wrap="square" lIns="0" tIns="0" rIns="0" bIns="0" rtlCol="0" anchor="ctr"/>
+          <a:lstStyle/>
+          <a:p>
+            <a:pPr algn="r" indent="0" marL="0">
+              <a:buNone/>
+            </a:pPr>
+            <a:r>
+              <a:rPr lang="en-US" sz="1700" b="1" dirty="0">
+                <a:solidFill>
+                  <a:srgbClr val="FFFFFF"/>
+                </a:solidFill>
+              </a:rPr>
+              <a:t>39.0%</a:t>
+            </a:r>
+            <a:endParaRPr lang="en-US" sz="1700" dirty="0"/>
+          </a:p>
+        </p:txBody>
+      </p:sp>
+      <p:sp>
+        <p:nvSpPr>
+          <p:cNvPr id="28" name="Text 24"/>
           <p:cNvSpPr txBox="1"/>
           <p:nvPr/>
         </p:nvSpPr>
         <p:spPr>
           <a:xfrm>
-            <a:off x="8092440" y="3291840"/>
-            <a:ext cx="3383280" cy="365760"/>
-          </a:xfrm>
-          <a:prstGeom prst="rect">
-            <a:avLst/>
-          </a:prstGeom>
-          <a:noFill/>
-          <a:ln/>
-        </p:spPr>
-        <p:txBody>
-          <a:bodyPr wrap="square" lIns="0" tIns="0" rIns="0" bIns="0" rtlCol="0" anchor="ctr"/>
-          <a:lstStyle/>
-          <a:p>
-            <a:pPr indent="0" marL="0">
-              <a:buNone/>
-            </a:pPr>
-            <a:r>
-              <a:rPr lang="en-US" sz="1500" dirty="0">
-                <a:solidFill>
-                  <a:srgbClr val="4A4A4A"/>
-                </a:solidFill>
-              </a:rPr>
-              <a:t>血糖値を「知らない」人は 2.3%</a:t>
-            </a:r>
-            <a:endParaRPr lang="en-US" sz="1500" dirty="0"/>
-          </a:p>
-        </p:txBody>
-      </p:sp>
-      <p:sp>
-        <p:nvSpPr>
-          <p:cNvPr id="13" name="Shape 9"/>
-          <p:cNvSpPr/>
-          <p:nvPr/>
-        </p:nvSpPr>
-        <p:spPr>
-          <a:xfrm>
-            <a:off x="7818120" y="4069080"/>
-            <a:ext cx="3822192" cy="2103120"/>
-          </a:xfrm>
-          <a:prstGeom prst="roundRect">
-            <a:avLst>
-              <a:gd name="adj" fmla="val 5217"/>
-            </a:avLst>
-          </a:prstGeom>
-          <a:solidFill>
-            <a:srgbClr val="F6F6F6"/>
-          </a:solidFill>
-          <a:ln/>
-        </p:spPr>
-      </p:sp>
-      <p:sp>
-        <p:nvSpPr>
-          <p:cNvPr id="14" name="Shape 10"/>
-          <p:cNvSpPr/>
-          <p:nvPr/>
-        </p:nvSpPr>
-        <p:spPr>
-          <a:xfrm>
-            <a:off x="8092440" y="4224528"/>
-            <a:ext cx="457200" cy="457200"/>
-          </a:xfrm>
-          <a:prstGeom prst="ellipse">
-            <a:avLst/>
-          </a:prstGeom>
-          <a:solidFill>
-            <a:srgbClr val="4A4A4A"/>
-          </a:solidFill>
-          <a:ln/>
-        </p:spPr>
-      </p:sp>
-      <p:pic>
-        <p:nvPicPr>
-          <p:cNvPr id="15" name="Image 1" descr="preencoded.png">    </p:cNvPr>
-          <p:cNvPicPr>
-            <a:picLocks noChangeAspect="1"/>
-          </p:cNvPicPr>
-          <p:nvPr/>
-        </p:nvPicPr>
-        <p:blipFill>
-          <a:blip r:embed="rId3"/>
-          <a:stretch>
-            <a:fillRect/>
-          </a:stretch>
-        </p:blipFill>
-        <p:spPr>
-          <a:xfrm>
-            <a:off x="8206740" y="4338828"/>
-            <a:ext cx="228600" cy="228600"/>
-          </a:xfrm>
-          <a:prstGeom prst="rect">
-            <a:avLst/>
-          </a:prstGeom>
-        </p:spPr>
-      </p:pic>
-      <p:sp>
-        <p:nvSpPr>
-          <p:cNvPr id="16" name="Text 11"/>
+            <a:off x="10519258" y="2556662"/>
+            <a:ext cx="896112" cy="298323"/>
+          </a:xfrm>
+          <a:prstGeom prst="rect">
+            <a:avLst/>
+          </a:prstGeom>
+          <a:noFill/>
+          <a:ln/>
+        </p:spPr>
+        <p:txBody>
+          <a:bodyPr wrap="square" lIns="0" tIns="0" rIns="0" bIns="0" rtlCol="0" anchor="ctr"/>
+          <a:lstStyle/>
+          <a:p>
+            <a:pPr algn="r" indent="0" marL="0">
+              <a:buNone/>
+            </a:pPr>
+            <a:r>
+              <a:rPr lang="en-US" sz="1700" b="1" dirty="0">
+                <a:solidFill>
+                  <a:srgbClr val="FFFFFF"/>
+                </a:solidFill>
+              </a:rPr>
+              <a:t>28.1%</a:t>
+            </a:r>
+            <a:endParaRPr lang="en-US" sz="1700" dirty="0"/>
+          </a:p>
+        </p:txBody>
+      </p:sp>
+      <p:sp>
+        <p:nvSpPr>
+          <p:cNvPr id="29" name="Text 25"/>
           <p:cNvSpPr txBox="1"/>
           <p:nvPr/>
         </p:nvSpPr>
         <p:spPr>
           <a:xfrm>
-            <a:off x="8641080" y="4224528"/>
-            <a:ext cx="2743200" cy="457200"/>
-          </a:xfrm>
-          <a:prstGeom prst="rect">
-            <a:avLst/>
-          </a:prstGeom>
-          <a:noFill/>
-          <a:ln/>
-        </p:spPr>
-        <p:txBody>
-          <a:bodyPr wrap="square" lIns="0" tIns="0" rIns="0" bIns="0" rtlCol="0" anchor="ctr"/>
-          <a:lstStyle/>
-          <a:p>
-            <a:pPr indent="0" marL="0">
-              <a:buNone/>
-            </a:pPr>
-            <a:r>
-              <a:rPr lang="en-US" sz="1800" b="1" dirty="0">
-                <a:solidFill>
-                  <a:srgbClr val="4A4A4A"/>
-                </a:solidFill>
-              </a:rPr>
-              <a:t>一方、医師の</a:t>
-            </a:r>
-            <a:endParaRPr lang="en-US" sz="1800" dirty="0"/>
-          </a:p>
-        </p:txBody>
-      </p:sp>
-      <p:sp>
-        <p:nvSpPr>
-          <p:cNvPr id="17" name="Text 12"/>
+            <a:off x="10519258" y="2854985"/>
+            <a:ext cx="896112" cy="298323"/>
+          </a:xfrm>
+          <a:prstGeom prst="rect">
+            <a:avLst/>
+          </a:prstGeom>
+          <a:noFill/>
+          <a:ln/>
+        </p:spPr>
+        <p:txBody>
+          <a:bodyPr wrap="square" lIns="0" tIns="0" rIns="0" bIns="0" rtlCol="0" anchor="ctr"/>
+          <a:lstStyle/>
+          <a:p>
+            <a:pPr algn="r" indent="0" marL="0">
+              <a:buNone/>
+            </a:pPr>
+            <a:r>
+              <a:rPr lang="en-US" sz="1700" b="1" dirty="0">
+                <a:solidFill>
+                  <a:srgbClr val="FFFFFF"/>
+                </a:solidFill>
+              </a:rPr>
+              <a:t>22.3%</a:t>
+            </a:r>
+            <a:endParaRPr lang="en-US" sz="1700" dirty="0"/>
+          </a:p>
+        </p:txBody>
+      </p:sp>
+      <p:sp>
+        <p:nvSpPr>
+          <p:cNvPr id="30" name="Text 26"/>
           <p:cNvSpPr txBox="1"/>
           <p:nvPr/>
         </p:nvSpPr>
         <p:spPr>
           <a:xfrm>
-            <a:off x="8092440" y="4681728"/>
-            <a:ext cx="3474720" cy="640080"/>
-          </a:xfrm>
-          <a:prstGeom prst="rect">
-            <a:avLst/>
-          </a:prstGeom>
-          <a:noFill/>
-          <a:ln/>
-        </p:spPr>
-        <p:txBody>
-          <a:bodyPr wrap="square" lIns="0" tIns="0" rIns="0" bIns="0" rtlCol="0" anchor="ctr"/>
-          <a:lstStyle/>
-          <a:p>
-            <a:pPr indent="0" marL="0">
-              <a:buNone/>
-            </a:pPr>
-            <a:r>
-              <a:rPr lang="en-US" sz="4000" b="1" dirty="0">
-                <a:solidFill>
-                  <a:srgbClr val="C8102E"/>
-                </a:solidFill>
-              </a:rPr>
-              <a:t>78.2%</a:t>
-            </a:r>
-            <a:endParaRPr lang="en-US" sz="4000" dirty="0"/>
-          </a:p>
-        </p:txBody>
-      </p:sp>
-      <p:sp>
-        <p:nvSpPr>
-          <p:cNvPr id="18" name="Text 13"/>
+            <a:off x="10519258" y="3153308"/>
+            <a:ext cx="896112" cy="298323"/>
+          </a:xfrm>
+          <a:prstGeom prst="rect">
+            <a:avLst/>
+          </a:prstGeom>
+          <a:noFill/>
+          <a:ln/>
+        </p:spPr>
+        <p:txBody>
+          <a:bodyPr wrap="square" lIns="0" tIns="0" rIns="0" bIns="0" rtlCol="0" anchor="ctr"/>
+          <a:lstStyle/>
+          <a:p>
+            <a:pPr algn="r" indent="0" marL="0">
+              <a:buNone/>
+            </a:pPr>
+            <a:r>
+              <a:rPr lang="en-US" sz="1700" b="1" dirty="0">
+                <a:solidFill>
+                  <a:srgbClr val="FFFFFF"/>
+                </a:solidFill>
+              </a:rPr>
+              <a:t>11.9%</a:t>
+            </a:r>
+            <a:endParaRPr lang="en-US" sz="1700" dirty="0"/>
+          </a:p>
+        </p:txBody>
+      </p:sp>
+      <p:sp>
+        <p:nvSpPr>
+          <p:cNvPr id="31" name="Text 27"/>
           <p:cNvSpPr txBox="1"/>
           <p:nvPr/>
         </p:nvSpPr>
         <p:spPr>
           <a:xfrm>
-            <a:off x="8092440" y="5321808"/>
-            <a:ext cx="3474720" cy="365760"/>
-          </a:xfrm>
-          <a:prstGeom prst="rect">
-            <a:avLst/>
-          </a:prstGeom>
-          <a:noFill/>
-          <a:ln/>
-        </p:spPr>
-        <p:txBody>
-          <a:bodyPr wrap="square" lIns="0" tIns="0" rIns="0" bIns="0" rtlCol="0" anchor="ctr"/>
-          <a:lstStyle/>
-          <a:p>
-            <a:pPr indent="0" marL="0">
+            <a:off x="10519258" y="3451631"/>
+            <a:ext cx="896112" cy="298323"/>
+          </a:xfrm>
+          <a:prstGeom prst="rect">
+            <a:avLst/>
+          </a:prstGeom>
+          <a:noFill/>
+          <a:ln/>
+        </p:spPr>
+        <p:txBody>
+          <a:bodyPr wrap="square" lIns="0" tIns="0" rIns="0" bIns="0" rtlCol="0" anchor="ctr"/>
+          <a:lstStyle/>
+          <a:p>
+            <a:pPr algn="r" indent="0" marL="0">
               <a:buNone/>
             </a:pPr>
             <a:r>
               <a:rPr lang="en-US" sz="1700" b="1" dirty="0">
                 <a:solidFill>
-                  <a:srgbClr val="262626"/>
-                </a:solidFill>
-              </a:rPr>
-              <a:t>がHbA1cを「非常に重要」と回答</a:t>
+                  <a:srgbClr val="FFFFFF"/>
+                </a:solidFill>
+              </a:rPr>
+              <a:t>11.0%</a:t>
             </a:r>
             <a:endParaRPr lang="en-US" sz="1700" dirty="0"/>
           </a:p>
@@ -8077,37 +7340,37 @@
       </p:sp>
       <p:sp>
         <p:nvSpPr>
-          <p:cNvPr id="19" name="Text 14"/>
+          <p:cNvPr id="32" name="Text 28"/>
           <p:cNvSpPr txBox="1"/>
           <p:nvPr/>
         </p:nvSpPr>
         <p:spPr>
           <a:xfrm>
-            <a:off x="8092440" y="5715000"/>
-            <a:ext cx="3383280" cy="320040"/>
-          </a:xfrm>
-          <a:prstGeom prst="rect">
-            <a:avLst/>
-          </a:prstGeom>
-          <a:noFill/>
-          <a:ln/>
-        </p:spPr>
-        <p:txBody>
-          <a:bodyPr wrap="square" lIns="0" tIns="0" rIns="0" bIns="0" rtlCol="0" anchor="ctr"/>
-          <a:lstStyle/>
-          <a:p>
-            <a:pPr indent="0" marL="0">
-              <a:buNone/>
-            </a:pPr>
-            <a:r>
-              <a:rPr lang="en-US" sz="1400" dirty="0">
-                <a:solidFill>
-                  <a:srgbClr val="7A7A7A"/>
-                </a:solidFill>
-              </a:rPr>
-              <a:t>血圧に次いで2番目の高さ</a:t>
-            </a:r>
-            <a:endParaRPr lang="en-US" sz="1400" dirty="0"/>
+            <a:off x="10519258" y="3749954"/>
+            <a:ext cx="896112" cy="298323"/>
+          </a:xfrm>
+          <a:prstGeom prst="rect">
+            <a:avLst/>
+          </a:prstGeom>
+          <a:noFill/>
+          <a:ln/>
+        </p:spPr>
+        <p:txBody>
+          <a:bodyPr wrap="square" lIns="0" tIns="0" rIns="0" bIns="0" rtlCol="0" anchor="ctr"/>
+          <a:lstStyle/>
+          <a:p>
+            <a:pPr algn="r" indent="0" marL="0">
+              <a:buNone/>
+            </a:pPr>
+            <a:r>
+              <a:rPr lang="en-US" sz="1700" b="1" dirty="0">
+                <a:solidFill>
+                  <a:srgbClr val="FFFFFF"/>
+                </a:solidFill>
+              </a:rPr>
+              <a:t>6.8%</a:t>
+            </a:r>
+            <a:endParaRPr lang="en-US" sz="1700" dirty="0"/>
           </a:p>
         </p:txBody>
       </p:sp>
@@ -8265,7 +7528,7 @@
         </p:nvSpPr>
         <p:spPr>
           <a:xfrm>
-            <a:off x="548640" y="1417320"/>
+            <a:off x="548640" y="1371600"/>
             <a:ext cx="548640" cy="548640"/>
           </a:xfrm>
           <a:prstGeom prst="ellipse">
@@ -8293,7 +7556,7 @@
         </p:blipFill>
         <p:spPr>
           <a:xfrm>
-            <a:off x="685800" y="1554480"/>
+            <a:off x="685800" y="1508760"/>
             <a:ext cx="274320" cy="274320"/>
           </a:xfrm>
           <a:prstGeom prst="rect">
@@ -8309,7 +7572,7 @@
         </p:nvSpPr>
         <p:spPr>
           <a:xfrm>
-            <a:off x="1207008" y="1417320"/>
+            <a:off x="1207008" y="1371600"/>
             <a:ext cx="10332720" cy="548640"/>
           </a:xfrm>
           <a:prstGeom prst="rect">
@@ -8337,9 +7600,9 @@
               <a:buNone/>
             </a:pPr>
             <a:r>
-              <a:rPr lang="en-US" sz="1400" dirty="0">
-                <a:solidFill>
-                  <a:srgbClr val="7A7A7A"/>
+              <a:rPr lang="en-US" sz="2200" b="1" dirty="0">
+                <a:solidFill>
+                  <a:srgbClr val="262626"/>
                 </a:solidFill>
               </a:rPr>
               <a:t>　糖尿病リスク把握で、より重視するのは？（HbA1cの認識度別）</a:t>
@@ -8356,8 +7619,8 @@
         </p:nvSpPr>
         <p:spPr>
           <a:xfrm>
-            <a:off x="640080" y="2148840"/>
-            <a:ext cx="4754880" cy="411480"/>
+            <a:off x="365760" y="2103120"/>
+            <a:ext cx="4937760" cy="411480"/>
           </a:xfrm>
           <a:prstGeom prst="rect">
             <a:avLst/>
@@ -8373,7 +7636,7 @@
               <a:buNone/>
             </a:pPr>
             <a:r>
-              <a:rPr lang="en-US" sz="2000" b="1" dirty="0">
+              <a:rPr lang="en-US" sz="2100" b="1" dirty="0">
                 <a:solidFill>
                   <a:srgbClr val="262626"/>
                 </a:solidFill>
@@ -8384,14 +7647,14 @@
               <a:buNone/>
             </a:pPr>
             <a:r>
-              <a:rPr lang="en-US" sz="1400" dirty="0">
+              <a:rPr lang="en-US" sz="1500" dirty="0">
                 <a:solidFill>
                   <a:srgbClr val="7A7A7A"/>
                 </a:solidFill>
               </a:rPr>
               <a:t>　n=113</a:t>
             </a:r>
-            <a:endParaRPr lang="en-US" sz="2000" dirty="0"/>
+            <a:endParaRPr lang="en-US" sz="2100" dirty="0"/>
           </a:p>
         </p:txBody>
       </p:sp>
@@ -8402,8 +7665,8 @@
           <p:nvPr/>
         </p:nvGraphicFramePr>
         <p:xfrm>
-          <a:off x="1554480" y="2606040"/>
-          <a:ext cx="2926080" cy="2926080"/>
+          <a:off x="1280160" y="2560320"/>
+          <a:ext cx="3108960" cy="3108960"/>
         </p:xfrm>
         <a:graphic xmlns:a="http://schemas.openxmlformats.org/drawingml/2006/main">
           <a:graphicData uri="http://schemas.openxmlformats.org/drawingml/2006/chart">
@@ -8419,8 +7682,8 @@
         </p:nvSpPr>
         <p:spPr>
           <a:xfrm>
-            <a:off x="2057400" y="3520440"/>
-            <a:ext cx="1920240" cy="1097280"/>
+            <a:off x="1828800" y="3474720"/>
+            <a:ext cx="2011680" cy="1280160"/>
           </a:xfrm>
           <a:prstGeom prst="rect">
             <a:avLst/>
@@ -8436,28 +7699,28 @@
               <a:buNone/>
             </a:pPr>
             <a:r>
-              <a:rPr lang="en-US" sz="3200" b="1" dirty="0">
-                <a:solidFill>
-                  <a:srgbClr val="4A4A4A"/>
+              <a:rPr lang="en-US" sz="3400" b="1" dirty="0">
+                <a:solidFill>
+                  <a:srgbClr val="C8102E"/>
                 </a:solidFill>
               </a:rPr>
               <a:t>29.2%</a:t>
             </a:r>
-            <a:endParaRPr lang="en-US" sz="3200" dirty="0"/>
+            <a:endParaRPr lang="en-US" sz="3400" dirty="0"/>
           </a:p>
           <a:p>
             <a:pPr algn="ctr" indent="0" marL="0">
               <a:buNone/>
             </a:pPr>
             <a:r>
-              <a:rPr lang="en-US" sz="1300" b="1" dirty="0">
-                <a:solidFill>
-                  <a:srgbClr val="4A4A4A"/>
+              <a:rPr lang="en-US" sz="1600" b="1" dirty="0">
+                <a:solidFill>
+                  <a:srgbClr val="262626"/>
                 </a:solidFill>
               </a:rPr>
               <a:t>HbA1cを重視</a:t>
             </a:r>
-            <a:endParaRPr lang="en-US" sz="3200" dirty="0"/>
+            <a:endParaRPr lang="en-US" sz="3400" dirty="0"/>
           </a:p>
         </p:txBody>
       </p:sp>
@@ -8469,8 +7732,8 @@
         </p:nvSpPr>
         <p:spPr>
           <a:xfrm>
-            <a:off x="6793992" y="2148840"/>
-            <a:ext cx="4754880" cy="411480"/>
+            <a:off x="6885432" y="2103120"/>
+            <a:ext cx="4937760" cy="411480"/>
           </a:xfrm>
           <a:prstGeom prst="rect">
             <a:avLst/>
@@ -8486,7 +7749,7 @@
               <a:buNone/>
             </a:pPr>
             <a:r>
-              <a:rPr lang="en-US" sz="2000" b="1" dirty="0">
+              <a:rPr lang="en-US" sz="2100" b="1" dirty="0">
                 <a:solidFill>
                   <a:srgbClr val="262626"/>
                 </a:solidFill>
@@ -8497,14 +7760,14 @@
               <a:buNone/>
             </a:pPr>
             <a:r>
-              <a:rPr lang="en-US" sz="1400" dirty="0">
+              <a:rPr lang="en-US" sz="1500" dirty="0">
                 <a:solidFill>
                   <a:srgbClr val="7A7A7A"/>
                 </a:solidFill>
               </a:rPr>
               <a:t>　n=72</a:t>
             </a:r>
-            <a:endParaRPr lang="en-US" sz="2000" dirty="0"/>
+            <a:endParaRPr lang="en-US" sz="2100" dirty="0"/>
           </a:p>
         </p:txBody>
       </p:sp>
@@ -8515,8 +7778,8 @@
           <p:nvPr/>
         </p:nvGraphicFramePr>
         <p:xfrm>
-          <a:off x="7708392" y="2606040"/>
-          <a:ext cx="2926080" cy="2926080"/>
+          <a:off x="7799832" y="2560320"/>
+          <a:ext cx="3108960" cy="3108960"/>
         </p:xfrm>
         <a:graphic xmlns:a="http://schemas.openxmlformats.org/drawingml/2006/main">
           <a:graphicData uri="http://schemas.openxmlformats.org/drawingml/2006/chart">
@@ -8532,8 +7795,8 @@
         </p:nvSpPr>
         <p:spPr>
           <a:xfrm>
-            <a:off x="8211312" y="3520440"/>
-            <a:ext cx="1920240" cy="1097280"/>
+            <a:off x="8348472" y="3474720"/>
+            <a:ext cx="2011680" cy="1280160"/>
           </a:xfrm>
           <a:prstGeom prst="rect">
             <a:avLst/>
@@ -8549,28 +7812,28 @@
               <a:buNone/>
             </a:pPr>
             <a:r>
-              <a:rPr lang="en-US" sz="3200" b="1" dirty="0">
+              <a:rPr lang="en-US" sz="3400" b="1" dirty="0">
                 <a:solidFill>
                   <a:srgbClr val="C8102E"/>
                 </a:solidFill>
               </a:rPr>
               <a:t>70.8%</a:t>
             </a:r>
-            <a:endParaRPr lang="en-US" sz="3200" dirty="0"/>
+            <a:endParaRPr lang="en-US" sz="3400" dirty="0"/>
           </a:p>
           <a:p>
             <a:pPr algn="ctr" indent="0" marL="0">
               <a:buNone/>
             </a:pPr>
             <a:r>
-              <a:rPr lang="en-US" sz="1300" b="1" dirty="0">
-                <a:solidFill>
-                  <a:srgbClr val="4A4A4A"/>
+              <a:rPr lang="en-US" sz="1600" b="1" dirty="0">
+                <a:solidFill>
+                  <a:srgbClr val="262626"/>
                 </a:solidFill>
               </a:rPr>
               <a:t>HbA1cを重視</a:t>
             </a:r>
-            <a:endParaRPr lang="en-US" sz="3200" dirty="0"/>
+            <a:endParaRPr lang="en-US" sz="3400" dirty="0"/>
           </a:p>
         </p:txBody>
       </p:sp>
@@ -8582,8 +7845,8 @@
         </p:nvSpPr>
         <p:spPr>
           <a:xfrm>
-            <a:off x="5257800" y="3520440"/>
-            <a:ext cx="1691640" cy="960120"/>
+            <a:off x="4846320" y="3429000"/>
+            <a:ext cx="2514600" cy="1371600"/>
           </a:xfrm>
           <a:prstGeom prst="rightArrow">
             <a:avLst/>
@@ -8602,8 +7865,8 @@
         </p:nvSpPr>
         <p:spPr>
           <a:xfrm>
-            <a:off x="5257800" y="3520440"/>
-            <a:ext cx="1463040" cy="960120"/>
+            <a:off x="4846320" y="3429000"/>
+            <a:ext cx="2148840" cy="1371600"/>
           </a:xfrm>
           <a:prstGeom prst="rect">
             <a:avLst/>
@@ -8619,28 +7882,28 @@
               <a:buNone/>
             </a:pPr>
             <a:r>
-              <a:rPr lang="en-US" sz="1500" b="1" dirty="0">
+              <a:rPr lang="en-US" sz="2200" b="1" dirty="0">
                 <a:solidFill>
                   <a:srgbClr val="9E0D25"/>
                 </a:solidFill>
               </a:rPr>
               <a:t>意味まで</a:t>
             </a:r>
-            <a:endParaRPr lang="en-US" sz="1500" dirty="0"/>
+            <a:endParaRPr lang="en-US" sz="2200" dirty="0"/>
           </a:p>
           <a:p>
             <a:pPr algn="ctr" indent="0" marL="0">
               <a:buNone/>
             </a:pPr>
             <a:r>
-              <a:rPr lang="en-US" sz="1500" b="1" dirty="0">
+              <a:rPr lang="en-US" sz="2200" b="1" dirty="0">
                 <a:solidFill>
                   <a:srgbClr val="9E0D25"/>
                 </a:solidFill>
               </a:rPr>
               <a:t>知ると</a:t>
             </a:r>
-            <a:endParaRPr lang="en-US" sz="1500" dirty="0"/>
+            <a:endParaRPr lang="en-US" sz="2200" dirty="0"/>
           </a:p>
         </p:txBody>
       </p:sp>
@@ -8856,7 +8119,7 @@
         </p:nvSpPr>
         <p:spPr>
           <a:xfrm>
-            <a:off x="548640" y="1417320"/>
+            <a:off x="548640" y="1371600"/>
             <a:ext cx="548640" cy="548640"/>
           </a:xfrm>
           <a:prstGeom prst="ellipse">
@@ -8884,7 +8147,7 @@
         </p:blipFill>
         <p:spPr>
           <a:xfrm>
-            <a:off x="685800" y="1554480"/>
+            <a:off x="685800" y="1508760"/>
             <a:ext cx="274320" cy="274320"/>
           </a:xfrm>
           <a:prstGeom prst="rect">
@@ -8900,7 +8163,7 @@
         </p:nvSpPr>
         <p:spPr>
           <a:xfrm>
-            <a:off x="1207008" y="1417320"/>
+            <a:off x="1207008" y="1371600"/>
             <a:ext cx="10332720" cy="548640"/>
           </a:xfrm>
           <a:prstGeom prst="rect">
@@ -8933,7 +8196,7 @@
                   <a:srgbClr val="7A7A7A"/>
                 </a:solidFill>
               </a:rPr>
-              <a:t>　血糖値の測定やその数値で、糖尿病予備群などのリスクを十分に把握できる？（n=303）</a:t>
+              <a:t>　n=303</a:t>
             </a:r>
             <a:endParaRPr lang="en-US" sz="2200" dirty="0"/>
           </a:p>
@@ -8947,8 +8210,8 @@
         </p:nvSpPr>
         <p:spPr>
           <a:xfrm>
-            <a:off x="548640" y="2057400"/>
-            <a:ext cx="4206240" cy="1280160"/>
+            <a:off x="548640" y="2011680"/>
+            <a:ext cx="11091672" cy="960120"/>
           </a:xfrm>
           <a:prstGeom prst="rect">
             <a:avLst/>
@@ -8964,83 +8227,33 @@
               <a:buNone/>
             </a:pPr>
             <a:r>
-              <a:rPr lang="en-US" sz="9600" b="1" dirty="0">
-                <a:solidFill>
-                  <a:srgbClr val="C8102E"/>
-                </a:solidFill>
-              </a:rPr>
-              <a:t>87.5%</a:t>
-            </a:r>
-            <a:endParaRPr lang="en-US" sz="9600" dirty="0"/>
-          </a:p>
-        </p:txBody>
-      </p:sp>
-      <p:sp>
-        <p:nvSpPr>
-          <p:cNvPr id="8" name="Text 5"/>
-          <p:cNvSpPr txBox="1"/>
-          <p:nvPr/>
-        </p:nvSpPr>
-        <p:spPr>
-          <a:xfrm>
-            <a:off x="4937760" y="2103120"/>
-            <a:ext cx="6675120" cy="1188720"/>
-          </a:xfrm>
-          <a:prstGeom prst="rect">
-            <a:avLst/>
-          </a:prstGeom>
-          <a:noFill/>
-          <a:ln/>
-        </p:spPr>
-        <p:txBody>
-          <a:bodyPr wrap="square" lIns="0" tIns="0" rIns="0" bIns="0" rtlCol="0" anchor="ctr"/>
-          <a:lstStyle/>
-          <a:p>
-            <a:pPr indent="0" marL="0">
-              <a:buNone/>
-            </a:pPr>
-            <a:r>
               <a:rPr lang="en-US" sz="2800" b="1" dirty="0">
                 <a:solidFill>
                   <a:srgbClr val="262626"/>
                 </a:solidFill>
               </a:rPr>
-              <a:t>「血糖値を見ていれば大丈夫」？</a:t>
+              <a:t>血糖値の測定やその数値で、糖尿病予備群などのリスクを十分に把握できる？</a:t>
             </a:r>
             <a:endParaRPr lang="en-US" sz="2800" dirty="0"/>
           </a:p>
-          <a:p>
-            <a:pPr indent="0" marL="0">
-              <a:buNone/>
-            </a:pPr>
-            <a:r>
-              <a:rPr lang="en-US" sz="2000" dirty="0">
-                <a:solidFill>
-                  <a:srgbClr val="4A4A4A"/>
-                </a:solidFill>
-              </a:rPr>
-              <a:t>身近な指標だからこそ生まれる、“血糖値の落とし穴”</a:t>
-            </a:r>
-            <a:endParaRPr lang="en-US" sz="2800" dirty="0"/>
-          </a:p>
-        </p:txBody>
-      </p:sp>
-      <p:sp>
-        <p:nvSpPr>
-          <p:cNvPr id="9" name="Shape 6"/>
+        </p:txBody>
+      </p:sp>
+      <p:sp>
+        <p:nvSpPr>
+          <p:cNvPr id="8" name="Shape 5"/>
           <p:cNvSpPr/>
           <p:nvPr/>
         </p:nvSpPr>
         <p:spPr>
           <a:xfrm>
-            <a:off x="548640" y="3703320"/>
-            <a:ext cx="2273793" cy="868680"/>
+            <a:off x="548640" y="3291840"/>
+            <a:ext cx="2273793" cy="914400"/>
           </a:xfrm>
           <a:prstGeom prst="rect">
             <a:avLst/>
           </a:prstGeom>
           <a:solidFill>
-            <a:srgbClr val="2F4A66"/>
+            <a:srgbClr val="9E0D25"/>
           </a:solidFill>
           <a:ln w="19050">
             <a:solidFill>
@@ -9052,14 +8265,14 @@
       </p:sp>
       <p:sp>
         <p:nvSpPr>
-          <p:cNvPr id="10" name="Text 7"/>
+          <p:cNvPr id="9" name="Text 6"/>
           <p:cNvSpPr txBox="1"/>
           <p:nvPr/>
         </p:nvSpPr>
         <p:spPr>
           <a:xfrm>
-            <a:off x="548640" y="3703320"/>
-            <a:ext cx="2273793" cy="868680"/>
+            <a:off x="548640" y="3291840"/>
+            <a:ext cx="2273793" cy="914400"/>
           </a:xfrm>
           <a:prstGeom prst="rect">
             <a:avLst/>
@@ -9075,33 +8288,33 @@
               <a:buNone/>
             </a:pPr>
             <a:r>
-              <a:rPr lang="en-US" sz="2600" b="1" dirty="0">
+              <a:rPr lang="en-US" sz="2800" b="1" dirty="0">
                 <a:solidFill>
                   <a:srgbClr val="FFFFFF"/>
                 </a:solidFill>
               </a:rPr>
               <a:t>20.5%</a:t>
             </a:r>
-            <a:endParaRPr lang="en-US" sz="2600" dirty="0"/>
-          </a:p>
-        </p:txBody>
-      </p:sp>
-      <p:sp>
-        <p:nvSpPr>
-          <p:cNvPr id="11" name="Shape 8"/>
+            <a:endParaRPr lang="en-US" sz="2800" dirty="0"/>
+          </a:p>
+        </p:txBody>
+      </p:sp>
+      <p:sp>
+        <p:nvSpPr>
+          <p:cNvPr id="10" name="Shape 7"/>
           <p:cNvSpPr/>
           <p:nvPr/>
         </p:nvSpPr>
         <p:spPr>
           <a:xfrm>
-            <a:off x="2822433" y="3703320"/>
-            <a:ext cx="7431420" cy="868680"/>
+            <a:off x="2822433" y="3291840"/>
+            <a:ext cx="7431420" cy="914400"/>
           </a:xfrm>
           <a:prstGeom prst="rect">
             <a:avLst/>
           </a:prstGeom>
           <a:solidFill>
-            <a:srgbClr val="46688C"/>
+            <a:srgbClr val="C8102E"/>
           </a:solidFill>
           <a:ln w="19050">
             <a:solidFill>
@@ -9113,14 +8326,14 @@
       </p:sp>
       <p:sp>
         <p:nvSpPr>
-          <p:cNvPr id="12" name="Text 9"/>
+          <p:cNvPr id="11" name="Text 8"/>
           <p:cNvSpPr txBox="1"/>
           <p:nvPr/>
         </p:nvSpPr>
         <p:spPr>
           <a:xfrm>
-            <a:off x="2822433" y="3703320"/>
-            <a:ext cx="7431420" cy="868680"/>
+            <a:off x="2822433" y="3291840"/>
+            <a:ext cx="7431420" cy="914400"/>
           </a:xfrm>
           <a:prstGeom prst="rect">
             <a:avLst/>
@@ -9136,33 +8349,33 @@
               <a:buNone/>
             </a:pPr>
             <a:r>
-              <a:rPr lang="en-US" sz="2600" b="1" dirty="0">
+              <a:rPr lang="en-US" sz="2800" b="1" dirty="0">
                 <a:solidFill>
                   <a:srgbClr val="FFFFFF"/>
                 </a:solidFill>
               </a:rPr>
               <a:t>67.0%</a:t>
             </a:r>
-            <a:endParaRPr lang="en-US" sz="2600" dirty="0"/>
-          </a:p>
-        </p:txBody>
-      </p:sp>
-      <p:sp>
-        <p:nvSpPr>
-          <p:cNvPr id="13" name="Shape 10"/>
+            <a:endParaRPr lang="en-US" sz="2800" dirty="0"/>
+          </a:p>
+        </p:txBody>
+      </p:sp>
+      <p:sp>
+        <p:nvSpPr>
+          <p:cNvPr id="12" name="Shape 9"/>
           <p:cNvSpPr/>
           <p:nvPr/>
         </p:nvSpPr>
         <p:spPr>
           <a:xfrm>
-            <a:off x="10253853" y="3703320"/>
-            <a:ext cx="1131351" cy="868680"/>
+            <a:off x="10253853" y="3291840"/>
+            <a:ext cx="1131351" cy="914400"/>
           </a:xfrm>
           <a:prstGeom prst="rect">
             <a:avLst/>
           </a:prstGeom>
           <a:solidFill>
-            <a:srgbClr val="D5DBE2"/>
+            <a:srgbClr val="D9D9D9"/>
           </a:solidFill>
           <a:ln w="19050">
             <a:solidFill>
@@ -9174,14 +8387,14 @@
       </p:sp>
       <p:sp>
         <p:nvSpPr>
-          <p:cNvPr id="14" name="Text 11"/>
+          <p:cNvPr id="13" name="Text 10"/>
           <p:cNvSpPr txBox="1"/>
           <p:nvPr/>
         </p:nvSpPr>
         <p:spPr>
           <a:xfrm>
-            <a:off x="10253853" y="3703320"/>
-            <a:ext cx="1131351" cy="868680"/>
+            <a:off x="10253853" y="3291840"/>
+            <a:ext cx="1131351" cy="914400"/>
           </a:xfrm>
           <a:prstGeom prst="rect">
             <a:avLst/>
@@ -9197,33 +8410,33 @@
               <a:buNone/>
             </a:pPr>
             <a:r>
-              <a:rPr lang="en-US" sz="1600" b="1" dirty="0">
+              <a:rPr lang="en-US" sz="1800" b="1" dirty="0">
                 <a:solidFill>
                   <a:srgbClr val="262626"/>
                 </a:solidFill>
               </a:rPr>
               <a:t>10.2%</a:t>
             </a:r>
-            <a:endParaRPr lang="en-US" sz="1600" dirty="0"/>
-          </a:p>
-        </p:txBody>
-      </p:sp>
-      <p:sp>
-        <p:nvSpPr>
-          <p:cNvPr id="15" name="Shape 12"/>
+            <a:endParaRPr lang="en-US" sz="1800" dirty="0"/>
+          </a:p>
+        </p:txBody>
+      </p:sp>
+      <p:sp>
+        <p:nvSpPr>
+          <p:cNvPr id="14" name="Shape 11"/>
           <p:cNvSpPr/>
           <p:nvPr/>
         </p:nvSpPr>
         <p:spPr>
           <a:xfrm>
-            <a:off x="11385204" y="3703320"/>
-            <a:ext cx="255108" cy="868680"/>
+            <a:off x="11385204" y="3291840"/>
+            <a:ext cx="255108" cy="914400"/>
           </a:xfrm>
           <a:prstGeom prst="rect">
             <a:avLst/>
           </a:prstGeom>
           <a:solidFill>
-            <a:srgbClr val="9AA4AF"/>
+            <a:srgbClr val="A6A6A6"/>
           </a:solidFill>
           <a:ln w="19050">
             <a:solidFill>
@@ -9235,14 +8448,14 @@
       </p:sp>
       <p:sp>
         <p:nvSpPr>
-          <p:cNvPr id="16" name="Text 13"/>
+          <p:cNvPr id="15" name="Text 12"/>
           <p:cNvSpPr txBox="1"/>
           <p:nvPr/>
         </p:nvSpPr>
         <p:spPr>
           <a:xfrm>
-            <a:off x="10836564" y="3319272"/>
-            <a:ext cx="822960" cy="347472"/>
+            <a:off x="10745124" y="2907792"/>
+            <a:ext cx="914400" cy="347472"/>
           </a:xfrm>
           <a:prstGeom prst="rect">
             <a:avLst/>
@@ -9258,33 +8471,33 @@
               <a:buNone/>
             </a:pPr>
             <a:r>
-              <a:rPr lang="en-US" sz="1400" b="1" dirty="0">
-                <a:solidFill>
-                  <a:srgbClr val="7A7A7A"/>
+              <a:rPr lang="en-US" sz="1600" b="1" dirty="0">
+                <a:solidFill>
+                  <a:srgbClr val="4A4A4A"/>
                 </a:solidFill>
               </a:rPr>
               <a:t>2.3%</a:t>
             </a:r>
-            <a:endParaRPr lang="en-US" sz="1400" dirty="0"/>
-          </a:p>
-        </p:txBody>
-      </p:sp>
-      <p:sp>
-        <p:nvSpPr>
-          <p:cNvPr id="17" name="Shape 14"/>
+            <a:endParaRPr lang="en-US" sz="1600" dirty="0"/>
+          </a:p>
+        </p:txBody>
+      </p:sp>
+      <p:sp>
+        <p:nvSpPr>
+          <p:cNvPr id="16" name="Shape 13"/>
           <p:cNvSpPr/>
           <p:nvPr/>
         </p:nvSpPr>
         <p:spPr>
           <a:xfrm>
-            <a:off x="566928" y="4681728"/>
-            <a:ext cx="914" cy="182880"/>
+            <a:off x="566928" y="4297680"/>
+            <a:ext cx="914" cy="201168"/>
           </a:xfrm>
           <a:prstGeom prst="line">
             <a:avLst/>
           </a:prstGeom>
           <a:noFill/>
-          <a:ln w="25400">
+          <a:ln w="31750">
             <a:solidFill>
               <a:srgbClr val="C8102E"/>
             </a:solidFill>
@@ -9294,20 +8507,20 @@
       </p:sp>
       <p:sp>
         <p:nvSpPr>
-          <p:cNvPr id="18" name="Shape 15"/>
+          <p:cNvPr id="17" name="Shape 14"/>
           <p:cNvSpPr/>
           <p:nvPr/>
         </p:nvSpPr>
         <p:spPr>
           <a:xfrm>
-            <a:off x="566928" y="4864608"/>
+            <a:off x="566928" y="4498848"/>
             <a:ext cx="9668637" cy="914"/>
           </a:xfrm>
           <a:prstGeom prst="line">
             <a:avLst/>
           </a:prstGeom>
           <a:noFill/>
-          <a:ln w="25400">
+          <a:ln w="31750">
             <a:solidFill>
               <a:srgbClr val="C8102E"/>
             </a:solidFill>
@@ -9317,20 +8530,20 @@
       </p:sp>
       <p:sp>
         <p:nvSpPr>
-          <p:cNvPr id="19" name="Shape 16"/>
+          <p:cNvPr id="18" name="Shape 15"/>
           <p:cNvSpPr/>
           <p:nvPr/>
         </p:nvSpPr>
         <p:spPr>
           <a:xfrm>
-            <a:off x="10235565" y="4681728"/>
-            <a:ext cx="914" cy="182880"/>
+            <a:off x="10235565" y="4297680"/>
+            <a:ext cx="914" cy="201168"/>
           </a:xfrm>
           <a:prstGeom prst="line">
             <a:avLst/>
           </a:prstGeom>
           <a:noFill/>
-          <a:ln w="25400">
+          <a:ln w="31750">
             <a:solidFill>
               <a:srgbClr val="C8102E"/>
             </a:solidFill>
@@ -9340,14 +8553,14 @@
       </p:sp>
       <p:sp>
         <p:nvSpPr>
-          <p:cNvPr id="20" name="Text 17"/>
+          <p:cNvPr id="19" name="Text 16"/>
           <p:cNvSpPr txBox="1"/>
           <p:nvPr/>
         </p:nvSpPr>
         <p:spPr>
           <a:xfrm>
-            <a:off x="3572447" y="4919472"/>
-            <a:ext cx="3657600" cy="411480"/>
+            <a:off x="2200847" y="4553712"/>
+            <a:ext cx="6400800" cy="960120"/>
           </a:xfrm>
           <a:prstGeom prst="rect">
             <a:avLst/>
@@ -9363,46 +8576,57 @@
               <a:buNone/>
             </a:pPr>
             <a:r>
-              <a:rPr lang="en-US" sz="2000" b="1" dirty="0">
+              <a:rPr lang="en-US" sz="2600" b="1" dirty="0">
+                <a:solidFill>
+                  <a:srgbClr val="262626"/>
+                </a:solidFill>
+              </a:rPr>
+              <a:t>「そう思う」計 </a:t>
+            </a:r>
+            <a:pPr algn="ctr" indent="0" marL="0">
+              <a:buNone/>
+            </a:pPr>
+            <a:r>
+              <a:rPr lang="en-US" sz="6600" b="1" dirty="0">
                 <a:solidFill>
                   <a:srgbClr val="C8102E"/>
                 </a:solidFill>
               </a:rPr>
-              <a:t>「そう思う」計 87.5%</a:t>
-            </a:r>
-            <a:endParaRPr lang="en-US" sz="2000" dirty="0"/>
-          </a:p>
-        </p:txBody>
-      </p:sp>
-      <p:sp>
-        <p:nvSpPr>
-          <p:cNvPr id="21" name="Shape 18"/>
+              <a:t>87.5%</a:t>
+            </a:r>
+            <a:endParaRPr lang="en-US" sz="2600" dirty="0"/>
+          </a:p>
+        </p:txBody>
+      </p:sp>
+      <p:sp>
+        <p:nvSpPr>
+          <p:cNvPr id="20" name="Shape 17"/>
           <p:cNvSpPr/>
           <p:nvPr/>
         </p:nvSpPr>
         <p:spPr>
           <a:xfrm>
-            <a:off x="548640" y="5678424"/>
+            <a:off x="548640" y="5815584"/>
             <a:ext cx="164592" cy="164592"/>
           </a:xfrm>
           <a:prstGeom prst="ellipse">
             <a:avLst/>
           </a:prstGeom>
           <a:solidFill>
-            <a:srgbClr val="2F4A66"/>
+            <a:srgbClr val="9E0D25"/>
           </a:solidFill>
           <a:ln/>
         </p:spPr>
       </p:sp>
       <p:sp>
         <p:nvSpPr>
-          <p:cNvPr id="22" name="Text 19"/>
+          <p:cNvPr id="21" name="Text 18"/>
           <p:cNvSpPr txBox="1"/>
           <p:nvPr/>
         </p:nvSpPr>
         <p:spPr>
           <a:xfrm>
-            <a:off x="786384" y="5577840"/>
+            <a:off x="786384" y="5715000"/>
             <a:ext cx="2743200" cy="365760"/>
           </a:xfrm>
           <a:prstGeom prst="rect">
@@ -9419,46 +8643,46 @@
               <a:buNone/>
             </a:pPr>
             <a:r>
-              <a:rPr lang="en-US" sz="1500" dirty="0">
+              <a:rPr lang="en-US" sz="2100" dirty="0">
                 <a:solidFill>
                   <a:srgbClr val="4A4A4A"/>
                 </a:solidFill>
               </a:rPr>
               <a:t>非常にそう思う</a:t>
             </a:r>
-            <a:endParaRPr lang="en-US" sz="1500" dirty="0"/>
-          </a:p>
-        </p:txBody>
-      </p:sp>
-      <p:sp>
-        <p:nvSpPr>
-          <p:cNvPr id="23" name="Shape 20"/>
+            <a:endParaRPr lang="en-US" sz="2100" dirty="0"/>
+          </a:p>
+        </p:txBody>
+      </p:sp>
+      <p:sp>
+        <p:nvSpPr>
+          <p:cNvPr id="22" name="Shape 19"/>
           <p:cNvSpPr/>
           <p:nvPr/>
         </p:nvSpPr>
         <p:spPr>
           <a:xfrm>
-            <a:off x="3291840" y="5678424"/>
+            <a:off x="3383280" y="5815584"/>
             <a:ext cx="164592" cy="164592"/>
           </a:xfrm>
           <a:prstGeom prst="ellipse">
             <a:avLst/>
           </a:prstGeom>
           <a:solidFill>
-            <a:srgbClr val="46688C"/>
+            <a:srgbClr val="C8102E"/>
           </a:solidFill>
           <a:ln/>
         </p:spPr>
       </p:sp>
       <p:sp>
         <p:nvSpPr>
-          <p:cNvPr id="24" name="Text 21"/>
+          <p:cNvPr id="23" name="Text 20"/>
           <p:cNvSpPr txBox="1"/>
           <p:nvPr/>
         </p:nvSpPr>
         <p:spPr>
           <a:xfrm>
-            <a:off x="3529584" y="5577840"/>
+            <a:off x="3621024" y="5715000"/>
             <a:ext cx="2743200" cy="365760"/>
           </a:xfrm>
           <a:prstGeom prst="rect">
@@ -9475,46 +8699,46 @@
               <a:buNone/>
             </a:pPr>
             <a:r>
-              <a:rPr lang="en-US" sz="1500" dirty="0">
+              <a:rPr lang="en-US" sz="2100" dirty="0">
                 <a:solidFill>
                   <a:srgbClr val="4A4A4A"/>
                 </a:solidFill>
               </a:rPr>
               <a:t>そう思う</a:t>
             </a:r>
-            <a:endParaRPr lang="en-US" sz="1500" dirty="0"/>
-          </a:p>
-        </p:txBody>
-      </p:sp>
-      <p:sp>
-        <p:nvSpPr>
-          <p:cNvPr id="25" name="Shape 22"/>
+            <a:endParaRPr lang="en-US" sz="2100" dirty="0"/>
+          </a:p>
+        </p:txBody>
+      </p:sp>
+      <p:sp>
+        <p:nvSpPr>
+          <p:cNvPr id="24" name="Shape 21"/>
           <p:cNvSpPr/>
           <p:nvPr/>
         </p:nvSpPr>
         <p:spPr>
           <a:xfrm>
-            <a:off x="6035040" y="5678424"/>
+            <a:off x="6217920" y="5815584"/>
             <a:ext cx="164592" cy="164592"/>
           </a:xfrm>
           <a:prstGeom prst="ellipse">
             <a:avLst/>
           </a:prstGeom>
           <a:solidFill>
-            <a:srgbClr val="D5DBE2"/>
+            <a:srgbClr val="D9D9D9"/>
           </a:solidFill>
           <a:ln/>
         </p:spPr>
       </p:sp>
       <p:sp>
         <p:nvSpPr>
-          <p:cNvPr id="26" name="Text 23"/>
+          <p:cNvPr id="25" name="Text 22"/>
           <p:cNvSpPr txBox="1"/>
           <p:nvPr/>
         </p:nvSpPr>
         <p:spPr>
           <a:xfrm>
-            <a:off x="6272784" y="5577840"/>
+            <a:off x="6455664" y="5715000"/>
             <a:ext cx="2743200" cy="365760"/>
           </a:xfrm>
           <a:prstGeom prst="rect">
@@ -9531,46 +8755,46 @@
               <a:buNone/>
             </a:pPr>
             <a:r>
-              <a:rPr lang="en-US" sz="1500" dirty="0">
+              <a:rPr lang="en-US" sz="2100" dirty="0">
                 <a:solidFill>
                   <a:srgbClr val="4A4A4A"/>
                 </a:solidFill>
               </a:rPr>
               <a:t>そう思わない</a:t>
             </a:r>
-            <a:endParaRPr lang="en-US" sz="1500" dirty="0"/>
-          </a:p>
-        </p:txBody>
-      </p:sp>
-      <p:sp>
-        <p:nvSpPr>
-          <p:cNvPr id="27" name="Shape 24"/>
+            <a:endParaRPr lang="en-US" sz="2100" dirty="0"/>
+          </a:p>
+        </p:txBody>
+      </p:sp>
+      <p:sp>
+        <p:nvSpPr>
+          <p:cNvPr id="26" name="Shape 23"/>
           <p:cNvSpPr/>
           <p:nvPr/>
         </p:nvSpPr>
         <p:spPr>
           <a:xfrm>
-            <a:off x="8778240" y="5678424"/>
+            <a:off x="9052560" y="5815584"/>
             <a:ext cx="164592" cy="164592"/>
           </a:xfrm>
           <a:prstGeom prst="ellipse">
             <a:avLst/>
           </a:prstGeom>
           <a:solidFill>
-            <a:srgbClr val="9AA4AF"/>
+            <a:srgbClr val="A6A6A6"/>
           </a:solidFill>
           <a:ln/>
         </p:spPr>
       </p:sp>
       <p:sp>
         <p:nvSpPr>
-          <p:cNvPr id="28" name="Text 25"/>
+          <p:cNvPr id="27" name="Text 24"/>
           <p:cNvSpPr txBox="1"/>
           <p:nvPr/>
         </p:nvSpPr>
         <p:spPr>
           <a:xfrm>
-            <a:off x="9015984" y="5577840"/>
+            <a:off x="9290304" y="5715000"/>
             <a:ext cx="2743200" cy="365760"/>
           </a:xfrm>
           <a:prstGeom prst="rect">
@@ -9587,14 +8811,14 @@
               <a:buNone/>
             </a:pPr>
             <a:r>
-              <a:rPr lang="en-US" sz="1500" dirty="0">
+              <a:rPr lang="en-US" sz="2100" dirty="0">
                 <a:solidFill>
                   <a:srgbClr val="4A4A4A"/>
                 </a:solidFill>
               </a:rPr>
               <a:t>全くそう思わない</a:t>
             </a:r>
-            <a:endParaRPr lang="en-US" sz="1500" dirty="0"/>
+            <a:endParaRPr lang="en-US" sz="2100" dirty="0"/>
           </a:p>
         </p:txBody>
       </p:sp>
@@ -9738,7 +8962,7 @@
                   <a:srgbClr val="262626"/>
                 </a:solidFill>
               </a:rPr>
-              <a:t>血糖値の落とし穴 ── 1日の中でも変動する「瞬間風速」</a:t>
+              <a:t>血糖値の落とし穴</a:t>
             </a:r>
             <a:endParaRPr lang="en-US" sz="3200" dirty="0"/>
           </a:p>
@@ -10298,7 +9522,7 @@
         </p:nvSpPr>
         <p:spPr>
           <a:xfrm>
-            <a:off x="7589520" y="1463040"/>
+            <a:off x="7498080" y="1463040"/>
             <a:ext cx="1371600" cy="411480"/>
           </a:xfrm>
           <a:prstGeom prst="roundRect">
@@ -10338,8 +9562,8 @@
         </p:nvSpPr>
         <p:spPr>
           <a:xfrm>
-            <a:off x="7589520" y="2103120"/>
-            <a:ext cx="640080" cy="640080"/>
+            <a:off x="7498080" y="2194560"/>
+            <a:ext cx="685800" cy="685800"/>
           </a:xfrm>
           <a:prstGeom prst="ellipse">
             <a:avLst/>
@@ -10366,8 +9590,8 @@
         </p:blipFill>
         <p:spPr>
           <a:xfrm>
-            <a:off x="7749540" y="2263140"/>
-            <a:ext cx="320040" cy="320040"/>
+            <a:off x="7669530" y="2366010"/>
+            <a:ext cx="342900" cy="342900"/>
           </a:xfrm>
           <a:prstGeom prst="rect">
             <a:avLst/>
@@ -10382,8 +9606,8 @@
         </p:nvSpPr>
         <p:spPr>
           <a:xfrm>
-            <a:off x="8412480" y="2084832"/>
-            <a:ext cx="3246120" cy="411480"/>
+            <a:off x="8321040" y="2194560"/>
+            <a:ext cx="3337560" cy="457200"/>
           </a:xfrm>
           <a:prstGeom prst="rect">
             <a:avLst/>
@@ -10399,14 +9623,14 @@
               <a:buNone/>
             </a:pPr>
             <a:r>
-              <a:rPr lang="en-US" sz="2100" b="1" dirty="0">
+              <a:rPr lang="en-US" sz="2200" b="1" dirty="0">
                 <a:solidFill>
                   <a:srgbClr val="262626"/>
                 </a:solidFill>
               </a:rPr>
               <a:t>採血した“瞬間”の数値</a:t>
             </a:r>
-            <a:endParaRPr lang="en-US" sz="2100" dirty="0"/>
+            <a:endParaRPr lang="en-US" sz="2200" dirty="0"/>
           </a:p>
         </p:txBody>
       </p:sp>
@@ -10418,8 +9642,8 @@
         </p:nvSpPr>
         <p:spPr>
           <a:xfrm>
-            <a:off x="8412480" y="2514600"/>
-            <a:ext cx="3246120" cy="777240"/>
+            <a:off x="8321040" y="2743200"/>
+            <a:ext cx="3337560" cy="1188720"/>
           </a:xfrm>
           <a:prstGeom prst="rect">
             <a:avLst/>
@@ -10435,14 +9659,28 @@
               <a:buNone/>
             </a:pPr>
             <a:r>
-              <a:rPr lang="en-US" sz="1500" dirty="0">
+              <a:rPr lang="en-US" sz="2000" b="1" dirty="0">
                 <a:solidFill>
                   <a:srgbClr val="4A4A4A"/>
                 </a:solidFill>
               </a:rPr>
-              <a:t>あくまで「瞬間風速の数値」。中長期的な数値ではない</a:t>
-            </a:r>
-            <a:endParaRPr lang="en-US" sz="1500" dirty="0"/>
+              <a:t>あくまで「瞬間風速の数値」。</a:t>
+            </a:r>
+            <a:endParaRPr lang="en-US" sz="2000" dirty="0"/>
+          </a:p>
+          <a:p>
+            <a:pPr indent="0" marL="0">
+              <a:buNone/>
+            </a:pPr>
+            <a:r>
+              <a:rPr lang="en-US" sz="2000" b="1" dirty="0">
+                <a:solidFill>
+                  <a:srgbClr val="4A4A4A"/>
+                </a:solidFill>
+              </a:rPr>
+              <a:t>中長期的な数値ではない</a:t>
+            </a:r>
+            <a:endParaRPr lang="en-US" sz="2000" dirty="0"/>
           </a:p>
         </p:txBody>
       </p:sp>
@@ -10454,8 +9692,8 @@
         </p:nvSpPr>
         <p:spPr>
           <a:xfrm>
-            <a:off x="7589520" y="3474720"/>
-            <a:ext cx="640080" cy="640080"/>
+            <a:off x="7498080" y="4160520"/>
+            <a:ext cx="685800" cy="685800"/>
           </a:xfrm>
           <a:prstGeom prst="ellipse">
             <a:avLst/>
@@ -10482,8 +9720,8 @@
         </p:blipFill>
         <p:spPr>
           <a:xfrm>
-            <a:off x="7749540" y="3634740"/>
-            <a:ext cx="320040" cy="320040"/>
+            <a:off x="7669530" y="4331970"/>
+            <a:ext cx="342900" cy="342900"/>
           </a:xfrm>
           <a:prstGeom prst="rect">
             <a:avLst/>
@@ -10498,8 +9736,8 @@
         </p:nvSpPr>
         <p:spPr>
           <a:xfrm>
-            <a:off x="8412480" y="3456432"/>
-            <a:ext cx="3246120" cy="411480"/>
+            <a:off x="8321040" y="4160520"/>
+            <a:ext cx="3337560" cy="457200"/>
           </a:xfrm>
           <a:prstGeom prst="rect">
             <a:avLst/>
@@ -10515,14 +9753,14 @@
               <a:buNone/>
             </a:pPr>
             <a:r>
-              <a:rPr lang="en-US" sz="2100" b="1" dirty="0">
+              <a:rPr lang="en-US" sz="2200" b="1" dirty="0">
                 <a:solidFill>
                   <a:srgbClr val="262626"/>
                 </a:solidFill>
               </a:rPr>
               <a:t>1日の中でも変動する</a:t>
             </a:r>
-            <a:endParaRPr lang="en-US" sz="2100" dirty="0"/>
+            <a:endParaRPr lang="en-US" sz="2200" dirty="0"/>
           </a:p>
         </p:txBody>
       </p:sp>
@@ -10534,8 +9772,8 @@
         </p:nvSpPr>
         <p:spPr>
           <a:xfrm>
-            <a:off x="8412480" y="3886200"/>
-            <a:ext cx="3246120" cy="777240"/>
+            <a:off x="8321040" y="4709160"/>
+            <a:ext cx="3337560" cy="1188720"/>
           </a:xfrm>
           <a:prstGeom prst="rect">
             <a:avLst/>
@@ -10551,130 +9789,28 @@
               <a:buNone/>
             </a:pPr>
             <a:r>
-              <a:rPr lang="en-US" sz="1500" dirty="0">
+              <a:rPr lang="en-US" sz="2000" b="1" dirty="0">
                 <a:solidFill>
                   <a:srgbClr val="4A4A4A"/>
                 </a:solidFill>
               </a:rPr>
-              <a:t>食事で上がり、活動で下がる。その繰り返し</a:t>
-            </a:r>
-            <a:endParaRPr lang="en-US" sz="1500" dirty="0"/>
-          </a:p>
-        </p:txBody>
-      </p:sp>
-      <p:sp>
-        <p:nvSpPr>
-          <p:cNvPr id="30" name="Shape 23"/>
-          <p:cNvSpPr/>
-          <p:nvPr/>
-        </p:nvSpPr>
-        <p:spPr>
-          <a:xfrm>
-            <a:off x="7589520" y="4846320"/>
-            <a:ext cx="640080" cy="640080"/>
-          </a:xfrm>
-          <a:prstGeom prst="ellipse">
-            <a:avLst/>
-          </a:prstGeom>
-          <a:solidFill>
-            <a:srgbClr val="C8102E"/>
-          </a:solidFill>
-          <a:ln/>
-        </p:spPr>
-      </p:sp>
-      <p:pic>
-        <p:nvPicPr>
-          <p:cNvPr id="31" name="Image 5" descr="preencoded.png">    </p:cNvPr>
-          <p:cNvPicPr>
-            <a:picLocks noChangeAspect="1"/>
-          </p:cNvPicPr>
-          <p:nvPr/>
-        </p:nvPicPr>
-        <p:blipFill>
-          <a:blip r:embed="rId6"/>
-          <a:stretch>
-            <a:fillRect/>
-          </a:stretch>
-        </p:blipFill>
-        <p:spPr>
-          <a:xfrm>
-            <a:off x="7749540" y="5006340"/>
-            <a:ext cx="320040" cy="320040"/>
-          </a:xfrm>
-          <a:prstGeom prst="rect">
-            <a:avLst/>
-          </a:prstGeom>
-        </p:spPr>
-      </p:pic>
-      <p:sp>
-        <p:nvSpPr>
-          <p:cNvPr id="32" name="Text 24"/>
-          <p:cNvSpPr txBox="1"/>
-          <p:nvPr/>
-        </p:nvSpPr>
-        <p:spPr>
-          <a:xfrm>
-            <a:off x="8412480" y="4828032"/>
-            <a:ext cx="3246120" cy="411480"/>
-          </a:xfrm>
-          <a:prstGeom prst="rect">
-            <a:avLst/>
-          </a:prstGeom>
-          <a:noFill/>
-          <a:ln/>
-        </p:spPr>
-        <p:txBody>
-          <a:bodyPr wrap="square" lIns="0" tIns="0" rIns="0" bIns="0" rtlCol="0" anchor="ctr"/>
-          <a:lstStyle/>
+              <a:t>食事で上がり、活動で下がる。</a:t>
+            </a:r>
+            <a:endParaRPr lang="en-US" sz="2000" dirty="0"/>
+          </a:p>
           <a:p>
             <a:pPr indent="0" marL="0">
               <a:buNone/>
             </a:pPr>
             <a:r>
-              <a:rPr lang="en-US" sz="2100" b="1" dirty="0">
-                <a:solidFill>
-                  <a:srgbClr val="262626"/>
-                </a:solidFill>
-              </a:rPr>
-              <a:t>「予備群」を見逃すことも</a:t>
-            </a:r>
-            <a:endParaRPr lang="en-US" sz="2100" dirty="0"/>
-          </a:p>
-        </p:txBody>
-      </p:sp>
-      <p:sp>
-        <p:nvSpPr>
-          <p:cNvPr id="33" name="Text 25"/>
-          <p:cNvSpPr txBox="1"/>
-          <p:nvPr/>
-        </p:nvSpPr>
-        <p:spPr>
-          <a:xfrm>
-            <a:off x="8412480" y="5257800"/>
-            <a:ext cx="3246120" cy="777240"/>
-          </a:xfrm>
-          <a:prstGeom prst="rect">
-            <a:avLst/>
-          </a:prstGeom>
-          <a:noFill/>
-          <a:ln/>
-        </p:spPr>
-        <p:txBody>
-          <a:bodyPr wrap="square" lIns="0" tIns="0" rIns="0" bIns="0" rtlCol="0" anchor="t"/>
-          <a:lstStyle/>
-          <a:p>
-            <a:pPr indent="0" marL="0">
-              <a:buNone/>
-            </a:pPr>
-            <a:r>
-              <a:rPr lang="en-US" sz="1500" dirty="0">
+              <a:rPr lang="en-US" sz="2000" b="1" dirty="0">
                 <a:solidFill>
                   <a:srgbClr val="4A4A4A"/>
                 </a:solidFill>
               </a:rPr>
-              <a:t>空腹時血糖値は低く出ることがあり、血糖値スパイクに気づけない場合も</a:t>
-            </a:r>
-            <a:endParaRPr lang="en-US" sz="1500" dirty="0"/>
+              <a:t>その繰り返し</a:t>
+            </a:r>
+            <a:endParaRPr lang="en-US" sz="2000" dirty="0"/>
           </a:p>
         </p:txBody>
       </p:sp>
@@ -10818,7 +9954,7 @@
                   <a:srgbClr val="262626"/>
                 </a:solidFill>
               </a:rPr>
-              <a:t>ヘモグロビンA1c ── 血糖の“通信簿”</a:t>
+              <a:t>ヘモグロビンA1c</a:t>
             </a:r>
             <a:endParaRPr lang="en-US" sz="3200" dirty="0"/>
           </a:p>
@@ -10965,8 +10101,8 @@
         </p:nvSpPr>
         <p:spPr>
           <a:xfrm flipH="1">
-            <a:off x="1325880" y="3393299"/>
-            <a:ext cx="787959" cy="762616"/>
+            <a:off x="1188720" y="3393299"/>
+            <a:ext cx="925119" cy="762616"/>
           </a:xfrm>
           <a:prstGeom prst="line">
             <a:avLst/>
@@ -10988,8 +10124,8 @@
         </p:nvSpPr>
         <p:spPr>
           <a:xfrm>
-            <a:off x="411480" y="4155915"/>
-            <a:ext cx="1828800" cy="292608"/>
+            <a:off x="182880" y="4155915"/>
+            <a:ext cx="2011680" cy="347472"/>
           </a:xfrm>
           <a:prstGeom prst="rect">
             <a:avLst/>
@@ -11005,14 +10141,14 @@
               <a:buNone/>
             </a:pPr>
             <a:r>
-              <a:rPr lang="en-US" sz="1300" b="1" dirty="0">
+              <a:rPr lang="en-US" sz="1600" b="1" dirty="0">
                 <a:solidFill>
                   <a:srgbClr val="262626"/>
                 </a:solidFill>
               </a:rPr>
               <a:t>赤血球</a:t>
             </a:r>
-            <a:endParaRPr lang="en-US" sz="1300" dirty="0"/>
+            <a:endParaRPr lang="en-US" sz="1600" dirty="0"/>
           </a:p>
         </p:txBody>
       </p:sp>
@@ -11024,8 +10160,8 @@
         </p:nvSpPr>
         <p:spPr>
           <a:xfrm flipH="1">
-            <a:off x="2240280" y="3480255"/>
-            <a:ext cx="90948" cy="675661"/>
+            <a:off x="2103120" y="3480255"/>
+            <a:ext cx="228108" cy="675661"/>
           </a:xfrm>
           <a:prstGeom prst="line">
             <a:avLst/>
@@ -11047,8 +10183,8 @@
         </p:nvSpPr>
         <p:spPr>
           <a:xfrm>
-            <a:off x="1325880" y="4155915"/>
-            <a:ext cx="1828800" cy="292608"/>
+            <a:off x="1097280" y="4155915"/>
+            <a:ext cx="2011680" cy="347472"/>
           </a:xfrm>
           <a:prstGeom prst="rect">
             <a:avLst/>
@@ -11064,14 +10200,14 @@
               <a:buNone/>
             </a:pPr>
             <a:r>
-              <a:rPr lang="en-US" sz="1300" b="1" dirty="0">
+              <a:rPr lang="en-US" sz="1600" b="1" dirty="0">
                 <a:solidFill>
                   <a:srgbClr val="262626"/>
                 </a:solidFill>
               </a:rPr>
               <a:t>糖</a:t>
             </a:r>
-            <a:endParaRPr lang="en-US" sz="1300" dirty="0"/>
+            <a:endParaRPr lang="en-US" sz="1600" dirty="0"/>
           </a:p>
         </p:txBody>
       </p:sp>
@@ -11084,7 +10220,7 @@
         <p:spPr>
           <a:xfrm>
             <a:off x="2679050" y="3300546"/>
-            <a:ext cx="429910" cy="855369"/>
+            <a:ext cx="338470" cy="855369"/>
           </a:xfrm>
           <a:prstGeom prst="line">
             <a:avLst/>
@@ -11106,8 +10242,8 @@
         </p:nvSpPr>
         <p:spPr>
           <a:xfrm>
-            <a:off x="2194560" y="4155915"/>
-            <a:ext cx="1828800" cy="292608"/>
+            <a:off x="2011680" y="4155915"/>
+            <a:ext cx="2011680" cy="347472"/>
           </a:xfrm>
           <a:prstGeom prst="rect">
             <a:avLst/>
@@ -11123,14 +10259,14 @@
               <a:buNone/>
             </a:pPr>
             <a:r>
-              <a:rPr lang="en-US" sz="1300" b="1" dirty="0">
+              <a:rPr lang="en-US" sz="1600" b="1" dirty="0">
                 <a:solidFill>
                   <a:srgbClr val="262626"/>
                 </a:solidFill>
               </a:rPr>
               <a:t>ヘモグロビン</a:t>
             </a:r>
-            <a:endParaRPr lang="en-US" sz="1300" dirty="0"/>
+            <a:endParaRPr lang="en-US" sz="1600" dirty="0"/>
           </a:p>
         </p:txBody>
       </p:sp>
@@ -11142,8 +10278,8 @@
         </p:nvSpPr>
         <p:spPr>
           <a:xfrm>
-            <a:off x="4331204" y="3335329"/>
-            <a:ext cx="240796" cy="820586"/>
+            <a:off x="4287727" y="3500544"/>
+            <a:ext cx="284273" cy="655371"/>
           </a:xfrm>
           <a:prstGeom prst="line">
             <a:avLst/>
@@ -11165,8 +10301,8 @@
         </p:nvSpPr>
         <p:spPr>
           <a:xfrm>
-            <a:off x="3657600" y="4155915"/>
-            <a:ext cx="1828800" cy="292608"/>
+            <a:off x="3566160" y="4155915"/>
+            <a:ext cx="2011680" cy="347472"/>
           </a:xfrm>
           <a:prstGeom prst="rect">
             <a:avLst/>
@@ -11182,26 +10318,48 @@
               <a:buNone/>
             </a:pPr>
             <a:r>
-              <a:rPr lang="en-US" sz="1300" b="1" dirty="0">
+              <a:rPr lang="en-US" sz="1600" b="1" dirty="0">
                 <a:solidFill>
                   <a:srgbClr val="262626"/>
                 </a:solidFill>
               </a:rPr>
               <a:t>ヘモグロビンA1c</a:t>
             </a:r>
-            <a:endParaRPr lang="en-US" sz="1300" dirty="0"/>
-          </a:p>
-        </p:txBody>
-      </p:sp>
-      <p:sp>
-        <p:nvSpPr>
-          <p:cNvPr id="16" name="Text 13"/>
+            <a:endParaRPr lang="en-US" sz="1600" dirty="0"/>
+          </a:p>
+        </p:txBody>
+      </p:sp>
+      <p:sp>
+        <p:nvSpPr>
+          <p:cNvPr id="16" name="Shape 13"/>
+          <p:cNvSpPr/>
+          <p:nvPr/>
+        </p:nvSpPr>
+        <p:spPr>
+          <a:xfrm>
+            <a:off x="4113816" y="3283155"/>
+            <a:ext cx="266664" cy="220287"/>
+          </a:xfrm>
+          <a:prstGeom prst="ellipse">
+            <a:avLst/>
+          </a:prstGeom>
+          <a:ln w="25400">
+            <a:solidFill>
+              <a:srgbClr val="262626"/>
+            </a:solidFill>
+            <a:prstDash val="solid"/>
+          </a:ln>
+        </p:spPr>
+      </p:sp>
+      <p:sp>
+        <p:nvSpPr>
+          <p:cNvPr id="17" name="Text 14"/>
           <p:cNvSpPr txBox="1"/>
           <p:nvPr/>
         </p:nvSpPr>
         <p:spPr>
           <a:xfrm>
-            <a:off x="548640" y="4539963"/>
+            <a:off x="548640" y="4585683"/>
             <a:ext cx="2514600" cy="347472"/>
           </a:xfrm>
           <a:prstGeom prst="roundRect">
@@ -11235,7 +10393,7 @@
       </p:sp>
       <p:pic>
         <p:nvPicPr>
-          <p:cNvPr id="17" name="Image 1" descr="HbA1cが高い血管内の模式図">    </p:cNvPr>
+          <p:cNvPr id="18" name="Image 1" descr="HbA1cが高い血管内の模式図">    </p:cNvPr>
           <p:cNvPicPr>
             <a:picLocks noChangeAspect="1"/>
           </p:cNvPicPr>
@@ -11249,7 +10407,7 @@
         </p:blipFill>
         <p:spPr>
           <a:xfrm>
-            <a:off x="548640" y="4942299"/>
+            <a:off x="548640" y="4988019"/>
             <a:ext cx="4846320" cy="1246362"/>
           </a:xfrm>
           <a:prstGeom prst="rect">
@@ -11259,7 +10417,7 @@
       </p:pic>
       <p:sp>
         <p:nvSpPr>
-          <p:cNvPr id="18" name="Shape 14"/>
+          <p:cNvPr id="19" name="Shape 15"/>
           <p:cNvSpPr/>
           <p:nvPr/>
         </p:nvSpPr>
@@ -11281,7 +10439,7 @@
       </p:sp>
       <p:sp>
         <p:nvSpPr>
-          <p:cNvPr id="19" name="Text 15"/>
+          <p:cNvPr id="20" name="Text 16"/>
           <p:cNvSpPr txBox="1"/>
           <p:nvPr/>
         </p:nvSpPr>
@@ -11321,7 +10479,7 @@
       </p:sp>
       <p:sp>
         <p:nvSpPr>
-          <p:cNvPr id="20" name="Shape 16"/>
+          <p:cNvPr id="21" name="Shape 17"/>
           <p:cNvSpPr/>
           <p:nvPr/>
         </p:nvSpPr>
@@ -11341,7 +10499,7 @@
       </p:sp>
       <p:pic>
         <p:nvPicPr>
-          <p:cNvPr id="21" name="Image 2" descr="preencoded.png">    </p:cNvPr>
+          <p:cNvPr id="22" name="Image 2" descr="preencoded.png">    </p:cNvPr>
           <p:cNvPicPr>
             <a:picLocks noChangeAspect="1"/>
           </p:cNvPicPr>
@@ -11365,7 +10523,7 @@
       </p:pic>
       <p:sp>
         <p:nvSpPr>
-          <p:cNvPr id="22" name="Text 17"/>
+          <p:cNvPr id="23" name="Text 18"/>
           <p:cNvSpPr txBox="1"/>
           <p:nvPr/>
         </p:nvSpPr>
@@ -11401,7 +10559,7 @@
       </p:sp>
       <p:sp>
         <p:nvSpPr>
-          <p:cNvPr id="23" name="Shape 18"/>
+          <p:cNvPr id="24" name="Shape 19"/>
           <p:cNvSpPr/>
           <p:nvPr/>
         </p:nvSpPr>
@@ -11421,7 +10579,7 @@
       </p:sp>
       <p:pic>
         <p:nvPicPr>
-          <p:cNvPr id="24" name="Image 3" descr="preencoded.png">    </p:cNvPr>
+          <p:cNvPr id="25" name="Image 3" descr="preencoded.png">    </p:cNvPr>
           <p:cNvPicPr>
             <a:picLocks noChangeAspect="1"/>
           </p:cNvPicPr>
@@ -11445,7 +10603,7 @@
       </p:pic>
       <p:sp>
         <p:nvSpPr>
-          <p:cNvPr id="25" name="Text 19"/>
+          <p:cNvPr id="26" name="Text 20"/>
           <p:cNvSpPr txBox="1"/>
           <p:nvPr/>
         </p:nvSpPr>
@@ -11481,7 +10639,7 @@
       </p:sp>
       <p:sp>
         <p:nvSpPr>
-          <p:cNvPr id="26" name="Shape 20"/>
+          <p:cNvPr id="27" name="Shape 21"/>
           <p:cNvSpPr/>
           <p:nvPr/>
         </p:nvSpPr>
@@ -11503,7 +10661,7 @@
       </p:sp>
       <p:sp>
         <p:nvSpPr>
-          <p:cNvPr id="27" name="Text 21"/>
+          <p:cNvPr id="28" name="Text 22"/>
           <p:cNvSpPr txBox="1"/>
           <p:nvPr/>
         </p:nvSpPr>
@@ -11543,7 +10701,7 @@
       </p:sp>
       <p:sp>
         <p:nvSpPr>
-          <p:cNvPr id="28" name="Shape 22"/>
+          <p:cNvPr id="29" name="Shape 23"/>
           <p:cNvSpPr/>
           <p:nvPr/>
         </p:nvSpPr>
@@ -11567,7 +10725,7 @@
       </p:sp>
       <p:sp>
         <p:nvSpPr>
-          <p:cNvPr id="29" name="Shape 23"/>
+          <p:cNvPr id="30" name="Shape 24"/>
           <p:cNvSpPr/>
           <p:nvPr/>
         </p:nvSpPr>
@@ -11591,7 +10749,7 @@
       </p:sp>
       <p:sp>
         <p:nvSpPr>
-          <p:cNvPr id="30" name="Shape 24"/>
+          <p:cNvPr id="31" name="Shape 25"/>
           <p:cNvSpPr/>
           <p:nvPr/>
         </p:nvSpPr>
@@ -11615,7 +10773,7 @@
       </p:sp>
       <p:sp>
         <p:nvSpPr>
-          <p:cNvPr id="31" name="Text 25"/>
+          <p:cNvPr id="32" name="Text 26"/>
           <p:cNvSpPr txBox="1"/>
           <p:nvPr/>
         </p:nvSpPr>
@@ -11651,7 +10809,7 @@
       </p:sp>
       <p:sp>
         <p:nvSpPr>
-          <p:cNvPr id="32" name="Text 26"/>
+          <p:cNvPr id="33" name="Text 27"/>
           <p:cNvSpPr txBox="1"/>
           <p:nvPr/>
         </p:nvSpPr>
@@ -11687,7 +10845,7 @@
       </p:sp>
       <p:sp>
         <p:nvSpPr>
-          <p:cNvPr id="33" name="Text 27"/>
+          <p:cNvPr id="34" name="Text 28"/>
           <p:cNvSpPr txBox="1"/>
           <p:nvPr/>
         </p:nvSpPr>
@@ -11723,7 +10881,7 @@
       </p:sp>
       <p:sp>
         <p:nvSpPr>
-          <p:cNvPr id="34" name="Text 28"/>
+          <p:cNvPr id="35" name="Text 29"/>
           <p:cNvSpPr txBox="1"/>
           <p:nvPr/>
         </p:nvSpPr>
@@ -11759,7 +10917,7 @@
       </p:sp>
       <p:sp>
         <p:nvSpPr>
-          <p:cNvPr id="35" name="Text 29"/>
+          <p:cNvPr id="36" name="Text 30"/>
           <p:cNvSpPr txBox="1"/>
           <p:nvPr/>
         </p:nvSpPr>
@@ -11795,7 +10953,7 @@
       </p:sp>
       <p:sp>
         <p:nvSpPr>
-          <p:cNvPr id="36" name="Shape 30"/>
+          <p:cNvPr id="37" name="Shape 31"/>
           <p:cNvSpPr/>
           <p:nvPr/>
         </p:nvSpPr>
@@ -11818,7 +10976,7 @@
       </p:sp>
       <p:sp>
         <p:nvSpPr>
-          <p:cNvPr id="37" name="Shape 31"/>
+          <p:cNvPr id="38" name="Shape 32"/>
           <p:cNvSpPr/>
           <p:nvPr/>
         </p:nvSpPr>
